--- a/01 Classes/Aula 08 Desenvolvimento de Software  Java - Projeto Java Web 1.pptx
+++ b/01 Classes/Aula 08 Desenvolvimento de Software  Java - Projeto Java Web 1.pptx
@@ -5,7 +5,7 @@
     <p:sldMasterId id="2147483648" r:id="rId1"/>
   </p:sldMasterIdLst>
   <p:notesMasterIdLst>
-    <p:notesMasterId r:id="rId22"/>
+    <p:notesMasterId r:id="rId23"/>
   </p:notesMasterIdLst>
   <p:sldIdLst>
     <p:sldId id="256" r:id="rId2"/>
@@ -23,11 +23,12 @@
     <p:sldId id="451" r:id="rId14"/>
     <p:sldId id="452" r:id="rId15"/>
     <p:sldId id="458" r:id="rId16"/>
-    <p:sldId id="333" r:id="rId17"/>
-    <p:sldId id="323" r:id="rId18"/>
-    <p:sldId id="334" r:id="rId19"/>
-    <p:sldId id="337" r:id="rId20"/>
-    <p:sldId id="309" r:id="rId21"/>
+    <p:sldId id="459" r:id="rId17"/>
+    <p:sldId id="333" r:id="rId18"/>
+    <p:sldId id="323" r:id="rId19"/>
+    <p:sldId id="334" r:id="rId20"/>
+    <p:sldId id="337" r:id="rId21"/>
+    <p:sldId id="309" r:id="rId22"/>
   </p:sldIdLst>
   <p:sldSz cx="9144000" cy="5143500" type="screen16x9"/>
   <p:notesSz cx="6858000" cy="9144000"/>
@@ -960,7 +961,7 @@
     </p:spTree>
     <p:extLst>
       <p:ext uri="{BB962C8B-B14F-4D97-AF65-F5344CB8AC3E}">
-        <p14:creationId xmlns:p14="http://schemas.microsoft.com/office/powerpoint/2010/main" val="585304384"/>
+        <p14:creationId xmlns:p14="http://schemas.microsoft.com/office/powerpoint/2010/main" val="3772091737"/>
       </p:ext>
     </p:extLst>
   </p:cSld>
@@ -1026,7 +1027,7 @@
     </p:spTree>
     <p:extLst>
       <p:ext uri="{BB962C8B-B14F-4D97-AF65-F5344CB8AC3E}">
-        <p14:creationId xmlns:p14="http://schemas.microsoft.com/office/powerpoint/2010/main" val="2709569597"/>
+        <p14:creationId xmlns:p14="http://schemas.microsoft.com/office/powerpoint/2010/main" val="585304384"/>
       </p:ext>
     </p:extLst>
   </p:cSld>
@@ -1092,6 +1093,72 @@
     </p:spTree>
     <p:extLst>
       <p:ext uri="{BB962C8B-B14F-4D97-AF65-F5344CB8AC3E}">
+        <p14:creationId xmlns:p14="http://schemas.microsoft.com/office/powerpoint/2010/main" val="2709569597"/>
+      </p:ext>
+    </p:extLst>
+  </p:cSld>
+  <p:clrMapOvr>
+    <a:masterClrMapping/>
+  </p:clrMapOvr>
+</p:notes>
+</file>
+
+<file path=ppt/notesSlides/notesSlide18.xml><?xml version="1.0" encoding="utf-8"?>
+<p:notes xmlns:a="http://schemas.openxmlformats.org/drawingml/2006/main" xmlns:r="http://schemas.openxmlformats.org/officeDocument/2006/relationships" xmlns:p="http://schemas.openxmlformats.org/presentationml/2006/main">
+  <p:cSld>
+    <p:spTree>
+      <p:nvGrpSpPr>
+        <p:cNvPr id="1" name=""/>
+        <p:cNvGrpSpPr/>
+        <p:nvPr/>
+      </p:nvGrpSpPr>
+      <p:grpSpPr>
+        <a:xfrm>
+          <a:off x="0" y="0"/>
+          <a:ext cx="0" cy="0"/>
+          <a:chOff x="0" y="0"/>
+          <a:chExt cx="0" cy="0"/>
+        </a:xfrm>
+      </p:grpSpPr>
+      <p:sp>
+        <p:nvSpPr>
+          <p:cNvPr id="2" name="Espaço Reservado para Imagem de Slide 1"/>
+          <p:cNvSpPr>
+            <a:spLocks noGrp="1" noRot="1" noChangeAspect="1"/>
+          </p:cNvSpPr>
+          <p:nvPr>
+            <p:ph type="sldImg"/>
+          </p:nvPr>
+        </p:nvSpPr>
+        <p:spPr>
+          <a:xfrm>
+            <a:off x="381000" y="685800"/>
+            <a:ext cx="6096000" cy="3429000"/>
+          </a:xfrm>
+        </p:spPr>
+      </p:sp>
+      <p:sp>
+        <p:nvSpPr>
+          <p:cNvPr id="3" name="Espaço Reservado para Anotações 2"/>
+          <p:cNvSpPr>
+            <a:spLocks noGrp="1"/>
+          </p:cNvSpPr>
+          <p:nvPr>
+            <p:ph type="body" idx="1"/>
+          </p:nvPr>
+        </p:nvSpPr>
+        <p:spPr/>
+        <p:txBody>
+          <a:bodyPr/>
+          <a:lstStyle/>
+          <a:p>
+            <a:endParaRPr lang="pt-BR" dirty="0"/>
+          </a:p>
+        </p:txBody>
+      </p:sp>
+    </p:spTree>
+    <p:extLst>
+      <p:ext uri="{BB962C8B-B14F-4D97-AF65-F5344CB8AC3E}">
         <p14:creationId xmlns:p14="http://schemas.microsoft.com/office/powerpoint/2010/main" val="2296249050"/>
       </p:ext>
     </p:extLst>
@@ -1102,7 +1169,7 @@
 </p:notes>
 </file>
 
-<file path=ppt/notesSlides/notesSlide18.xml><?xml version="1.0" encoding="utf-8"?>
+<file path=ppt/notesSlides/notesSlide19.xml><?xml version="1.0" encoding="utf-8"?>
 <p:notes xmlns:a="http://schemas.openxmlformats.org/drawingml/2006/main" xmlns:r="http://schemas.openxmlformats.org/officeDocument/2006/relationships" xmlns:p="http://schemas.openxmlformats.org/presentationml/2006/main">
   <p:cSld>
     <p:spTree>
@@ -5204,6 +5271,171 @@
             <a:pPr marL="0" indent="0" algn="just">
               <a:buNone/>
             </a:pPr>
+            <a:r>
+              <a:rPr lang="pt-BR" sz="2000" dirty="0">
+                <a:solidFill>
+                  <a:schemeClr val="tx1"/>
+                </a:solidFill>
+                <a:latin typeface="Times New Roman" panose="02020603050405020304" pitchFamily="18" charset="0"/>
+                <a:cs typeface="Times New Roman" panose="02020603050405020304" pitchFamily="18" charset="0"/>
+              </a:rPr>
+              <a:t>		</a:t>
+            </a:r>
+            <a:r>
+              <a:rPr lang="pt-BR" sz="2000" dirty="0" err="1">
+                <a:solidFill>
+                  <a:schemeClr val="tx1"/>
+                </a:solidFill>
+                <a:latin typeface="Times New Roman" panose="02020603050405020304" pitchFamily="18" charset="0"/>
+                <a:cs typeface="Times New Roman" panose="02020603050405020304" pitchFamily="18" charset="0"/>
+              </a:rPr>
+              <a:t>server.port</a:t>
+            </a:r>
+            <a:r>
+              <a:rPr lang="pt-BR" sz="2000" dirty="0">
+                <a:solidFill>
+                  <a:schemeClr val="tx1"/>
+                </a:solidFill>
+                <a:latin typeface="Times New Roman" panose="02020603050405020304" pitchFamily="18" charset="0"/>
+                <a:cs typeface="Times New Roman" panose="02020603050405020304" pitchFamily="18" charset="0"/>
+              </a:rPr>
+              <a:t> = ??? </a:t>
+            </a:r>
+            <a:r>
+              <a:rPr lang="pt-BR" sz="2000" b="1" dirty="0">
+                <a:solidFill>
+                  <a:schemeClr val="tx1"/>
+                </a:solidFill>
+                <a:latin typeface="Times New Roman" panose="02020603050405020304" pitchFamily="18" charset="0"/>
+                <a:cs typeface="Times New Roman" panose="02020603050405020304" pitchFamily="18" charset="0"/>
+              </a:rPr>
+              <a:t>nova porta, se necessário</a:t>
+            </a:r>
+          </a:p>
+          <a:p>
+            <a:pPr marL="0" indent="0" algn="just">
+              <a:buNone/>
+            </a:pPr>
+            <a:r>
+              <a:rPr lang="pt-BR" sz="2000" b="1" dirty="0">
+                <a:solidFill>
+                  <a:srgbClr val="FF0000"/>
+                </a:solidFill>
+                <a:latin typeface="Times New Roman" panose="02020603050405020304" pitchFamily="18" charset="0"/>
+                <a:cs typeface="Times New Roman" panose="02020603050405020304" pitchFamily="18" charset="0"/>
+              </a:rPr>
+              <a:t># dados de </a:t>
+            </a:r>
+            <a:r>
+              <a:rPr lang="pt-BR" sz="2000" b="1" dirty="0" err="1">
+                <a:solidFill>
+                  <a:srgbClr val="FF0000"/>
+                </a:solidFill>
+                <a:latin typeface="Times New Roman" panose="02020603050405020304" pitchFamily="18" charset="0"/>
+                <a:cs typeface="Times New Roman" panose="02020603050405020304" pitchFamily="18" charset="0"/>
+              </a:rPr>
+              <a:t>conexação</a:t>
+            </a:r>
+            <a:r>
+              <a:rPr lang="pt-BR" sz="2000" b="1" dirty="0">
+                <a:solidFill>
+                  <a:srgbClr val="FF0000"/>
+                </a:solidFill>
+                <a:latin typeface="Times New Roman" panose="02020603050405020304" pitchFamily="18" charset="0"/>
+                <a:cs typeface="Times New Roman" panose="02020603050405020304" pitchFamily="18" charset="0"/>
+              </a:rPr>
+              <a:t> com o BD H2</a:t>
+            </a:r>
+          </a:p>
+          <a:p>
+            <a:pPr marL="0" indent="0" algn="just">
+              <a:buNone/>
+            </a:pPr>
+            <a:r>
+              <a:rPr lang="pt-BR" sz="2000" b="1" dirty="0">
+                <a:solidFill>
+                  <a:schemeClr val="tx1"/>
+                </a:solidFill>
+                <a:latin typeface="Times New Roman" panose="02020603050405020304" pitchFamily="18" charset="0"/>
+                <a:cs typeface="Times New Roman" panose="02020603050405020304" pitchFamily="18" charset="0"/>
+              </a:rPr>
+              <a:t>spring.</a:t>
+            </a:r>
+            <a:r>
+              <a:rPr lang="pt-BR" sz="2000" b="1" dirty="0">
+                <a:solidFill>
+                  <a:srgbClr val="0070C0"/>
+                </a:solidFill>
+                <a:latin typeface="Times New Roman" panose="02020603050405020304" pitchFamily="18" charset="0"/>
+                <a:cs typeface="Times New Roman" panose="02020603050405020304" pitchFamily="18" charset="0"/>
+              </a:rPr>
+              <a:t>datasource</a:t>
+            </a:r>
+            <a:r>
+              <a:rPr lang="pt-BR" sz="2000" dirty="0">
+                <a:solidFill>
+                  <a:schemeClr val="tx1"/>
+                </a:solidFill>
+                <a:latin typeface="Times New Roman" panose="02020603050405020304" pitchFamily="18" charset="0"/>
+                <a:cs typeface="Times New Roman" panose="02020603050405020304" pitchFamily="18" charset="0"/>
+              </a:rPr>
+              <a:t>.url = jdbc:h2:mem:testdb</a:t>
+            </a:r>
+          </a:p>
+          <a:p>
+            <a:pPr marL="0" indent="0" algn="just">
+              <a:buNone/>
+            </a:pPr>
+            <a:r>
+              <a:rPr lang="pt-BR" sz="2000" b="1" dirty="0" err="1">
+                <a:solidFill>
+                  <a:schemeClr val="tx1"/>
+                </a:solidFill>
+                <a:latin typeface="Times New Roman" panose="02020603050405020304" pitchFamily="18" charset="0"/>
+                <a:cs typeface="Times New Roman" panose="02020603050405020304" pitchFamily="18" charset="0"/>
+              </a:rPr>
+              <a:t>spring.</a:t>
+            </a:r>
+            <a:r>
+              <a:rPr lang="pt-BR" sz="2000" b="1" dirty="0" err="1">
+                <a:solidFill>
+                  <a:srgbClr val="0070C0"/>
+                </a:solidFill>
+                <a:latin typeface="Times New Roman" panose="02020603050405020304" pitchFamily="18" charset="0"/>
+                <a:cs typeface="Times New Roman" panose="02020603050405020304" pitchFamily="18" charset="0"/>
+              </a:rPr>
+              <a:t>datasource</a:t>
+            </a:r>
+            <a:r>
+              <a:rPr lang="pt-BR" sz="2000" dirty="0" err="1">
+                <a:solidFill>
+                  <a:schemeClr val="tx1"/>
+                </a:solidFill>
+                <a:latin typeface="Times New Roman" panose="02020603050405020304" pitchFamily="18" charset="0"/>
+                <a:cs typeface="Times New Roman" panose="02020603050405020304" pitchFamily="18" charset="0"/>
+              </a:rPr>
+              <a:t>.username</a:t>
+            </a:r>
+            <a:r>
+              <a:rPr lang="pt-BR" sz="2000" dirty="0">
+                <a:solidFill>
+                  <a:schemeClr val="tx1"/>
+                </a:solidFill>
+                <a:latin typeface="Times New Roman" panose="02020603050405020304" pitchFamily="18" charset="0"/>
+                <a:cs typeface="Times New Roman" panose="02020603050405020304" pitchFamily="18" charset="0"/>
+              </a:rPr>
+              <a:t> = </a:t>
+            </a:r>
+            <a:r>
+              <a:rPr lang="pt-BR" sz="2000" dirty="0" err="1">
+                <a:solidFill>
+                  <a:schemeClr val="tx1"/>
+                </a:solidFill>
+                <a:latin typeface="Times New Roman" panose="02020603050405020304" pitchFamily="18" charset="0"/>
+                <a:cs typeface="Times New Roman" panose="02020603050405020304" pitchFamily="18" charset="0"/>
+              </a:rPr>
+              <a:t>sa</a:t>
+            </a:r>
             <a:endParaRPr lang="pt-BR" sz="2000" dirty="0">
               <a:solidFill>
                 <a:schemeClr val="tx1"/>
@@ -5217,126 +5449,24 @@
               <a:buNone/>
             </a:pPr>
             <a:r>
-              <a:rPr lang="pt-BR" sz="2000" b="1" dirty="0">
-                <a:solidFill>
-                  <a:srgbClr val="FF0000"/>
-                </a:solidFill>
-                <a:latin typeface="Times New Roman" panose="02020603050405020304" pitchFamily="18" charset="0"/>
-                <a:cs typeface="Times New Roman" panose="02020603050405020304" pitchFamily="18" charset="0"/>
-              </a:rPr>
-              <a:t># dados de </a:t>
-            </a:r>
-            <a:r>
               <a:rPr lang="pt-BR" sz="2000" b="1" dirty="0" err="1">
                 <a:solidFill>
-                  <a:srgbClr val="FF0000"/>
-                </a:solidFill>
-                <a:latin typeface="Times New Roman" panose="02020603050405020304" pitchFamily="18" charset="0"/>
-                <a:cs typeface="Times New Roman" panose="02020603050405020304" pitchFamily="18" charset="0"/>
-              </a:rPr>
-              <a:t>conexação</a:t>
-            </a:r>
-            <a:r>
-              <a:rPr lang="pt-BR" sz="2000" b="1" dirty="0">
-                <a:solidFill>
-                  <a:srgbClr val="FF0000"/>
-                </a:solidFill>
-                <a:latin typeface="Times New Roman" panose="02020603050405020304" pitchFamily="18" charset="0"/>
-                <a:cs typeface="Times New Roman" panose="02020603050405020304" pitchFamily="18" charset="0"/>
-              </a:rPr>
-              <a:t> com o BD H2</a:t>
-            </a:r>
-          </a:p>
-          <a:p>
-            <a:pPr marL="0" indent="0" algn="just">
-              <a:buNone/>
-            </a:pPr>
-            <a:r>
-              <a:rPr lang="pt-BR" sz="2000" b="1" dirty="0">
-                <a:solidFill>
-                  <a:schemeClr val="tx1"/>
-                </a:solidFill>
-                <a:latin typeface="Times New Roman" panose="02020603050405020304" pitchFamily="18" charset="0"/>
-                <a:cs typeface="Times New Roman" panose="02020603050405020304" pitchFamily="18" charset="0"/>
-              </a:rPr>
-              <a:t>spring.datasource</a:t>
-            </a:r>
-            <a:r>
-              <a:rPr lang="pt-BR" sz="2000" dirty="0">
-                <a:solidFill>
-                  <a:schemeClr val="tx1"/>
-                </a:solidFill>
-                <a:latin typeface="Times New Roman" panose="02020603050405020304" pitchFamily="18" charset="0"/>
-                <a:cs typeface="Times New Roman" panose="02020603050405020304" pitchFamily="18" charset="0"/>
-              </a:rPr>
-              <a:t>.url = jdbc:h2:mem:testdb</a:t>
-            </a:r>
-          </a:p>
-          <a:p>
-            <a:pPr marL="0" indent="0" algn="just">
-              <a:buNone/>
-            </a:pPr>
+                  <a:schemeClr val="tx1"/>
+                </a:solidFill>
+                <a:latin typeface="Times New Roman" panose="02020603050405020304" pitchFamily="18" charset="0"/>
+                <a:cs typeface="Times New Roman" panose="02020603050405020304" pitchFamily="18" charset="0"/>
+              </a:rPr>
+              <a:t>spring.</a:t>
+            </a:r>
             <a:r>
               <a:rPr lang="pt-BR" sz="2000" b="1" dirty="0" err="1">
                 <a:solidFill>
-                  <a:schemeClr val="tx1"/>
-                </a:solidFill>
-                <a:latin typeface="Times New Roman" panose="02020603050405020304" pitchFamily="18" charset="0"/>
-                <a:cs typeface="Times New Roman" panose="02020603050405020304" pitchFamily="18" charset="0"/>
-              </a:rPr>
-              <a:t>spring.datasource</a:t>
-            </a:r>
-            <a:r>
-              <a:rPr lang="pt-BR" sz="2000" dirty="0" err="1">
-                <a:solidFill>
-                  <a:schemeClr val="tx1"/>
-                </a:solidFill>
-                <a:latin typeface="Times New Roman" panose="02020603050405020304" pitchFamily="18" charset="0"/>
-                <a:cs typeface="Times New Roman" panose="02020603050405020304" pitchFamily="18" charset="0"/>
-              </a:rPr>
-              <a:t>.username</a:t>
-            </a:r>
-            <a:r>
-              <a:rPr lang="pt-BR" sz="2000" dirty="0">
-                <a:solidFill>
-                  <a:schemeClr val="tx1"/>
-                </a:solidFill>
-                <a:latin typeface="Times New Roman" panose="02020603050405020304" pitchFamily="18" charset="0"/>
-                <a:cs typeface="Times New Roman" panose="02020603050405020304" pitchFamily="18" charset="0"/>
-              </a:rPr>
-              <a:t> = </a:t>
-            </a:r>
-            <a:r>
-              <a:rPr lang="pt-BR" sz="2000" dirty="0" err="1">
-                <a:solidFill>
-                  <a:schemeClr val="tx1"/>
-                </a:solidFill>
-                <a:latin typeface="Times New Roman" panose="02020603050405020304" pitchFamily="18" charset="0"/>
-                <a:cs typeface="Times New Roman" panose="02020603050405020304" pitchFamily="18" charset="0"/>
-              </a:rPr>
-              <a:t>sa</a:t>
-            </a:r>
-            <a:endParaRPr lang="pt-BR" sz="2000" dirty="0">
-              <a:solidFill>
-                <a:schemeClr val="tx1"/>
-              </a:solidFill>
-              <a:latin typeface="Times New Roman" panose="02020603050405020304" pitchFamily="18" charset="0"/>
-              <a:cs typeface="Times New Roman" panose="02020603050405020304" pitchFamily="18" charset="0"/>
-            </a:endParaRPr>
-          </a:p>
-          <a:p>
-            <a:pPr marL="0" indent="0" algn="just">
-              <a:buNone/>
-            </a:pPr>
-            <a:r>
-              <a:rPr lang="pt-BR" sz="2000" b="1" dirty="0" err="1">
-                <a:solidFill>
-                  <a:schemeClr val="tx1"/>
-                </a:solidFill>
-                <a:latin typeface="Times New Roman" panose="02020603050405020304" pitchFamily="18" charset="0"/>
-                <a:cs typeface="Times New Roman" panose="02020603050405020304" pitchFamily="18" charset="0"/>
-              </a:rPr>
-              <a:t>spring.datasource</a:t>
+                  <a:srgbClr val="0070C0"/>
+                </a:solidFill>
+                <a:latin typeface="Times New Roman" panose="02020603050405020304" pitchFamily="18" charset="0"/>
+                <a:cs typeface="Times New Roman" panose="02020603050405020304" pitchFamily="18" charset="0"/>
+              </a:rPr>
+              <a:t>datasource</a:t>
             </a:r>
             <a:r>
               <a:rPr lang="pt-BR" sz="2000" dirty="0" err="1">
@@ -5418,7 +5548,27 @@
                 <a:latin typeface="Times New Roman" panose="02020603050405020304" pitchFamily="18" charset="0"/>
                 <a:cs typeface="Times New Roman" panose="02020603050405020304" pitchFamily="18" charset="0"/>
               </a:rPr>
-              <a:t>spring.h2.console</a:t>
+              <a:t>spring.</a:t>
+            </a:r>
+            <a:r>
+              <a:rPr lang="pt-BR" sz="2000" b="1" dirty="0">
+                <a:solidFill>
+                  <a:srgbClr val="0070C0"/>
+                </a:solidFill>
+                <a:latin typeface="Times New Roman" panose="02020603050405020304" pitchFamily="18" charset="0"/>
+                <a:cs typeface="Times New Roman" panose="02020603050405020304" pitchFamily="18" charset="0"/>
+              </a:rPr>
+              <a:t>h2</a:t>
+            </a:r>
+            <a:r>
+              <a:rPr lang="pt-BR" sz="2000" b="1" dirty="0">
+                <a:solidFill>
+                  <a:schemeClr val="tx1"/>
+                </a:solidFill>
+                <a:latin typeface="Times New Roman" panose="02020603050405020304" pitchFamily="18" charset="0"/>
+                <a:cs typeface="Times New Roman" panose="02020603050405020304" pitchFamily="18" charset="0"/>
+              </a:rPr>
+              <a:t>.console</a:t>
             </a:r>
             <a:r>
               <a:rPr lang="pt-BR" sz="2000" dirty="0">
@@ -5460,7 +5610,27 @@
                 <a:latin typeface="Times New Roman" panose="02020603050405020304" pitchFamily="18" charset="0"/>
                 <a:cs typeface="Times New Roman" panose="02020603050405020304" pitchFamily="18" charset="0"/>
               </a:rPr>
-              <a:t>spring.h2.console</a:t>
+              <a:t>spring.</a:t>
+            </a:r>
+            <a:r>
+              <a:rPr lang="pt-BR" sz="2000" b="1" dirty="0">
+                <a:solidFill>
+                  <a:srgbClr val="0070C0"/>
+                </a:solidFill>
+                <a:latin typeface="Times New Roman" panose="02020603050405020304" pitchFamily="18" charset="0"/>
+                <a:cs typeface="Times New Roman" panose="02020603050405020304" pitchFamily="18" charset="0"/>
+              </a:rPr>
+              <a:t>h2</a:t>
+            </a:r>
+            <a:r>
+              <a:rPr lang="pt-BR" sz="2000" b="1" dirty="0">
+                <a:solidFill>
+                  <a:schemeClr val="tx1"/>
+                </a:solidFill>
+                <a:latin typeface="Times New Roman" panose="02020603050405020304" pitchFamily="18" charset="0"/>
+                <a:cs typeface="Times New Roman" panose="02020603050405020304" pitchFamily="18" charset="0"/>
+              </a:rPr>
+              <a:t>.console</a:t>
             </a:r>
             <a:r>
               <a:rPr lang="pt-BR" sz="2000" dirty="0">
@@ -5732,7 +5902,17 @@
                 <a:latin typeface="Times New Roman" panose="02020603050405020304" pitchFamily="18" charset="0"/>
                 <a:cs typeface="Times New Roman" panose="02020603050405020304" pitchFamily="18" charset="0"/>
               </a:rPr>
-              <a:t>spring.jpa</a:t>
+              <a:t>spring.</a:t>
+            </a:r>
+            <a:r>
+              <a:rPr lang="pt-BR" sz="2000" b="1" dirty="0" err="1">
+                <a:solidFill>
+                  <a:srgbClr val="0070C0"/>
+                </a:solidFill>
+                <a:latin typeface="Times New Roman" panose="02020603050405020304" pitchFamily="18" charset="0"/>
+                <a:cs typeface="Times New Roman" panose="02020603050405020304" pitchFamily="18" charset="0"/>
+              </a:rPr>
+              <a:t>jpa</a:t>
             </a:r>
             <a:r>
               <a:rPr lang="pt-BR" sz="2000" dirty="0" err="1">
@@ -5784,7 +5964,17 @@
                 <a:latin typeface="Times New Roman" panose="02020603050405020304" pitchFamily="18" charset="0"/>
                 <a:cs typeface="Times New Roman" panose="02020603050405020304" pitchFamily="18" charset="0"/>
               </a:rPr>
-              <a:t>spring.jpa</a:t>
+              <a:t>spring.</a:t>
+            </a:r>
+            <a:r>
+              <a:rPr lang="pt-BR" sz="2000" b="1" dirty="0" err="1">
+                <a:solidFill>
+                  <a:srgbClr val="0070C0"/>
+                </a:solidFill>
+                <a:latin typeface="Times New Roman" panose="02020603050405020304" pitchFamily="18" charset="0"/>
+                <a:cs typeface="Times New Roman" panose="02020603050405020304" pitchFamily="18" charset="0"/>
+              </a:rPr>
+              <a:t>jpa</a:t>
             </a:r>
             <a:r>
               <a:rPr lang="pt-BR" sz="2000" dirty="0" err="1">
@@ -6096,7 +6286,47 @@
                 <a:latin typeface="Times New Roman" panose="02020603050405020304" pitchFamily="18" charset="0"/>
                 <a:cs typeface="Times New Roman" panose="02020603050405020304" pitchFamily="18" charset="0"/>
               </a:rPr>
-              <a:t>	    Botão direito do mouse, abrir arquivo modo texto.	</a:t>
+              <a:t>	    Botão </a:t>
+            </a:r>
+            <a:r>
+              <a:rPr lang="pt-BR" sz="2000" b="1" dirty="0">
+                <a:solidFill>
+                  <a:srgbClr val="FF0000"/>
+                </a:solidFill>
+                <a:latin typeface="Times New Roman" panose="02020603050405020304" pitchFamily="18" charset="0"/>
+                <a:cs typeface="Times New Roman" panose="02020603050405020304" pitchFamily="18" charset="0"/>
+              </a:rPr>
+              <a:t>direito do mouse</a:t>
+            </a:r>
+            <a:r>
+              <a:rPr lang="pt-BR" sz="2000" dirty="0">
+                <a:solidFill>
+                  <a:schemeClr val="tx1"/>
+                </a:solidFill>
+                <a:latin typeface="Times New Roman" panose="02020603050405020304" pitchFamily="18" charset="0"/>
+                <a:cs typeface="Times New Roman" panose="02020603050405020304" pitchFamily="18" charset="0"/>
+              </a:rPr>
+              <a:t>, abrir arquivo </a:t>
+            </a:r>
+            <a:r>
+              <a:rPr lang="pt-BR" sz="2000" b="1" dirty="0">
+                <a:solidFill>
+                  <a:schemeClr val="tx1"/>
+                </a:solidFill>
+                <a:latin typeface="Times New Roman" panose="02020603050405020304" pitchFamily="18" charset="0"/>
+                <a:cs typeface="Times New Roman" panose="02020603050405020304" pitchFamily="18" charset="0"/>
+              </a:rPr>
+              <a:t>modo texto</a:t>
+            </a:r>
+            <a:r>
+              <a:rPr lang="pt-BR" sz="2000" dirty="0">
+                <a:solidFill>
+                  <a:schemeClr val="tx1"/>
+                </a:solidFill>
+                <a:latin typeface="Times New Roman" panose="02020603050405020304" pitchFamily="18" charset="0"/>
+                <a:cs typeface="Times New Roman" panose="02020603050405020304" pitchFamily="18" charset="0"/>
+              </a:rPr>
+              <a:t>.	</a:t>
             </a:r>
           </a:p>
           <a:p>
@@ -6115,7 +6345,384 @@
             <a:pPr marL="0" indent="0" algn="just">
               <a:buNone/>
             </a:pPr>
-            <a:endParaRPr lang="pt-BR" sz="2000" dirty="0">
+            <a:r>
+              <a:rPr lang="pt-BR" sz="2000" dirty="0">
+                <a:solidFill>
+                  <a:schemeClr val="tx1"/>
+                </a:solidFill>
+                <a:latin typeface="Times New Roman" panose="02020603050405020304" pitchFamily="18" charset="0"/>
+                <a:cs typeface="Times New Roman" panose="02020603050405020304" pitchFamily="18" charset="0"/>
+              </a:rPr>
+              <a:t>...</a:t>
+            </a:r>
+            <a:r>
+              <a:rPr lang="pt-BR" sz="2000" b="1" dirty="0">
+                <a:solidFill>
+                  <a:schemeClr val="tx1"/>
+                </a:solidFill>
+                <a:latin typeface="Times New Roman" panose="02020603050405020304" pitchFamily="18" charset="0"/>
+                <a:cs typeface="Times New Roman" panose="02020603050405020304" pitchFamily="18" charset="0"/>
+              </a:rPr>
+              <a:t> </a:t>
+            </a:r>
+            <a:r>
+              <a:rPr lang="pt-BR" sz="2000" b="1" dirty="0" err="1">
+                <a:solidFill>
+                  <a:srgbClr val="FF0000"/>
+                </a:solidFill>
+                <a:latin typeface="Times New Roman" panose="02020603050405020304" pitchFamily="18" charset="0"/>
+                <a:cs typeface="Times New Roman" panose="02020603050405020304" pitchFamily="18" charset="0"/>
+              </a:rPr>
+              <a:t>insert</a:t>
+            </a:r>
+            <a:r>
+              <a:rPr lang="pt-BR" sz="2000" b="1" dirty="0">
+                <a:solidFill>
+                  <a:srgbClr val="FF0000"/>
+                </a:solidFill>
+                <a:latin typeface="Times New Roman" panose="02020603050405020304" pitchFamily="18" charset="0"/>
+                <a:cs typeface="Times New Roman" panose="02020603050405020304" pitchFamily="18" charset="0"/>
+              </a:rPr>
+              <a:t> entidade </a:t>
+            </a:r>
+            <a:r>
+              <a:rPr lang="pt-BR" sz="2000" b="1" dirty="0" err="1">
+                <a:solidFill>
+                  <a:srgbClr val="0070C0"/>
+                </a:solidFill>
+                <a:latin typeface="Times New Roman" panose="02020603050405020304" pitchFamily="18" charset="0"/>
+                <a:cs typeface="Times New Roman" panose="02020603050405020304" pitchFamily="18" charset="0"/>
+              </a:rPr>
+              <a:t>tb_department</a:t>
+            </a:r>
+            <a:endParaRPr lang="pt-BR" sz="2000" b="1" dirty="0">
+              <a:solidFill>
+                <a:srgbClr val="0070C0"/>
+              </a:solidFill>
+              <a:latin typeface="Times New Roman" panose="02020603050405020304" pitchFamily="18" charset="0"/>
+              <a:cs typeface="Times New Roman" panose="02020603050405020304" pitchFamily="18" charset="0"/>
+            </a:endParaRPr>
+          </a:p>
+          <a:p>
+            <a:pPr marL="0" indent="0" algn="just">
+              <a:buNone/>
+            </a:pPr>
+            <a:r>
+              <a:rPr lang="pt-BR" sz="2000" b="1" dirty="0" err="1">
+                <a:solidFill>
+                  <a:schemeClr val="tx1"/>
+                </a:solidFill>
+                <a:latin typeface="Times New Roman" panose="02020603050405020304" pitchFamily="18" charset="0"/>
+                <a:cs typeface="Times New Roman" panose="02020603050405020304" pitchFamily="18" charset="0"/>
+              </a:rPr>
+              <a:t>insert</a:t>
+            </a:r>
+            <a:r>
+              <a:rPr lang="pt-BR" sz="2000" dirty="0">
+                <a:solidFill>
+                  <a:schemeClr val="tx1"/>
+                </a:solidFill>
+                <a:latin typeface="Times New Roman" panose="02020603050405020304" pitchFamily="18" charset="0"/>
+                <a:cs typeface="Times New Roman" panose="02020603050405020304" pitchFamily="18" charset="0"/>
+              </a:rPr>
+              <a:t> </a:t>
+            </a:r>
+            <a:r>
+              <a:rPr lang="pt-BR" sz="2000" b="1" dirty="0" err="1">
+                <a:solidFill>
+                  <a:schemeClr val="tx1"/>
+                </a:solidFill>
+                <a:latin typeface="Times New Roman" panose="02020603050405020304" pitchFamily="18" charset="0"/>
+                <a:cs typeface="Times New Roman" panose="02020603050405020304" pitchFamily="18" charset="0"/>
+              </a:rPr>
+              <a:t>into</a:t>
+            </a:r>
+            <a:r>
+              <a:rPr lang="pt-BR" sz="2000" dirty="0">
+                <a:solidFill>
+                  <a:schemeClr val="tx1"/>
+                </a:solidFill>
+                <a:latin typeface="Times New Roman" panose="02020603050405020304" pitchFamily="18" charset="0"/>
+                <a:cs typeface="Times New Roman" panose="02020603050405020304" pitchFamily="18" charset="0"/>
+              </a:rPr>
+              <a:t> </a:t>
+            </a:r>
+            <a:r>
+              <a:rPr lang="pt-BR" sz="2000" dirty="0" err="1">
+                <a:solidFill>
+                  <a:schemeClr val="tx1"/>
+                </a:solidFill>
+                <a:latin typeface="Times New Roman" panose="02020603050405020304" pitchFamily="18" charset="0"/>
+                <a:cs typeface="Times New Roman" panose="02020603050405020304" pitchFamily="18" charset="0"/>
+              </a:rPr>
+              <a:t>tb_department</a:t>
+            </a:r>
+            <a:r>
+              <a:rPr lang="pt-BR" sz="2000" dirty="0">
+                <a:solidFill>
+                  <a:schemeClr val="tx1"/>
+                </a:solidFill>
+                <a:latin typeface="Times New Roman" panose="02020603050405020304" pitchFamily="18" charset="0"/>
+                <a:cs typeface="Times New Roman" panose="02020603050405020304" pitchFamily="18" charset="0"/>
+              </a:rPr>
+              <a:t> (</a:t>
+            </a:r>
+            <a:r>
+              <a:rPr lang="pt-BR" sz="2000" dirty="0" err="1">
+                <a:solidFill>
+                  <a:schemeClr val="tx1"/>
+                </a:solidFill>
+                <a:latin typeface="Times New Roman" panose="02020603050405020304" pitchFamily="18" charset="0"/>
+                <a:cs typeface="Times New Roman" panose="02020603050405020304" pitchFamily="18" charset="0"/>
+              </a:rPr>
+              <a:t>name</a:t>
+            </a:r>
+            <a:r>
+              <a:rPr lang="pt-BR" sz="2000" dirty="0">
+                <a:solidFill>
+                  <a:schemeClr val="tx1"/>
+                </a:solidFill>
+                <a:latin typeface="Times New Roman" panose="02020603050405020304" pitchFamily="18" charset="0"/>
+                <a:cs typeface="Times New Roman" panose="02020603050405020304" pitchFamily="18" charset="0"/>
+              </a:rPr>
+              <a:t>) </a:t>
+            </a:r>
+            <a:r>
+              <a:rPr lang="pt-BR" sz="2000" b="1" dirty="0" err="1">
+                <a:solidFill>
+                  <a:schemeClr val="tx1"/>
+                </a:solidFill>
+                <a:latin typeface="Times New Roman" panose="02020603050405020304" pitchFamily="18" charset="0"/>
+                <a:cs typeface="Times New Roman" panose="02020603050405020304" pitchFamily="18" charset="0"/>
+              </a:rPr>
+              <a:t>values</a:t>
+            </a:r>
+            <a:r>
+              <a:rPr lang="pt-BR" sz="2000" dirty="0">
+                <a:solidFill>
+                  <a:schemeClr val="tx1"/>
+                </a:solidFill>
+                <a:latin typeface="Times New Roman" panose="02020603050405020304" pitchFamily="18" charset="0"/>
+                <a:cs typeface="Times New Roman" panose="02020603050405020304" pitchFamily="18" charset="0"/>
+              </a:rPr>
+              <a:t> ('Suporte');</a:t>
+            </a:r>
+          </a:p>
+          <a:p>
+            <a:pPr marL="0" indent="0" algn="just">
+              <a:buNone/>
+            </a:pPr>
+            <a:r>
+              <a:rPr lang="pt-BR" sz="2000" b="1" dirty="0" err="1">
+                <a:solidFill>
+                  <a:schemeClr val="tx1"/>
+                </a:solidFill>
+                <a:latin typeface="Times New Roman" panose="02020603050405020304" pitchFamily="18" charset="0"/>
+                <a:cs typeface="Times New Roman" panose="02020603050405020304" pitchFamily="18" charset="0"/>
+              </a:rPr>
+              <a:t>insert</a:t>
+            </a:r>
+            <a:r>
+              <a:rPr lang="pt-BR" sz="2000" b="1" dirty="0">
+                <a:solidFill>
+                  <a:schemeClr val="tx1"/>
+                </a:solidFill>
+                <a:latin typeface="Times New Roman" panose="02020603050405020304" pitchFamily="18" charset="0"/>
+                <a:cs typeface="Times New Roman" panose="02020603050405020304" pitchFamily="18" charset="0"/>
+              </a:rPr>
+              <a:t> </a:t>
+            </a:r>
+            <a:r>
+              <a:rPr lang="pt-BR" sz="2000" b="1" dirty="0" err="1">
+                <a:solidFill>
+                  <a:schemeClr val="tx1"/>
+                </a:solidFill>
+                <a:latin typeface="Times New Roman" panose="02020603050405020304" pitchFamily="18" charset="0"/>
+                <a:cs typeface="Times New Roman" panose="02020603050405020304" pitchFamily="18" charset="0"/>
+              </a:rPr>
+              <a:t>into</a:t>
+            </a:r>
+            <a:r>
+              <a:rPr lang="pt-BR" sz="2000" b="1" dirty="0">
+                <a:solidFill>
+                  <a:schemeClr val="tx1"/>
+                </a:solidFill>
+                <a:latin typeface="Times New Roman" panose="02020603050405020304" pitchFamily="18" charset="0"/>
+                <a:cs typeface="Times New Roman" panose="02020603050405020304" pitchFamily="18" charset="0"/>
+              </a:rPr>
+              <a:t> </a:t>
+            </a:r>
+            <a:r>
+              <a:rPr lang="pt-BR" sz="2000" dirty="0" err="1">
+                <a:solidFill>
+                  <a:schemeClr val="tx1"/>
+                </a:solidFill>
+                <a:latin typeface="Times New Roman" panose="02020603050405020304" pitchFamily="18" charset="0"/>
+                <a:cs typeface="Times New Roman" panose="02020603050405020304" pitchFamily="18" charset="0"/>
+              </a:rPr>
+              <a:t>tb_department</a:t>
+            </a:r>
+            <a:r>
+              <a:rPr lang="pt-BR" sz="2000" dirty="0">
+                <a:solidFill>
+                  <a:schemeClr val="tx1"/>
+                </a:solidFill>
+                <a:latin typeface="Times New Roman" panose="02020603050405020304" pitchFamily="18" charset="0"/>
+                <a:cs typeface="Times New Roman" panose="02020603050405020304" pitchFamily="18" charset="0"/>
+              </a:rPr>
+              <a:t> (</a:t>
+            </a:r>
+            <a:r>
+              <a:rPr lang="pt-BR" sz="2000" dirty="0" err="1">
+                <a:solidFill>
+                  <a:schemeClr val="tx1"/>
+                </a:solidFill>
+                <a:latin typeface="Times New Roman" panose="02020603050405020304" pitchFamily="18" charset="0"/>
+                <a:cs typeface="Times New Roman" panose="02020603050405020304" pitchFamily="18" charset="0"/>
+              </a:rPr>
+              <a:t>name</a:t>
+            </a:r>
+            <a:r>
+              <a:rPr lang="pt-BR" sz="2000" dirty="0">
+                <a:solidFill>
+                  <a:schemeClr val="tx1"/>
+                </a:solidFill>
+                <a:latin typeface="Times New Roman" panose="02020603050405020304" pitchFamily="18" charset="0"/>
+                <a:cs typeface="Times New Roman" panose="02020603050405020304" pitchFamily="18" charset="0"/>
+              </a:rPr>
+              <a:t>) </a:t>
+            </a:r>
+            <a:r>
+              <a:rPr lang="pt-BR" sz="2000" b="1" dirty="0" err="1">
+                <a:solidFill>
+                  <a:schemeClr val="tx1"/>
+                </a:solidFill>
+                <a:latin typeface="Times New Roman" panose="02020603050405020304" pitchFamily="18" charset="0"/>
+                <a:cs typeface="Times New Roman" panose="02020603050405020304" pitchFamily="18" charset="0"/>
+              </a:rPr>
+              <a:t>values</a:t>
+            </a:r>
+            <a:r>
+              <a:rPr lang="pt-BR" sz="2000" dirty="0">
+                <a:solidFill>
+                  <a:schemeClr val="tx1"/>
+                </a:solidFill>
+                <a:latin typeface="Times New Roman" panose="02020603050405020304" pitchFamily="18" charset="0"/>
+                <a:cs typeface="Times New Roman" panose="02020603050405020304" pitchFamily="18" charset="0"/>
+              </a:rPr>
+              <a:t> ('RH');</a:t>
+            </a:r>
+          </a:p>
+          <a:p>
+            <a:pPr marL="0" indent="0" algn="just">
+              <a:buNone/>
+            </a:pPr>
+            <a:r>
+              <a:rPr lang="pt-BR" sz="2000" b="1" dirty="0" err="1">
+                <a:solidFill>
+                  <a:schemeClr val="tx1"/>
+                </a:solidFill>
+                <a:latin typeface="Times New Roman" panose="02020603050405020304" pitchFamily="18" charset="0"/>
+                <a:cs typeface="Times New Roman" panose="02020603050405020304" pitchFamily="18" charset="0"/>
+              </a:rPr>
+              <a:t>insert</a:t>
+            </a:r>
+            <a:r>
+              <a:rPr lang="pt-BR" sz="2000" b="1" dirty="0">
+                <a:solidFill>
+                  <a:schemeClr val="tx1"/>
+                </a:solidFill>
+                <a:latin typeface="Times New Roman" panose="02020603050405020304" pitchFamily="18" charset="0"/>
+                <a:cs typeface="Times New Roman" panose="02020603050405020304" pitchFamily="18" charset="0"/>
+              </a:rPr>
+              <a:t> </a:t>
+            </a:r>
+            <a:r>
+              <a:rPr lang="pt-BR" sz="2000" b="1" dirty="0" err="1">
+                <a:solidFill>
+                  <a:schemeClr val="tx1"/>
+                </a:solidFill>
+                <a:latin typeface="Times New Roman" panose="02020603050405020304" pitchFamily="18" charset="0"/>
+                <a:cs typeface="Times New Roman" panose="02020603050405020304" pitchFamily="18" charset="0"/>
+              </a:rPr>
+              <a:t>into</a:t>
+            </a:r>
+            <a:r>
+              <a:rPr lang="pt-BR" sz="2000" b="1" dirty="0">
+                <a:solidFill>
+                  <a:schemeClr val="tx1"/>
+                </a:solidFill>
+                <a:latin typeface="Times New Roman" panose="02020603050405020304" pitchFamily="18" charset="0"/>
+                <a:cs typeface="Times New Roman" panose="02020603050405020304" pitchFamily="18" charset="0"/>
+              </a:rPr>
+              <a:t> </a:t>
+            </a:r>
+            <a:r>
+              <a:rPr lang="pt-BR" sz="2000" dirty="0" err="1">
+                <a:solidFill>
+                  <a:schemeClr val="tx1"/>
+                </a:solidFill>
+                <a:latin typeface="Times New Roman" panose="02020603050405020304" pitchFamily="18" charset="0"/>
+                <a:cs typeface="Times New Roman" panose="02020603050405020304" pitchFamily="18" charset="0"/>
+              </a:rPr>
+              <a:t>tb_department</a:t>
+            </a:r>
+            <a:r>
+              <a:rPr lang="pt-BR" sz="2000" dirty="0">
+                <a:solidFill>
+                  <a:schemeClr val="tx1"/>
+                </a:solidFill>
+                <a:latin typeface="Times New Roman" panose="02020603050405020304" pitchFamily="18" charset="0"/>
+                <a:cs typeface="Times New Roman" panose="02020603050405020304" pitchFamily="18" charset="0"/>
+              </a:rPr>
+              <a:t> (</a:t>
+            </a:r>
+            <a:r>
+              <a:rPr lang="pt-BR" sz="2000" dirty="0" err="1">
+                <a:solidFill>
+                  <a:schemeClr val="tx1"/>
+                </a:solidFill>
+                <a:latin typeface="Times New Roman" panose="02020603050405020304" pitchFamily="18" charset="0"/>
+                <a:cs typeface="Times New Roman" panose="02020603050405020304" pitchFamily="18" charset="0"/>
+              </a:rPr>
+              <a:t>name</a:t>
+            </a:r>
+            <a:r>
+              <a:rPr lang="pt-BR" sz="2000" dirty="0">
+                <a:solidFill>
+                  <a:schemeClr val="tx1"/>
+                </a:solidFill>
+                <a:latin typeface="Times New Roman" panose="02020603050405020304" pitchFamily="18" charset="0"/>
+                <a:cs typeface="Times New Roman" panose="02020603050405020304" pitchFamily="18" charset="0"/>
+              </a:rPr>
+              <a:t>) </a:t>
+            </a:r>
+            <a:r>
+              <a:rPr lang="pt-BR" sz="2000" b="1" dirty="0" err="1">
+                <a:solidFill>
+                  <a:schemeClr val="tx1"/>
+                </a:solidFill>
+                <a:latin typeface="Times New Roman" panose="02020603050405020304" pitchFamily="18" charset="0"/>
+                <a:cs typeface="Times New Roman" panose="02020603050405020304" pitchFamily="18" charset="0"/>
+              </a:rPr>
+              <a:t>values</a:t>
+            </a:r>
+            <a:r>
+              <a:rPr lang="pt-BR" sz="2000" dirty="0">
+                <a:solidFill>
+                  <a:schemeClr val="tx1"/>
+                </a:solidFill>
+                <a:latin typeface="Times New Roman" panose="02020603050405020304" pitchFamily="18" charset="0"/>
+                <a:cs typeface="Times New Roman" panose="02020603050405020304" pitchFamily="18" charset="0"/>
+              </a:rPr>
+              <a:t> ('DEV’);</a:t>
+            </a:r>
+          </a:p>
+          <a:p>
+            <a:pPr marL="0" indent="0" algn="just">
+              <a:buNone/>
+            </a:pPr>
+            <a:endParaRPr lang="pt-BR" sz="2000" b="1" dirty="0">
               <a:solidFill>
                 <a:schemeClr val="tx1"/>
               </a:solidFill>
@@ -6128,6 +6735,26 @@
               <a:buNone/>
             </a:pPr>
             <a:r>
+              <a:rPr lang="pt-BR" sz="2000" b="1" dirty="0">
+                <a:solidFill>
+                  <a:srgbClr val="FF0000"/>
+                </a:solidFill>
+                <a:latin typeface="Times New Roman" panose="02020603050405020304" pitchFamily="18" charset="0"/>
+                <a:cs typeface="Times New Roman" panose="02020603050405020304" pitchFamily="18" charset="0"/>
+              </a:rPr>
+              <a:t>Atenção</a:t>
+            </a:r>
+            <a:r>
+              <a:rPr lang="pt-BR" sz="2000" dirty="0">
+                <a:solidFill>
+                  <a:schemeClr val="tx1"/>
+                </a:solidFill>
+                <a:latin typeface="Times New Roman" panose="02020603050405020304" pitchFamily="18" charset="0"/>
+                <a:cs typeface="Times New Roman" panose="02020603050405020304" pitchFamily="18" charset="0"/>
+              </a:rPr>
+              <a:t>: No </a:t>
+            </a:r>
+            <a:r>
               <a:rPr lang="pt-BR" sz="2000" dirty="0" err="1">
                 <a:solidFill>
                   <a:schemeClr val="tx1"/>
@@ -6145,19 +6772,39 @@
                 <a:latin typeface="Times New Roman" panose="02020603050405020304" pitchFamily="18" charset="0"/>
                 <a:cs typeface="Times New Roman" panose="02020603050405020304" pitchFamily="18" charset="0"/>
               </a:rPr>
+              <a:t>, os </a:t>
+            </a:r>
+            <a:r>
+              <a:rPr lang="pt-BR" sz="2000" b="1" dirty="0">
+                <a:solidFill>
+                  <a:schemeClr val="tx1"/>
+                </a:solidFill>
+                <a:latin typeface="Times New Roman" panose="02020603050405020304" pitchFamily="18" charset="0"/>
+                <a:cs typeface="Times New Roman" panose="02020603050405020304" pitchFamily="18" charset="0"/>
+              </a:rPr>
+              <a:t>valores </a:t>
+            </a:r>
+            <a:r>
+              <a:rPr lang="pt-BR" sz="2000" b="1" dirty="0" err="1">
+                <a:solidFill>
+                  <a:schemeClr val="tx1"/>
+                </a:solidFill>
+                <a:latin typeface="Times New Roman" panose="02020603050405020304" pitchFamily="18" charset="0"/>
+                <a:cs typeface="Times New Roman" panose="02020603050405020304" pitchFamily="18" charset="0"/>
+              </a:rPr>
+              <a:t>strings</a:t>
+            </a:r>
+            <a:r>
+              <a:rPr lang="pt-BR" sz="2000" b="1" dirty="0">
+                <a:solidFill>
+                  <a:schemeClr val="tx1"/>
+                </a:solidFill>
+                <a:latin typeface="Times New Roman" panose="02020603050405020304" pitchFamily="18" charset="0"/>
+                <a:cs typeface="Times New Roman" panose="02020603050405020304" pitchFamily="18" charset="0"/>
+              </a:rPr>
               <a:t> </a:t>
             </a:r>
             <a:r>
-              <a:rPr lang="pt-BR" sz="2000" dirty="0" err="1">
-                <a:solidFill>
-                  <a:schemeClr val="tx1"/>
-                </a:solidFill>
-                <a:latin typeface="Times New Roman" panose="02020603050405020304" pitchFamily="18" charset="0"/>
-                <a:cs typeface="Times New Roman" panose="02020603050405020304" pitchFamily="18" charset="0"/>
-              </a:rPr>
-              <a:t>into</a:t>
-            </a:r>
-            <a:r>
               <a:rPr lang="pt-BR" sz="2000" dirty="0">
                 <a:solidFill>
                   <a:schemeClr val="tx1"/>
@@ -6165,17 +6812,17 @@
                 <a:latin typeface="Times New Roman" panose="02020603050405020304" pitchFamily="18" charset="0"/>
                 <a:cs typeface="Times New Roman" panose="02020603050405020304" pitchFamily="18" charset="0"/>
               </a:rPr>
-              <a:t> </a:t>
-            </a:r>
-            <a:r>
-              <a:rPr lang="pt-BR" sz="2000" dirty="0" err="1">
-                <a:solidFill>
-                  <a:schemeClr val="tx1"/>
-                </a:solidFill>
-                <a:latin typeface="Times New Roman" panose="02020603050405020304" pitchFamily="18" charset="0"/>
-                <a:cs typeface="Times New Roman" panose="02020603050405020304" pitchFamily="18" charset="0"/>
-              </a:rPr>
-              <a:t>tb_department</a:t>
+              <a:t>devem ser com </a:t>
+            </a:r>
+            <a:r>
+              <a:rPr lang="pt-BR" sz="2000" b="1" dirty="0">
+                <a:solidFill>
+                  <a:srgbClr val="FF0000"/>
+                </a:solidFill>
+                <a:latin typeface="Times New Roman" panose="02020603050405020304" pitchFamily="18" charset="0"/>
+                <a:cs typeface="Times New Roman" panose="02020603050405020304" pitchFamily="18" charset="0"/>
+              </a:rPr>
+              <a:t>aspas simples</a:t>
             </a:r>
             <a:r>
               <a:rPr lang="pt-BR" sz="2000" dirty="0">
@@ -6185,257 +6832,7 @@
                 <a:latin typeface="Times New Roman" panose="02020603050405020304" pitchFamily="18" charset="0"/>
                 <a:cs typeface="Times New Roman" panose="02020603050405020304" pitchFamily="18" charset="0"/>
               </a:rPr>
-              <a:t> (</a:t>
-            </a:r>
-            <a:r>
-              <a:rPr lang="pt-BR" sz="2000" dirty="0" err="1">
-                <a:solidFill>
-                  <a:schemeClr val="tx1"/>
-                </a:solidFill>
-                <a:latin typeface="Times New Roman" panose="02020603050405020304" pitchFamily="18" charset="0"/>
-                <a:cs typeface="Times New Roman" panose="02020603050405020304" pitchFamily="18" charset="0"/>
-              </a:rPr>
-              <a:t>name</a:t>
-            </a:r>
-            <a:r>
-              <a:rPr lang="pt-BR" sz="2000" dirty="0">
-                <a:solidFill>
-                  <a:schemeClr val="tx1"/>
-                </a:solidFill>
-                <a:latin typeface="Times New Roman" panose="02020603050405020304" pitchFamily="18" charset="0"/>
-                <a:cs typeface="Times New Roman" panose="02020603050405020304" pitchFamily="18" charset="0"/>
-              </a:rPr>
-              <a:t>) </a:t>
-            </a:r>
-            <a:r>
-              <a:rPr lang="pt-BR" sz="2000" dirty="0" err="1">
-                <a:solidFill>
-                  <a:schemeClr val="tx1"/>
-                </a:solidFill>
-                <a:latin typeface="Times New Roman" panose="02020603050405020304" pitchFamily="18" charset="0"/>
-                <a:cs typeface="Times New Roman" panose="02020603050405020304" pitchFamily="18" charset="0"/>
-              </a:rPr>
-              <a:t>values</a:t>
-            </a:r>
-            <a:r>
-              <a:rPr lang="pt-BR" sz="2000" dirty="0">
-                <a:solidFill>
-                  <a:schemeClr val="tx1"/>
-                </a:solidFill>
-                <a:latin typeface="Times New Roman" panose="02020603050405020304" pitchFamily="18" charset="0"/>
-                <a:cs typeface="Times New Roman" panose="02020603050405020304" pitchFamily="18" charset="0"/>
-              </a:rPr>
-              <a:t> ('Suporte');</a:t>
-            </a:r>
-          </a:p>
-          <a:p>
-            <a:pPr marL="0" indent="0" algn="just">
-              <a:buNone/>
-            </a:pPr>
-            <a:r>
-              <a:rPr lang="pt-BR" sz="2000" dirty="0" err="1">
-                <a:solidFill>
-                  <a:schemeClr val="tx1"/>
-                </a:solidFill>
-                <a:latin typeface="Times New Roman" panose="02020603050405020304" pitchFamily="18" charset="0"/>
-                <a:cs typeface="Times New Roman" panose="02020603050405020304" pitchFamily="18" charset="0"/>
-              </a:rPr>
-              <a:t>insert</a:t>
-            </a:r>
-            <a:r>
-              <a:rPr lang="pt-BR" sz="2000" dirty="0">
-                <a:solidFill>
-                  <a:schemeClr val="tx1"/>
-                </a:solidFill>
-                <a:latin typeface="Times New Roman" panose="02020603050405020304" pitchFamily="18" charset="0"/>
-                <a:cs typeface="Times New Roman" panose="02020603050405020304" pitchFamily="18" charset="0"/>
-              </a:rPr>
-              <a:t> </a:t>
-            </a:r>
-            <a:r>
-              <a:rPr lang="pt-BR" sz="2000" dirty="0" err="1">
-                <a:solidFill>
-                  <a:schemeClr val="tx1"/>
-                </a:solidFill>
-                <a:latin typeface="Times New Roman" panose="02020603050405020304" pitchFamily="18" charset="0"/>
-                <a:cs typeface="Times New Roman" panose="02020603050405020304" pitchFamily="18" charset="0"/>
-              </a:rPr>
-              <a:t>into</a:t>
-            </a:r>
-            <a:r>
-              <a:rPr lang="pt-BR" sz="2000" dirty="0">
-                <a:solidFill>
-                  <a:schemeClr val="tx1"/>
-                </a:solidFill>
-                <a:latin typeface="Times New Roman" panose="02020603050405020304" pitchFamily="18" charset="0"/>
-                <a:cs typeface="Times New Roman" panose="02020603050405020304" pitchFamily="18" charset="0"/>
-              </a:rPr>
-              <a:t> </a:t>
-            </a:r>
-            <a:r>
-              <a:rPr lang="pt-BR" sz="2000" dirty="0" err="1">
-                <a:solidFill>
-                  <a:schemeClr val="tx1"/>
-                </a:solidFill>
-                <a:latin typeface="Times New Roman" panose="02020603050405020304" pitchFamily="18" charset="0"/>
-                <a:cs typeface="Times New Roman" panose="02020603050405020304" pitchFamily="18" charset="0"/>
-              </a:rPr>
-              <a:t>tb_department</a:t>
-            </a:r>
-            <a:r>
-              <a:rPr lang="pt-BR" sz="2000" dirty="0">
-                <a:solidFill>
-                  <a:schemeClr val="tx1"/>
-                </a:solidFill>
-                <a:latin typeface="Times New Roman" panose="02020603050405020304" pitchFamily="18" charset="0"/>
-                <a:cs typeface="Times New Roman" panose="02020603050405020304" pitchFamily="18" charset="0"/>
-              </a:rPr>
-              <a:t> (</a:t>
-            </a:r>
-            <a:r>
-              <a:rPr lang="pt-BR" sz="2000" dirty="0" err="1">
-                <a:solidFill>
-                  <a:schemeClr val="tx1"/>
-                </a:solidFill>
-                <a:latin typeface="Times New Roman" panose="02020603050405020304" pitchFamily="18" charset="0"/>
-                <a:cs typeface="Times New Roman" panose="02020603050405020304" pitchFamily="18" charset="0"/>
-              </a:rPr>
-              <a:t>name</a:t>
-            </a:r>
-            <a:r>
-              <a:rPr lang="pt-BR" sz="2000" dirty="0">
-                <a:solidFill>
-                  <a:schemeClr val="tx1"/>
-                </a:solidFill>
-                <a:latin typeface="Times New Roman" panose="02020603050405020304" pitchFamily="18" charset="0"/>
-                <a:cs typeface="Times New Roman" panose="02020603050405020304" pitchFamily="18" charset="0"/>
-              </a:rPr>
-              <a:t>) </a:t>
-            </a:r>
-            <a:r>
-              <a:rPr lang="pt-BR" sz="2000" dirty="0" err="1">
-                <a:solidFill>
-                  <a:schemeClr val="tx1"/>
-                </a:solidFill>
-                <a:latin typeface="Times New Roman" panose="02020603050405020304" pitchFamily="18" charset="0"/>
-                <a:cs typeface="Times New Roman" panose="02020603050405020304" pitchFamily="18" charset="0"/>
-              </a:rPr>
-              <a:t>values</a:t>
-            </a:r>
-            <a:r>
-              <a:rPr lang="pt-BR" sz="2000" dirty="0">
-                <a:solidFill>
-                  <a:schemeClr val="tx1"/>
-                </a:solidFill>
-                <a:latin typeface="Times New Roman" panose="02020603050405020304" pitchFamily="18" charset="0"/>
-                <a:cs typeface="Times New Roman" panose="02020603050405020304" pitchFamily="18" charset="0"/>
-              </a:rPr>
-              <a:t> ('RH');</a:t>
-            </a:r>
-          </a:p>
-          <a:p>
-            <a:pPr marL="0" indent="0" algn="just">
-              <a:buNone/>
-            </a:pPr>
-            <a:r>
-              <a:rPr lang="pt-BR" sz="2000" dirty="0" err="1">
-                <a:solidFill>
-                  <a:schemeClr val="tx1"/>
-                </a:solidFill>
-                <a:latin typeface="Times New Roman" panose="02020603050405020304" pitchFamily="18" charset="0"/>
-                <a:cs typeface="Times New Roman" panose="02020603050405020304" pitchFamily="18" charset="0"/>
-              </a:rPr>
-              <a:t>insert</a:t>
-            </a:r>
-            <a:r>
-              <a:rPr lang="pt-BR" sz="2000" dirty="0">
-                <a:solidFill>
-                  <a:schemeClr val="tx1"/>
-                </a:solidFill>
-                <a:latin typeface="Times New Roman" panose="02020603050405020304" pitchFamily="18" charset="0"/>
-                <a:cs typeface="Times New Roman" panose="02020603050405020304" pitchFamily="18" charset="0"/>
-              </a:rPr>
-              <a:t> </a:t>
-            </a:r>
-            <a:r>
-              <a:rPr lang="pt-BR" sz="2000" dirty="0" err="1">
-                <a:solidFill>
-                  <a:schemeClr val="tx1"/>
-                </a:solidFill>
-                <a:latin typeface="Times New Roman" panose="02020603050405020304" pitchFamily="18" charset="0"/>
-                <a:cs typeface="Times New Roman" panose="02020603050405020304" pitchFamily="18" charset="0"/>
-              </a:rPr>
-              <a:t>into</a:t>
-            </a:r>
-            <a:r>
-              <a:rPr lang="pt-BR" sz="2000" dirty="0">
-                <a:solidFill>
-                  <a:schemeClr val="tx1"/>
-                </a:solidFill>
-                <a:latin typeface="Times New Roman" panose="02020603050405020304" pitchFamily="18" charset="0"/>
-                <a:cs typeface="Times New Roman" panose="02020603050405020304" pitchFamily="18" charset="0"/>
-              </a:rPr>
-              <a:t> </a:t>
-            </a:r>
-            <a:r>
-              <a:rPr lang="pt-BR" sz="2000" dirty="0" err="1">
-                <a:solidFill>
-                  <a:schemeClr val="tx1"/>
-                </a:solidFill>
-                <a:latin typeface="Times New Roman" panose="02020603050405020304" pitchFamily="18" charset="0"/>
-                <a:cs typeface="Times New Roman" panose="02020603050405020304" pitchFamily="18" charset="0"/>
-              </a:rPr>
-              <a:t>tb_department</a:t>
-            </a:r>
-            <a:r>
-              <a:rPr lang="pt-BR" sz="2000" dirty="0">
-                <a:solidFill>
-                  <a:schemeClr val="tx1"/>
-                </a:solidFill>
-                <a:latin typeface="Times New Roman" panose="02020603050405020304" pitchFamily="18" charset="0"/>
-                <a:cs typeface="Times New Roman" panose="02020603050405020304" pitchFamily="18" charset="0"/>
-              </a:rPr>
-              <a:t> (</a:t>
-            </a:r>
-            <a:r>
-              <a:rPr lang="pt-BR" sz="2000" dirty="0" err="1">
-                <a:solidFill>
-                  <a:schemeClr val="tx1"/>
-                </a:solidFill>
-                <a:latin typeface="Times New Roman" panose="02020603050405020304" pitchFamily="18" charset="0"/>
-                <a:cs typeface="Times New Roman" panose="02020603050405020304" pitchFamily="18" charset="0"/>
-              </a:rPr>
-              <a:t>name</a:t>
-            </a:r>
-            <a:r>
-              <a:rPr lang="pt-BR" sz="2000" dirty="0">
-                <a:solidFill>
-                  <a:schemeClr val="tx1"/>
-                </a:solidFill>
-                <a:latin typeface="Times New Roman" panose="02020603050405020304" pitchFamily="18" charset="0"/>
-                <a:cs typeface="Times New Roman" panose="02020603050405020304" pitchFamily="18" charset="0"/>
-              </a:rPr>
-              <a:t>) </a:t>
-            </a:r>
-            <a:r>
-              <a:rPr lang="pt-BR" sz="2000" dirty="0" err="1">
-                <a:solidFill>
-                  <a:schemeClr val="tx1"/>
-                </a:solidFill>
-                <a:latin typeface="Times New Roman" panose="02020603050405020304" pitchFamily="18" charset="0"/>
-                <a:cs typeface="Times New Roman" panose="02020603050405020304" pitchFamily="18" charset="0"/>
-              </a:rPr>
-              <a:t>values</a:t>
-            </a:r>
-            <a:r>
-              <a:rPr lang="pt-BR" sz="2000" dirty="0">
-                <a:solidFill>
-                  <a:schemeClr val="tx1"/>
-                </a:solidFill>
-                <a:latin typeface="Times New Roman" panose="02020603050405020304" pitchFamily="18" charset="0"/>
-                <a:cs typeface="Times New Roman" panose="02020603050405020304" pitchFamily="18" charset="0"/>
-              </a:rPr>
-              <a:t> ('DEV');</a:t>
+              <a:t>.</a:t>
             </a:r>
           </a:p>
         </p:txBody>
@@ -6571,6 +6968,16 @@
               <a:t> </a:t>
             </a:r>
             <a:r>
+              <a:rPr lang="pt-BR" sz="1800" b="1" dirty="0" err="1">
+                <a:solidFill>
+                  <a:srgbClr val="FF0000"/>
+                </a:solidFill>
+                <a:latin typeface="Times New Roman" panose="02020603050405020304" pitchFamily="18" charset="0"/>
+                <a:cs typeface="Times New Roman" panose="02020603050405020304" pitchFamily="18" charset="0"/>
+              </a:rPr>
+              <a:t>insert</a:t>
+            </a:r>
+            <a:r>
               <a:rPr lang="pt-BR" sz="1800" b="1" dirty="0">
                 <a:solidFill>
                   <a:srgbClr val="FF0000"/>
@@ -6578,8 +6985,25 @@
                 <a:latin typeface="Times New Roman" panose="02020603050405020304" pitchFamily="18" charset="0"/>
                 <a:cs typeface="Times New Roman" panose="02020603050405020304" pitchFamily="18" charset="0"/>
               </a:rPr>
-              <a:t>CONTINUAÇÃO</a:t>
-            </a:r>
+              <a:t> entidade </a:t>
+            </a:r>
+            <a:r>
+              <a:rPr lang="pt-BR" sz="1800" b="1" dirty="0" err="1">
+                <a:solidFill>
+                  <a:srgbClr val="0070C0"/>
+                </a:solidFill>
+                <a:latin typeface="Times New Roman" panose="02020603050405020304" pitchFamily="18" charset="0"/>
+                <a:cs typeface="Times New Roman" panose="02020603050405020304" pitchFamily="18" charset="0"/>
+              </a:rPr>
+              <a:t>tb_user</a:t>
+            </a:r>
+            <a:endParaRPr lang="pt-BR" sz="1800" b="1" dirty="0">
+              <a:solidFill>
+                <a:srgbClr val="0070C0"/>
+              </a:solidFill>
+              <a:latin typeface="Times New Roman" panose="02020603050405020304" pitchFamily="18" charset="0"/>
+              <a:cs typeface="Times New Roman" panose="02020603050405020304" pitchFamily="18" charset="0"/>
+            </a:endParaRPr>
           </a:p>
           <a:p>
             <a:pPr marL="0" indent="0" algn="just">
@@ -6598,6 +7022,46 @@
               <a:buNone/>
             </a:pPr>
             <a:r>
+              <a:rPr lang="pt-BR" sz="1800" b="1" dirty="0" err="1">
+                <a:solidFill>
+                  <a:schemeClr val="tx1"/>
+                </a:solidFill>
+                <a:latin typeface="Times New Roman" panose="02020603050405020304" pitchFamily="18" charset="0"/>
+                <a:cs typeface="Times New Roman" panose="02020603050405020304" pitchFamily="18" charset="0"/>
+              </a:rPr>
+              <a:t>insert</a:t>
+            </a:r>
+            <a:r>
+              <a:rPr lang="pt-BR" sz="1800" b="1" dirty="0">
+                <a:solidFill>
+                  <a:schemeClr val="tx1"/>
+                </a:solidFill>
+                <a:latin typeface="Times New Roman" panose="02020603050405020304" pitchFamily="18" charset="0"/>
+                <a:cs typeface="Times New Roman" panose="02020603050405020304" pitchFamily="18" charset="0"/>
+              </a:rPr>
+              <a:t> </a:t>
+            </a:r>
+            <a:r>
+              <a:rPr lang="pt-BR" sz="1800" b="1" dirty="0" err="1">
+                <a:solidFill>
+                  <a:schemeClr val="tx1"/>
+                </a:solidFill>
+                <a:latin typeface="Times New Roman" panose="02020603050405020304" pitchFamily="18" charset="0"/>
+                <a:cs typeface="Times New Roman" panose="02020603050405020304" pitchFamily="18" charset="0"/>
+              </a:rPr>
+              <a:t>into</a:t>
+            </a:r>
+            <a:r>
+              <a:rPr lang="pt-BR" sz="1800" b="1" dirty="0">
+                <a:solidFill>
+                  <a:schemeClr val="tx1"/>
+                </a:solidFill>
+                <a:latin typeface="Times New Roman" panose="02020603050405020304" pitchFamily="18" charset="0"/>
+                <a:cs typeface="Times New Roman" panose="02020603050405020304" pitchFamily="18" charset="0"/>
+              </a:rPr>
+              <a:t> </a:t>
+            </a:r>
+            <a:r>
               <a:rPr lang="pt-BR" sz="1800" dirty="0" err="1">
                 <a:solidFill>
                   <a:schemeClr val="tx1"/>
@@ -6605,9 +7069,174 @@
                 <a:latin typeface="Times New Roman" panose="02020603050405020304" pitchFamily="18" charset="0"/>
                 <a:cs typeface="Times New Roman" panose="02020603050405020304" pitchFamily="18" charset="0"/>
               </a:rPr>
+              <a:t>tb_user</a:t>
+            </a:r>
+            <a:r>
+              <a:rPr lang="pt-BR" sz="1800" dirty="0">
+                <a:solidFill>
+                  <a:schemeClr val="tx1"/>
+                </a:solidFill>
+                <a:latin typeface="Times New Roman" panose="02020603050405020304" pitchFamily="18" charset="0"/>
+                <a:cs typeface="Times New Roman" panose="02020603050405020304" pitchFamily="18" charset="0"/>
+              </a:rPr>
+              <a:t> (</a:t>
+            </a:r>
+            <a:r>
+              <a:rPr lang="pt-BR" sz="1800" dirty="0" err="1">
+                <a:solidFill>
+                  <a:schemeClr val="tx1"/>
+                </a:solidFill>
+                <a:latin typeface="Times New Roman" panose="02020603050405020304" pitchFamily="18" charset="0"/>
+                <a:cs typeface="Times New Roman" panose="02020603050405020304" pitchFamily="18" charset="0"/>
+              </a:rPr>
+              <a:t>department_id</a:t>
+            </a:r>
+            <a:r>
+              <a:rPr lang="pt-BR" sz="1800" dirty="0">
+                <a:solidFill>
+                  <a:schemeClr val="tx1"/>
+                </a:solidFill>
+                <a:latin typeface="Times New Roman" panose="02020603050405020304" pitchFamily="18" charset="0"/>
+                <a:cs typeface="Times New Roman" panose="02020603050405020304" pitchFamily="18" charset="0"/>
+              </a:rPr>
+              <a:t>, </a:t>
+            </a:r>
+            <a:r>
+              <a:rPr lang="pt-BR" sz="1800" dirty="0" err="1">
+                <a:solidFill>
+                  <a:schemeClr val="tx1"/>
+                </a:solidFill>
+                <a:latin typeface="Times New Roman" panose="02020603050405020304" pitchFamily="18" charset="0"/>
+                <a:cs typeface="Times New Roman" panose="02020603050405020304" pitchFamily="18" charset="0"/>
+              </a:rPr>
+              <a:t>name</a:t>
+            </a:r>
+            <a:r>
+              <a:rPr lang="pt-BR" sz="1800" dirty="0">
+                <a:solidFill>
+                  <a:schemeClr val="tx1"/>
+                </a:solidFill>
+                <a:latin typeface="Times New Roman" panose="02020603050405020304" pitchFamily="18" charset="0"/>
+                <a:cs typeface="Times New Roman" panose="02020603050405020304" pitchFamily="18" charset="0"/>
+              </a:rPr>
+              <a:t>, </a:t>
+            </a:r>
+            <a:r>
+              <a:rPr lang="pt-BR" sz="1800" dirty="0" err="1">
+                <a:solidFill>
+                  <a:schemeClr val="tx1"/>
+                </a:solidFill>
+                <a:latin typeface="Times New Roman" panose="02020603050405020304" pitchFamily="18" charset="0"/>
+                <a:cs typeface="Times New Roman" panose="02020603050405020304" pitchFamily="18" charset="0"/>
+              </a:rPr>
+              <a:t>email</a:t>
+            </a:r>
+            <a:r>
+              <a:rPr lang="pt-BR" sz="1800" dirty="0">
+                <a:solidFill>
+                  <a:schemeClr val="tx1"/>
+                </a:solidFill>
+                <a:latin typeface="Times New Roman" panose="02020603050405020304" pitchFamily="18" charset="0"/>
+                <a:cs typeface="Times New Roman" panose="02020603050405020304" pitchFamily="18" charset="0"/>
+              </a:rPr>
+              <a:t>) </a:t>
+            </a:r>
+            <a:r>
+              <a:rPr lang="pt-BR" sz="1800" b="1" dirty="0" err="1">
+                <a:solidFill>
+                  <a:schemeClr val="tx1"/>
+                </a:solidFill>
+                <a:latin typeface="Times New Roman" panose="02020603050405020304" pitchFamily="18" charset="0"/>
+                <a:cs typeface="Times New Roman" panose="02020603050405020304" pitchFamily="18" charset="0"/>
+              </a:rPr>
+              <a:t>values</a:t>
+            </a:r>
+            <a:r>
+              <a:rPr lang="pt-BR" sz="1800" dirty="0">
+                <a:solidFill>
+                  <a:schemeClr val="tx1"/>
+                </a:solidFill>
+                <a:latin typeface="Times New Roman" panose="02020603050405020304" pitchFamily="18" charset="0"/>
+                <a:cs typeface="Times New Roman" panose="02020603050405020304" pitchFamily="18" charset="0"/>
+              </a:rPr>
+              <a:t> (3, '</a:t>
+            </a:r>
+            <a:r>
+              <a:rPr lang="pt-BR" sz="1800" dirty="0" err="1">
+                <a:solidFill>
+                  <a:schemeClr val="tx1"/>
+                </a:solidFill>
+                <a:latin typeface="Times New Roman" panose="02020603050405020304" pitchFamily="18" charset="0"/>
+                <a:cs typeface="Times New Roman" panose="02020603050405020304" pitchFamily="18" charset="0"/>
+              </a:rPr>
+              <a:t>Juju</a:t>
+            </a:r>
+            <a:r>
+              <a:rPr lang="pt-BR" sz="1800" dirty="0">
+                <a:solidFill>
+                  <a:schemeClr val="tx1"/>
+                </a:solidFill>
+                <a:latin typeface="Times New Roman" panose="02020603050405020304" pitchFamily="18" charset="0"/>
+                <a:cs typeface="Times New Roman" panose="02020603050405020304" pitchFamily="18" charset="0"/>
+              </a:rPr>
+              <a:t>', 'juju@gmail.com');</a:t>
+            </a:r>
+          </a:p>
+          <a:p>
+            <a:pPr marL="0" indent="0" algn="just">
+              <a:buNone/>
+            </a:pPr>
+            <a:r>
+              <a:rPr lang="pt-BR" sz="1800" b="1" dirty="0" err="1">
+                <a:solidFill>
+                  <a:schemeClr val="tx1"/>
+                </a:solidFill>
+                <a:latin typeface="Times New Roman" panose="02020603050405020304" pitchFamily="18" charset="0"/>
+                <a:cs typeface="Times New Roman" panose="02020603050405020304" pitchFamily="18" charset="0"/>
+              </a:rPr>
               <a:t>insert</a:t>
             </a:r>
             <a:r>
+              <a:rPr lang="pt-BR" sz="1800" b="1" dirty="0">
+                <a:solidFill>
+                  <a:schemeClr val="tx1"/>
+                </a:solidFill>
+                <a:latin typeface="Times New Roman" panose="02020603050405020304" pitchFamily="18" charset="0"/>
+                <a:cs typeface="Times New Roman" panose="02020603050405020304" pitchFamily="18" charset="0"/>
+              </a:rPr>
+              <a:t> </a:t>
+            </a:r>
+            <a:r>
+              <a:rPr lang="pt-BR" sz="1800" b="1" dirty="0" err="1">
+                <a:solidFill>
+                  <a:schemeClr val="tx1"/>
+                </a:solidFill>
+                <a:latin typeface="Times New Roman" panose="02020603050405020304" pitchFamily="18" charset="0"/>
+                <a:cs typeface="Times New Roman" panose="02020603050405020304" pitchFamily="18" charset="0"/>
+              </a:rPr>
+              <a:t>into</a:t>
+            </a:r>
+            <a:r>
+              <a:rPr lang="pt-BR" sz="1800" b="1" dirty="0">
+                <a:solidFill>
+                  <a:schemeClr val="tx1"/>
+                </a:solidFill>
+                <a:latin typeface="Times New Roman" panose="02020603050405020304" pitchFamily="18" charset="0"/>
+                <a:cs typeface="Times New Roman" panose="02020603050405020304" pitchFamily="18" charset="0"/>
+              </a:rPr>
+              <a:t> </a:t>
+            </a:r>
+            <a:r>
+              <a:rPr lang="pt-BR" sz="1800" dirty="0" err="1">
+                <a:solidFill>
+                  <a:schemeClr val="tx1"/>
+                </a:solidFill>
+                <a:latin typeface="Times New Roman" panose="02020603050405020304" pitchFamily="18" charset="0"/>
+                <a:cs typeface="Times New Roman" panose="02020603050405020304" pitchFamily="18" charset="0"/>
+              </a:rPr>
+              <a:t>tb_user</a:t>
+            </a:r>
+            <a:r>
               <a:rPr lang="pt-BR" sz="1800" dirty="0">
                 <a:solidFill>
                   <a:schemeClr val="tx1"/>
@@ -6615,9 +7244,134 @@
                 <a:latin typeface="Times New Roman" panose="02020603050405020304" pitchFamily="18" charset="0"/>
                 <a:cs typeface="Times New Roman" panose="02020603050405020304" pitchFamily="18" charset="0"/>
               </a:rPr>
+              <a:t> (</a:t>
+            </a:r>
+            <a:r>
+              <a:rPr lang="pt-BR" sz="1800" dirty="0" err="1">
+                <a:solidFill>
+                  <a:schemeClr val="tx1"/>
+                </a:solidFill>
+                <a:latin typeface="Times New Roman" panose="02020603050405020304" pitchFamily="18" charset="0"/>
+                <a:cs typeface="Times New Roman" panose="02020603050405020304" pitchFamily="18" charset="0"/>
+              </a:rPr>
+              <a:t>department_id</a:t>
+            </a:r>
+            <a:r>
+              <a:rPr lang="pt-BR" sz="1800" dirty="0">
+                <a:solidFill>
+                  <a:schemeClr val="tx1"/>
+                </a:solidFill>
+                <a:latin typeface="Times New Roman" panose="02020603050405020304" pitchFamily="18" charset="0"/>
+                <a:cs typeface="Times New Roman" panose="02020603050405020304" pitchFamily="18" charset="0"/>
+              </a:rPr>
+              <a:t>, </a:t>
+            </a:r>
+            <a:r>
+              <a:rPr lang="pt-BR" sz="1800" dirty="0" err="1">
+                <a:solidFill>
+                  <a:schemeClr val="tx1"/>
+                </a:solidFill>
+                <a:latin typeface="Times New Roman" panose="02020603050405020304" pitchFamily="18" charset="0"/>
+                <a:cs typeface="Times New Roman" panose="02020603050405020304" pitchFamily="18" charset="0"/>
+              </a:rPr>
+              <a:t>name</a:t>
+            </a:r>
+            <a:r>
+              <a:rPr lang="pt-BR" sz="1800" dirty="0">
+                <a:solidFill>
+                  <a:schemeClr val="tx1"/>
+                </a:solidFill>
+                <a:latin typeface="Times New Roman" panose="02020603050405020304" pitchFamily="18" charset="0"/>
+                <a:cs typeface="Times New Roman" panose="02020603050405020304" pitchFamily="18" charset="0"/>
+              </a:rPr>
+              <a:t>, </a:t>
+            </a:r>
+            <a:r>
+              <a:rPr lang="pt-BR" sz="1800" dirty="0" err="1">
+                <a:solidFill>
+                  <a:schemeClr val="tx1"/>
+                </a:solidFill>
+                <a:latin typeface="Times New Roman" panose="02020603050405020304" pitchFamily="18" charset="0"/>
+                <a:cs typeface="Times New Roman" panose="02020603050405020304" pitchFamily="18" charset="0"/>
+              </a:rPr>
+              <a:t>email</a:t>
+            </a:r>
+            <a:r>
+              <a:rPr lang="pt-BR" sz="1800" dirty="0">
+                <a:solidFill>
+                  <a:schemeClr val="tx1"/>
+                </a:solidFill>
+                <a:latin typeface="Times New Roman" panose="02020603050405020304" pitchFamily="18" charset="0"/>
+                <a:cs typeface="Times New Roman" panose="02020603050405020304" pitchFamily="18" charset="0"/>
+              </a:rPr>
+              <a:t>) </a:t>
+            </a:r>
+            <a:r>
+              <a:rPr lang="pt-BR" sz="1800" b="1" dirty="0" err="1">
+                <a:solidFill>
+                  <a:schemeClr val="tx1"/>
+                </a:solidFill>
+                <a:latin typeface="Times New Roman" panose="02020603050405020304" pitchFamily="18" charset="0"/>
+                <a:cs typeface="Times New Roman" panose="02020603050405020304" pitchFamily="18" charset="0"/>
+              </a:rPr>
+              <a:t>values</a:t>
+            </a:r>
+            <a:r>
+              <a:rPr lang="pt-BR" sz="1800" dirty="0">
+                <a:solidFill>
+                  <a:schemeClr val="tx1"/>
+                </a:solidFill>
+                <a:latin typeface="Times New Roman" panose="02020603050405020304" pitchFamily="18" charset="0"/>
+                <a:cs typeface="Times New Roman" panose="02020603050405020304" pitchFamily="18" charset="0"/>
+              </a:rPr>
+              <a:t> (1, 'Josy', 'josy@gmail.com');</a:t>
+            </a:r>
+          </a:p>
+          <a:p>
+            <a:pPr marL="0" indent="0" algn="just">
+              <a:buNone/>
+            </a:pPr>
+            <a:r>
+              <a:rPr lang="pt-BR" sz="1800" b="1" dirty="0" err="1">
+                <a:solidFill>
+                  <a:schemeClr val="tx1"/>
+                </a:solidFill>
+                <a:latin typeface="Times New Roman" panose="02020603050405020304" pitchFamily="18" charset="0"/>
+                <a:cs typeface="Times New Roman" panose="02020603050405020304" pitchFamily="18" charset="0"/>
+              </a:rPr>
+              <a:t>insert</a:t>
+            </a:r>
+            <a:r>
+              <a:rPr lang="pt-BR" sz="1800" b="1" dirty="0">
+                <a:solidFill>
+                  <a:schemeClr val="tx1"/>
+                </a:solidFill>
+                <a:latin typeface="Times New Roman" panose="02020603050405020304" pitchFamily="18" charset="0"/>
+                <a:cs typeface="Times New Roman" panose="02020603050405020304" pitchFamily="18" charset="0"/>
+              </a:rPr>
               <a:t> </a:t>
             </a:r>
             <a:r>
+              <a:rPr lang="pt-BR" sz="1800" b="1" dirty="0" err="1">
+                <a:solidFill>
+                  <a:schemeClr val="tx1"/>
+                </a:solidFill>
+                <a:latin typeface="Times New Roman" panose="02020603050405020304" pitchFamily="18" charset="0"/>
+                <a:cs typeface="Times New Roman" panose="02020603050405020304" pitchFamily="18" charset="0"/>
+              </a:rPr>
+              <a:t>into</a:t>
+            </a:r>
+            <a:r>
+              <a:rPr lang="pt-BR" sz="1800" b="1" dirty="0">
+                <a:solidFill>
+                  <a:schemeClr val="tx1"/>
+                </a:solidFill>
+                <a:latin typeface="Times New Roman" panose="02020603050405020304" pitchFamily="18" charset="0"/>
+                <a:cs typeface="Times New Roman" panose="02020603050405020304" pitchFamily="18" charset="0"/>
+              </a:rPr>
+              <a:t> </a:t>
+            </a:r>
+            <a:r>
               <a:rPr lang="pt-BR" sz="1800" dirty="0" err="1">
                 <a:solidFill>
                   <a:schemeClr val="tx1"/>
@@ -6625,9 +7379,154 @@
                 <a:latin typeface="Times New Roman" panose="02020603050405020304" pitchFamily="18" charset="0"/>
                 <a:cs typeface="Times New Roman" panose="02020603050405020304" pitchFamily="18" charset="0"/>
               </a:rPr>
+              <a:t>tb_user</a:t>
+            </a:r>
+            <a:r>
+              <a:rPr lang="pt-BR" sz="1800" dirty="0">
+                <a:solidFill>
+                  <a:schemeClr val="tx1"/>
+                </a:solidFill>
+                <a:latin typeface="Times New Roman" panose="02020603050405020304" pitchFamily="18" charset="0"/>
+                <a:cs typeface="Times New Roman" panose="02020603050405020304" pitchFamily="18" charset="0"/>
+              </a:rPr>
+              <a:t> (</a:t>
+            </a:r>
+            <a:r>
+              <a:rPr lang="pt-BR" sz="1800" dirty="0" err="1">
+                <a:solidFill>
+                  <a:schemeClr val="tx1"/>
+                </a:solidFill>
+                <a:latin typeface="Times New Roman" panose="02020603050405020304" pitchFamily="18" charset="0"/>
+                <a:cs typeface="Times New Roman" panose="02020603050405020304" pitchFamily="18" charset="0"/>
+              </a:rPr>
+              <a:t>department_id</a:t>
+            </a:r>
+            <a:r>
+              <a:rPr lang="pt-BR" sz="1800" dirty="0">
+                <a:solidFill>
+                  <a:schemeClr val="tx1"/>
+                </a:solidFill>
+                <a:latin typeface="Times New Roman" panose="02020603050405020304" pitchFamily="18" charset="0"/>
+                <a:cs typeface="Times New Roman" panose="02020603050405020304" pitchFamily="18" charset="0"/>
+              </a:rPr>
+              <a:t>, </a:t>
+            </a:r>
+            <a:r>
+              <a:rPr lang="pt-BR" sz="1800" dirty="0" err="1">
+                <a:solidFill>
+                  <a:schemeClr val="tx1"/>
+                </a:solidFill>
+                <a:latin typeface="Times New Roman" panose="02020603050405020304" pitchFamily="18" charset="0"/>
+                <a:cs typeface="Times New Roman" panose="02020603050405020304" pitchFamily="18" charset="0"/>
+              </a:rPr>
+              <a:t>name</a:t>
+            </a:r>
+            <a:r>
+              <a:rPr lang="pt-BR" sz="1800" dirty="0">
+                <a:solidFill>
+                  <a:schemeClr val="tx1"/>
+                </a:solidFill>
+                <a:latin typeface="Times New Roman" panose="02020603050405020304" pitchFamily="18" charset="0"/>
+                <a:cs typeface="Times New Roman" panose="02020603050405020304" pitchFamily="18" charset="0"/>
+              </a:rPr>
+              <a:t>, </a:t>
+            </a:r>
+            <a:r>
+              <a:rPr lang="pt-BR" sz="1800" dirty="0" err="1">
+                <a:solidFill>
+                  <a:schemeClr val="tx1"/>
+                </a:solidFill>
+                <a:latin typeface="Times New Roman" panose="02020603050405020304" pitchFamily="18" charset="0"/>
+                <a:cs typeface="Times New Roman" panose="02020603050405020304" pitchFamily="18" charset="0"/>
+              </a:rPr>
+              <a:t>email</a:t>
+            </a:r>
+            <a:r>
+              <a:rPr lang="pt-BR" sz="1800" dirty="0">
+                <a:solidFill>
+                  <a:schemeClr val="tx1"/>
+                </a:solidFill>
+                <a:latin typeface="Times New Roman" panose="02020603050405020304" pitchFamily="18" charset="0"/>
+                <a:cs typeface="Times New Roman" panose="02020603050405020304" pitchFamily="18" charset="0"/>
+              </a:rPr>
+              <a:t>) </a:t>
+            </a:r>
+            <a:r>
+              <a:rPr lang="pt-BR" sz="1800" b="1" dirty="0" err="1">
+                <a:solidFill>
+                  <a:schemeClr val="tx1"/>
+                </a:solidFill>
+                <a:latin typeface="Times New Roman" panose="02020603050405020304" pitchFamily="18" charset="0"/>
+                <a:cs typeface="Times New Roman" panose="02020603050405020304" pitchFamily="18" charset="0"/>
+              </a:rPr>
+              <a:t>values</a:t>
+            </a:r>
+            <a:r>
+              <a:rPr lang="pt-BR" sz="1800" dirty="0">
+                <a:solidFill>
+                  <a:schemeClr val="tx1"/>
+                </a:solidFill>
+                <a:latin typeface="Times New Roman" panose="02020603050405020304" pitchFamily="18" charset="0"/>
+                <a:cs typeface="Times New Roman" panose="02020603050405020304" pitchFamily="18" charset="0"/>
+              </a:rPr>
+              <a:t> (1, 'Maria', 'maria@gmail.com');</a:t>
+            </a:r>
+          </a:p>
+          <a:p>
+            <a:pPr marL="0" indent="0" algn="just">
+              <a:buNone/>
+            </a:pPr>
+            <a:r>
+              <a:rPr lang="pt-BR" sz="1800" b="1" dirty="0" err="1">
+                <a:solidFill>
+                  <a:schemeClr val="tx1"/>
+                </a:solidFill>
+                <a:latin typeface="Times New Roman" panose="02020603050405020304" pitchFamily="18" charset="0"/>
+                <a:cs typeface="Times New Roman" panose="02020603050405020304" pitchFamily="18" charset="0"/>
+              </a:rPr>
+              <a:t>insert</a:t>
+            </a:r>
+            <a:r>
+              <a:rPr lang="pt-BR" sz="1800" b="1" dirty="0">
+                <a:solidFill>
+                  <a:schemeClr val="tx1"/>
+                </a:solidFill>
+                <a:latin typeface="Times New Roman" panose="02020603050405020304" pitchFamily="18" charset="0"/>
+                <a:cs typeface="Times New Roman" panose="02020603050405020304" pitchFamily="18" charset="0"/>
+              </a:rPr>
+              <a:t> </a:t>
+            </a:r>
+            <a:r>
+              <a:rPr lang="pt-BR" sz="1800" b="1" dirty="0" err="1">
+                <a:solidFill>
+                  <a:schemeClr val="tx1"/>
+                </a:solidFill>
+                <a:latin typeface="Times New Roman" panose="02020603050405020304" pitchFamily="18" charset="0"/>
+                <a:cs typeface="Times New Roman" panose="02020603050405020304" pitchFamily="18" charset="0"/>
+              </a:rPr>
               <a:t>into</a:t>
             </a:r>
             <a:r>
+              <a:rPr lang="pt-BR" sz="1800" b="1" dirty="0">
+                <a:solidFill>
+                  <a:schemeClr val="tx1"/>
+                </a:solidFill>
+                <a:latin typeface="Times New Roman" panose="02020603050405020304" pitchFamily="18" charset="0"/>
+                <a:cs typeface="Times New Roman" panose="02020603050405020304" pitchFamily="18" charset="0"/>
+              </a:rPr>
+              <a:t> </a:t>
+            </a:r>
+            <a:r>
+              <a:rPr lang="pt-BR" sz="1800" dirty="0" err="1">
+                <a:solidFill>
+                  <a:schemeClr val="tx1"/>
+                </a:solidFill>
+                <a:latin typeface="Times New Roman" panose="02020603050405020304" pitchFamily="18" charset="0"/>
+                <a:cs typeface="Times New Roman" panose="02020603050405020304" pitchFamily="18" charset="0"/>
+              </a:rPr>
+              <a:t>tb_user</a:t>
+            </a:r>
+            <a:r>
               <a:rPr lang="pt-BR" sz="1800" dirty="0">
                 <a:solidFill>
                   <a:schemeClr val="tx1"/>
@@ -6635,9 +7534,134 @@
                 <a:latin typeface="Times New Roman" panose="02020603050405020304" pitchFamily="18" charset="0"/>
                 <a:cs typeface="Times New Roman" panose="02020603050405020304" pitchFamily="18" charset="0"/>
               </a:rPr>
+              <a:t> (</a:t>
+            </a:r>
+            <a:r>
+              <a:rPr lang="pt-BR" sz="1800" dirty="0" err="1">
+                <a:solidFill>
+                  <a:schemeClr val="tx1"/>
+                </a:solidFill>
+                <a:latin typeface="Times New Roman" panose="02020603050405020304" pitchFamily="18" charset="0"/>
+                <a:cs typeface="Times New Roman" panose="02020603050405020304" pitchFamily="18" charset="0"/>
+              </a:rPr>
+              <a:t>department_id</a:t>
+            </a:r>
+            <a:r>
+              <a:rPr lang="pt-BR" sz="1800" dirty="0">
+                <a:solidFill>
+                  <a:schemeClr val="tx1"/>
+                </a:solidFill>
+                <a:latin typeface="Times New Roman" panose="02020603050405020304" pitchFamily="18" charset="0"/>
+                <a:cs typeface="Times New Roman" panose="02020603050405020304" pitchFamily="18" charset="0"/>
+              </a:rPr>
+              <a:t>, </a:t>
+            </a:r>
+            <a:r>
+              <a:rPr lang="pt-BR" sz="1800" dirty="0" err="1">
+                <a:solidFill>
+                  <a:schemeClr val="tx1"/>
+                </a:solidFill>
+                <a:latin typeface="Times New Roman" panose="02020603050405020304" pitchFamily="18" charset="0"/>
+                <a:cs typeface="Times New Roman" panose="02020603050405020304" pitchFamily="18" charset="0"/>
+              </a:rPr>
+              <a:t>name</a:t>
+            </a:r>
+            <a:r>
+              <a:rPr lang="pt-BR" sz="1800" dirty="0">
+                <a:solidFill>
+                  <a:schemeClr val="tx1"/>
+                </a:solidFill>
+                <a:latin typeface="Times New Roman" panose="02020603050405020304" pitchFamily="18" charset="0"/>
+                <a:cs typeface="Times New Roman" panose="02020603050405020304" pitchFamily="18" charset="0"/>
+              </a:rPr>
+              <a:t>, </a:t>
+            </a:r>
+            <a:r>
+              <a:rPr lang="pt-BR" sz="1800" dirty="0" err="1">
+                <a:solidFill>
+                  <a:schemeClr val="tx1"/>
+                </a:solidFill>
+                <a:latin typeface="Times New Roman" panose="02020603050405020304" pitchFamily="18" charset="0"/>
+                <a:cs typeface="Times New Roman" panose="02020603050405020304" pitchFamily="18" charset="0"/>
+              </a:rPr>
+              <a:t>email</a:t>
+            </a:r>
+            <a:r>
+              <a:rPr lang="pt-BR" sz="1800" dirty="0">
+                <a:solidFill>
+                  <a:schemeClr val="tx1"/>
+                </a:solidFill>
+                <a:latin typeface="Times New Roman" panose="02020603050405020304" pitchFamily="18" charset="0"/>
+                <a:cs typeface="Times New Roman" panose="02020603050405020304" pitchFamily="18" charset="0"/>
+              </a:rPr>
+              <a:t>) </a:t>
+            </a:r>
+            <a:r>
+              <a:rPr lang="pt-BR" sz="1800" b="1" dirty="0" err="1">
+                <a:solidFill>
+                  <a:schemeClr val="tx1"/>
+                </a:solidFill>
+                <a:latin typeface="Times New Roman" panose="02020603050405020304" pitchFamily="18" charset="0"/>
+                <a:cs typeface="Times New Roman" panose="02020603050405020304" pitchFamily="18" charset="0"/>
+              </a:rPr>
+              <a:t>values</a:t>
+            </a:r>
+            <a:r>
+              <a:rPr lang="pt-BR" sz="1800" dirty="0">
+                <a:solidFill>
+                  <a:schemeClr val="tx1"/>
+                </a:solidFill>
+                <a:latin typeface="Times New Roman" panose="02020603050405020304" pitchFamily="18" charset="0"/>
+                <a:cs typeface="Times New Roman" panose="02020603050405020304" pitchFamily="18" charset="0"/>
+              </a:rPr>
+              <a:t> (2, 'João', 'joao@gmail.com');</a:t>
+            </a:r>
+          </a:p>
+          <a:p>
+            <a:pPr marL="0" indent="0" algn="just">
+              <a:buNone/>
+            </a:pPr>
+            <a:r>
+              <a:rPr lang="pt-BR" sz="1800" b="1" dirty="0" err="1">
+                <a:solidFill>
+                  <a:schemeClr val="tx1"/>
+                </a:solidFill>
+                <a:latin typeface="Times New Roman" panose="02020603050405020304" pitchFamily="18" charset="0"/>
+                <a:cs typeface="Times New Roman" panose="02020603050405020304" pitchFamily="18" charset="0"/>
+              </a:rPr>
+              <a:t>insert</a:t>
+            </a:r>
+            <a:r>
+              <a:rPr lang="pt-BR" sz="1800" b="1" dirty="0">
+                <a:solidFill>
+                  <a:schemeClr val="tx1"/>
+                </a:solidFill>
+                <a:latin typeface="Times New Roman" panose="02020603050405020304" pitchFamily="18" charset="0"/>
+                <a:cs typeface="Times New Roman" panose="02020603050405020304" pitchFamily="18" charset="0"/>
+              </a:rPr>
               <a:t> </a:t>
             </a:r>
             <a:r>
+              <a:rPr lang="pt-BR" sz="1800" b="1" dirty="0" err="1">
+                <a:solidFill>
+                  <a:schemeClr val="tx1"/>
+                </a:solidFill>
+                <a:latin typeface="Times New Roman" panose="02020603050405020304" pitchFamily="18" charset="0"/>
+                <a:cs typeface="Times New Roman" panose="02020603050405020304" pitchFamily="18" charset="0"/>
+              </a:rPr>
+              <a:t>into</a:t>
+            </a:r>
+            <a:r>
+              <a:rPr lang="pt-BR" sz="1800" b="1" dirty="0">
+                <a:solidFill>
+                  <a:schemeClr val="tx1"/>
+                </a:solidFill>
+                <a:latin typeface="Times New Roman" panose="02020603050405020304" pitchFamily="18" charset="0"/>
+                <a:cs typeface="Times New Roman" panose="02020603050405020304" pitchFamily="18" charset="0"/>
+              </a:rPr>
+              <a:t> </a:t>
+            </a:r>
+            <a:r>
               <a:rPr lang="pt-BR" sz="1800" dirty="0" err="1">
                 <a:solidFill>
                   <a:schemeClr val="tx1"/>
@@ -6718,6 +7742,71 @@
               <a:t>) </a:t>
             </a:r>
             <a:r>
+              <a:rPr lang="pt-BR" sz="1800" b="1" dirty="0" err="1">
+                <a:solidFill>
+                  <a:schemeClr val="tx1"/>
+                </a:solidFill>
+                <a:latin typeface="Times New Roman" panose="02020603050405020304" pitchFamily="18" charset="0"/>
+                <a:cs typeface="Times New Roman" panose="02020603050405020304" pitchFamily="18" charset="0"/>
+              </a:rPr>
+              <a:t>values</a:t>
+            </a:r>
+            <a:r>
+              <a:rPr lang="pt-BR" sz="1800" dirty="0">
+                <a:solidFill>
+                  <a:schemeClr val="tx1"/>
+                </a:solidFill>
+                <a:latin typeface="Times New Roman" panose="02020603050405020304" pitchFamily="18" charset="0"/>
+                <a:cs typeface="Times New Roman" panose="02020603050405020304" pitchFamily="18" charset="0"/>
+              </a:rPr>
+              <a:t> (3, 'Pedro', 'pedro@gmail.com');</a:t>
+            </a:r>
+          </a:p>
+          <a:p>
+            <a:pPr marL="0" indent="0" algn="just">
+              <a:buNone/>
+            </a:pPr>
+            <a:r>
+              <a:rPr lang="pt-BR" sz="1800" b="1" dirty="0" err="1">
+                <a:solidFill>
+                  <a:schemeClr val="tx1"/>
+                </a:solidFill>
+                <a:latin typeface="Times New Roman" panose="02020603050405020304" pitchFamily="18" charset="0"/>
+                <a:cs typeface="Times New Roman" panose="02020603050405020304" pitchFamily="18" charset="0"/>
+              </a:rPr>
+              <a:t>insert</a:t>
+            </a:r>
+            <a:r>
+              <a:rPr lang="pt-BR" sz="1800" b="1" dirty="0">
+                <a:solidFill>
+                  <a:schemeClr val="tx1"/>
+                </a:solidFill>
+                <a:latin typeface="Times New Roman" panose="02020603050405020304" pitchFamily="18" charset="0"/>
+                <a:cs typeface="Times New Roman" panose="02020603050405020304" pitchFamily="18" charset="0"/>
+              </a:rPr>
+              <a:t> </a:t>
+            </a:r>
+            <a:r>
+              <a:rPr lang="pt-BR" sz="1800" b="1" dirty="0" err="1">
+                <a:solidFill>
+                  <a:schemeClr val="tx1"/>
+                </a:solidFill>
+                <a:latin typeface="Times New Roman" panose="02020603050405020304" pitchFamily="18" charset="0"/>
+                <a:cs typeface="Times New Roman" panose="02020603050405020304" pitchFamily="18" charset="0"/>
+              </a:rPr>
+              <a:t>into</a:t>
+            </a:r>
+            <a:r>
+              <a:rPr lang="pt-BR" sz="1800" b="1" dirty="0">
+                <a:solidFill>
+                  <a:schemeClr val="tx1"/>
+                </a:solidFill>
+                <a:latin typeface="Times New Roman" panose="02020603050405020304" pitchFamily="18" charset="0"/>
+                <a:cs typeface="Times New Roman" panose="02020603050405020304" pitchFamily="18" charset="0"/>
+              </a:rPr>
+              <a:t> </a:t>
+            </a:r>
+            <a:r>
               <a:rPr lang="pt-BR" sz="1800" dirty="0" err="1">
                 <a:solidFill>
                   <a:schemeClr val="tx1"/>
@@ -6725,6 +7814,86 @@
                 <a:latin typeface="Times New Roman" panose="02020603050405020304" pitchFamily="18" charset="0"/>
                 <a:cs typeface="Times New Roman" panose="02020603050405020304" pitchFamily="18" charset="0"/>
               </a:rPr>
+              <a:t>tb_user</a:t>
+            </a:r>
+            <a:r>
+              <a:rPr lang="pt-BR" sz="1800" dirty="0">
+                <a:solidFill>
+                  <a:schemeClr val="tx1"/>
+                </a:solidFill>
+                <a:latin typeface="Times New Roman" panose="02020603050405020304" pitchFamily="18" charset="0"/>
+                <a:cs typeface="Times New Roman" panose="02020603050405020304" pitchFamily="18" charset="0"/>
+              </a:rPr>
+              <a:t> (</a:t>
+            </a:r>
+            <a:r>
+              <a:rPr lang="pt-BR" sz="1800" dirty="0" err="1">
+                <a:solidFill>
+                  <a:schemeClr val="tx1"/>
+                </a:solidFill>
+                <a:latin typeface="Times New Roman" panose="02020603050405020304" pitchFamily="18" charset="0"/>
+                <a:cs typeface="Times New Roman" panose="02020603050405020304" pitchFamily="18" charset="0"/>
+              </a:rPr>
+              <a:t>department_id</a:t>
+            </a:r>
+            <a:r>
+              <a:rPr lang="pt-BR" sz="1800" dirty="0">
+                <a:solidFill>
+                  <a:schemeClr val="tx1"/>
+                </a:solidFill>
+                <a:latin typeface="Times New Roman" panose="02020603050405020304" pitchFamily="18" charset="0"/>
+                <a:cs typeface="Times New Roman" panose="02020603050405020304" pitchFamily="18" charset="0"/>
+              </a:rPr>
+              <a:t>, </a:t>
+            </a:r>
+            <a:r>
+              <a:rPr lang="pt-BR" sz="1800" dirty="0" err="1">
+                <a:solidFill>
+                  <a:schemeClr val="tx1"/>
+                </a:solidFill>
+                <a:latin typeface="Times New Roman" panose="02020603050405020304" pitchFamily="18" charset="0"/>
+                <a:cs typeface="Times New Roman" panose="02020603050405020304" pitchFamily="18" charset="0"/>
+              </a:rPr>
+              <a:t>name</a:t>
+            </a:r>
+            <a:r>
+              <a:rPr lang="pt-BR" sz="1800" dirty="0">
+                <a:solidFill>
+                  <a:schemeClr val="tx1"/>
+                </a:solidFill>
+                <a:latin typeface="Times New Roman" panose="02020603050405020304" pitchFamily="18" charset="0"/>
+                <a:cs typeface="Times New Roman" panose="02020603050405020304" pitchFamily="18" charset="0"/>
+              </a:rPr>
+              <a:t>, </a:t>
+            </a:r>
+            <a:r>
+              <a:rPr lang="pt-BR" sz="1800" dirty="0" err="1">
+                <a:solidFill>
+                  <a:schemeClr val="tx1"/>
+                </a:solidFill>
+                <a:latin typeface="Times New Roman" panose="02020603050405020304" pitchFamily="18" charset="0"/>
+                <a:cs typeface="Times New Roman" panose="02020603050405020304" pitchFamily="18" charset="0"/>
+              </a:rPr>
+              <a:t>email</a:t>
+            </a:r>
+            <a:r>
+              <a:rPr lang="pt-BR" sz="1800" dirty="0">
+                <a:solidFill>
+                  <a:schemeClr val="tx1"/>
+                </a:solidFill>
+                <a:latin typeface="Times New Roman" panose="02020603050405020304" pitchFamily="18" charset="0"/>
+                <a:cs typeface="Times New Roman" panose="02020603050405020304" pitchFamily="18" charset="0"/>
+              </a:rPr>
+              <a:t>) </a:t>
+            </a:r>
+            <a:r>
+              <a:rPr lang="pt-BR" sz="1800" b="1" dirty="0" err="1">
+                <a:solidFill>
+                  <a:schemeClr val="tx1"/>
+                </a:solidFill>
+                <a:latin typeface="Times New Roman" panose="02020603050405020304" pitchFamily="18" charset="0"/>
+                <a:cs typeface="Times New Roman" panose="02020603050405020304" pitchFamily="18" charset="0"/>
+              </a:rPr>
               <a:t>values</a:t>
             </a:r>
             <a:r>
@@ -6735,7 +7904,52 @@
                 <a:latin typeface="Times New Roman" panose="02020603050405020304" pitchFamily="18" charset="0"/>
                 <a:cs typeface="Times New Roman" panose="02020603050405020304" pitchFamily="18" charset="0"/>
               </a:rPr>
-              <a:t> (3, '</a:t>
+              <a:t> (2, 'Paulo', 'paulo@gmail.com');</a:t>
+            </a:r>
+          </a:p>
+          <a:p>
+            <a:pPr marL="0" indent="0" algn="just">
+              <a:buNone/>
+            </a:pPr>
+            <a:r>
+              <a:rPr lang="pt-BR" sz="1800" b="1" dirty="0" err="1">
+                <a:solidFill>
+                  <a:schemeClr val="tx1"/>
+                </a:solidFill>
+                <a:latin typeface="Times New Roman" panose="02020603050405020304" pitchFamily="18" charset="0"/>
+                <a:cs typeface="Times New Roman" panose="02020603050405020304" pitchFamily="18" charset="0"/>
+              </a:rPr>
+              <a:t>insert</a:t>
+            </a:r>
+            <a:r>
+              <a:rPr lang="pt-BR" sz="1800" b="1" dirty="0">
+                <a:solidFill>
+                  <a:schemeClr val="tx1"/>
+                </a:solidFill>
+                <a:latin typeface="Times New Roman" panose="02020603050405020304" pitchFamily="18" charset="0"/>
+                <a:cs typeface="Times New Roman" panose="02020603050405020304" pitchFamily="18" charset="0"/>
+              </a:rPr>
+              <a:t> </a:t>
+            </a:r>
+            <a:r>
+              <a:rPr lang="pt-BR" sz="1800" b="1" dirty="0" err="1">
+                <a:solidFill>
+                  <a:schemeClr val="tx1"/>
+                </a:solidFill>
+                <a:latin typeface="Times New Roman" panose="02020603050405020304" pitchFamily="18" charset="0"/>
+                <a:cs typeface="Times New Roman" panose="02020603050405020304" pitchFamily="18" charset="0"/>
+              </a:rPr>
+              <a:t>into</a:t>
+            </a:r>
+            <a:r>
+              <a:rPr lang="pt-BR" sz="1800" b="1" dirty="0">
+                <a:solidFill>
+                  <a:schemeClr val="tx1"/>
+                </a:solidFill>
+                <a:latin typeface="Times New Roman" panose="02020603050405020304" pitchFamily="18" charset="0"/>
+                <a:cs typeface="Times New Roman" panose="02020603050405020304" pitchFamily="18" charset="0"/>
+              </a:rPr>
+              <a:t> </a:t>
             </a:r>
             <a:r>
               <a:rPr lang="pt-BR" sz="1800" dirty="0" err="1">
@@ -6745,7 +7959,7 @@
                 <a:latin typeface="Times New Roman" panose="02020603050405020304" pitchFamily="18" charset="0"/>
                 <a:cs typeface="Times New Roman" panose="02020603050405020304" pitchFamily="18" charset="0"/>
               </a:rPr>
-              <a:t>Juju</a:t>
+              <a:t>tb_user</a:t>
             </a:r>
             <a:r>
               <a:rPr lang="pt-BR" sz="1800" dirty="0">
@@ -6755,13 +7969,8 @@
                 <a:latin typeface="Times New Roman" panose="02020603050405020304" pitchFamily="18" charset="0"/>
                 <a:cs typeface="Times New Roman" panose="02020603050405020304" pitchFamily="18" charset="0"/>
               </a:rPr>
-              <a:t>', 'juju@gmail.com');</a:t>
-            </a:r>
-          </a:p>
-          <a:p>
-            <a:pPr marL="0" indent="0" algn="just">
-              <a:buNone/>
-            </a:pPr>
+              <a:t> (</a:t>
+            </a:r>
             <a:r>
               <a:rPr lang="pt-BR" sz="1800" dirty="0" err="1">
                 <a:solidFill>
@@ -6770,7 +7979,7 @@
                 <a:latin typeface="Times New Roman" panose="02020603050405020304" pitchFamily="18" charset="0"/>
                 <a:cs typeface="Times New Roman" panose="02020603050405020304" pitchFamily="18" charset="0"/>
               </a:rPr>
-              <a:t>insert</a:t>
+              <a:t>department_id</a:t>
             </a:r>
             <a:r>
               <a:rPr lang="pt-BR" sz="1800" dirty="0">
@@ -6780,7 +7989,7 @@
                 <a:latin typeface="Times New Roman" panose="02020603050405020304" pitchFamily="18" charset="0"/>
                 <a:cs typeface="Times New Roman" panose="02020603050405020304" pitchFamily="18" charset="0"/>
               </a:rPr>
-              <a:t> </a:t>
+              <a:t>, </a:t>
             </a:r>
             <a:r>
               <a:rPr lang="pt-BR" sz="1800" dirty="0" err="1">
@@ -6790,7 +7999,7 @@
                 <a:latin typeface="Times New Roman" panose="02020603050405020304" pitchFamily="18" charset="0"/>
                 <a:cs typeface="Times New Roman" panose="02020603050405020304" pitchFamily="18" charset="0"/>
               </a:rPr>
-              <a:t>into</a:t>
+              <a:t>name</a:t>
             </a:r>
             <a:r>
               <a:rPr lang="pt-BR" sz="1800" dirty="0">
@@ -6800,7 +8009,7 @@
                 <a:latin typeface="Times New Roman" panose="02020603050405020304" pitchFamily="18" charset="0"/>
                 <a:cs typeface="Times New Roman" panose="02020603050405020304" pitchFamily="18" charset="0"/>
               </a:rPr>
-              <a:t> </a:t>
+              <a:t>, </a:t>
             </a:r>
             <a:r>
               <a:rPr lang="pt-BR" sz="1800" dirty="0" err="1">
@@ -6810,7 +8019,7 @@
                 <a:latin typeface="Times New Roman" panose="02020603050405020304" pitchFamily="18" charset="0"/>
                 <a:cs typeface="Times New Roman" panose="02020603050405020304" pitchFamily="18" charset="0"/>
               </a:rPr>
-              <a:t>tb_user</a:t>
+              <a:t>email</a:t>
             </a:r>
             <a:r>
               <a:rPr lang="pt-BR" sz="1800" dirty="0">
@@ -6820,795 +8029,10 @@
                 <a:latin typeface="Times New Roman" panose="02020603050405020304" pitchFamily="18" charset="0"/>
                 <a:cs typeface="Times New Roman" panose="02020603050405020304" pitchFamily="18" charset="0"/>
               </a:rPr>
-              <a:t> (</a:t>
-            </a:r>
-            <a:r>
-              <a:rPr lang="pt-BR" sz="1800" dirty="0" err="1">
-                <a:solidFill>
-                  <a:schemeClr val="tx1"/>
-                </a:solidFill>
-                <a:latin typeface="Times New Roman" panose="02020603050405020304" pitchFamily="18" charset="0"/>
-                <a:cs typeface="Times New Roman" panose="02020603050405020304" pitchFamily="18" charset="0"/>
-              </a:rPr>
-              <a:t>department_id</a:t>
-            </a:r>
-            <a:r>
-              <a:rPr lang="pt-BR" sz="1800" dirty="0">
-                <a:solidFill>
-                  <a:schemeClr val="tx1"/>
-                </a:solidFill>
-                <a:latin typeface="Times New Roman" panose="02020603050405020304" pitchFamily="18" charset="0"/>
-                <a:cs typeface="Times New Roman" panose="02020603050405020304" pitchFamily="18" charset="0"/>
-              </a:rPr>
-              <a:t>, </a:t>
-            </a:r>
-            <a:r>
-              <a:rPr lang="pt-BR" sz="1800" dirty="0" err="1">
-                <a:solidFill>
-                  <a:schemeClr val="tx1"/>
-                </a:solidFill>
-                <a:latin typeface="Times New Roman" panose="02020603050405020304" pitchFamily="18" charset="0"/>
-                <a:cs typeface="Times New Roman" panose="02020603050405020304" pitchFamily="18" charset="0"/>
-              </a:rPr>
-              <a:t>name</a:t>
-            </a:r>
-            <a:r>
-              <a:rPr lang="pt-BR" sz="1800" dirty="0">
-                <a:solidFill>
-                  <a:schemeClr val="tx1"/>
-                </a:solidFill>
-                <a:latin typeface="Times New Roman" panose="02020603050405020304" pitchFamily="18" charset="0"/>
-                <a:cs typeface="Times New Roman" panose="02020603050405020304" pitchFamily="18" charset="0"/>
-              </a:rPr>
-              <a:t>, </a:t>
-            </a:r>
-            <a:r>
-              <a:rPr lang="pt-BR" sz="1800" dirty="0" err="1">
-                <a:solidFill>
-                  <a:schemeClr val="tx1"/>
-                </a:solidFill>
-                <a:latin typeface="Times New Roman" panose="02020603050405020304" pitchFamily="18" charset="0"/>
-                <a:cs typeface="Times New Roman" panose="02020603050405020304" pitchFamily="18" charset="0"/>
-              </a:rPr>
-              <a:t>email</a:t>
-            </a:r>
-            <a:r>
-              <a:rPr lang="pt-BR" sz="1800" dirty="0">
-                <a:solidFill>
-                  <a:schemeClr val="tx1"/>
-                </a:solidFill>
-                <a:latin typeface="Times New Roman" panose="02020603050405020304" pitchFamily="18" charset="0"/>
-                <a:cs typeface="Times New Roman" panose="02020603050405020304" pitchFamily="18" charset="0"/>
-              </a:rPr>
               <a:t>) </a:t>
             </a:r>
             <a:r>
-              <a:rPr lang="pt-BR" sz="1800" dirty="0" err="1">
-                <a:solidFill>
-                  <a:schemeClr val="tx1"/>
-                </a:solidFill>
-                <a:latin typeface="Times New Roman" panose="02020603050405020304" pitchFamily="18" charset="0"/>
-                <a:cs typeface="Times New Roman" panose="02020603050405020304" pitchFamily="18" charset="0"/>
-              </a:rPr>
-              <a:t>values</a:t>
-            </a:r>
-            <a:r>
-              <a:rPr lang="pt-BR" sz="1800" dirty="0">
-                <a:solidFill>
-                  <a:schemeClr val="tx1"/>
-                </a:solidFill>
-                <a:latin typeface="Times New Roman" panose="02020603050405020304" pitchFamily="18" charset="0"/>
-                <a:cs typeface="Times New Roman" panose="02020603050405020304" pitchFamily="18" charset="0"/>
-              </a:rPr>
-              <a:t> (1, 'Josy', 'josy@gmail.com');</a:t>
-            </a:r>
-          </a:p>
-          <a:p>
-            <a:pPr marL="0" indent="0" algn="just">
-              <a:buNone/>
-            </a:pPr>
-            <a:r>
-              <a:rPr lang="pt-BR" sz="1800" dirty="0" err="1">
-                <a:solidFill>
-                  <a:schemeClr val="tx1"/>
-                </a:solidFill>
-                <a:latin typeface="Times New Roman" panose="02020603050405020304" pitchFamily="18" charset="0"/>
-                <a:cs typeface="Times New Roman" panose="02020603050405020304" pitchFamily="18" charset="0"/>
-              </a:rPr>
-              <a:t>insert</a:t>
-            </a:r>
-            <a:r>
-              <a:rPr lang="pt-BR" sz="1800" dirty="0">
-                <a:solidFill>
-                  <a:schemeClr val="tx1"/>
-                </a:solidFill>
-                <a:latin typeface="Times New Roman" panose="02020603050405020304" pitchFamily="18" charset="0"/>
-                <a:cs typeface="Times New Roman" panose="02020603050405020304" pitchFamily="18" charset="0"/>
-              </a:rPr>
-              <a:t> </a:t>
-            </a:r>
-            <a:r>
-              <a:rPr lang="pt-BR" sz="1800" dirty="0" err="1">
-                <a:solidFill>
-                  <a:schemeClr val="tx1"/>
-                </a:solidFill>
-                <a:latin typeface="Times New Roman" panose="02020603050405020304" pitchFamily="18" charset="0"/>
-                <a:cs typeface="Times New Roman" panose="02020603050405020304" pitchFamily="18" charset="0"/>
-              </a:rPr>
-              <a:t>into</a:t>
-            </a:r>
-            <a:r>
-              <a:rPr lang="pt-BR" sz="1800" dirty="0">
-                <a:solidFill>
-                  <a:schemeClr val="tx1"/>
-                </a:solidFill>
-                <a:latin typeface="Times New Roman" panose="02020603050405020304" pitchFamily="18" charset="0"/>
-                <a:cs typeface="Times New Roman" panose="02020603050405020304" pitchFamily="18" charset="0"/>
-              </a:rPr>
-              <a:t> </a:t>
-            </a:r>
-            <a:r>
-              <a:rPr lang="pt-BR" sz="1800" dirty="0" err="1">
-                <a:solidFill>
-                  <a:schemeClr val="tx1"/>
-                </a:solidFill>
-                <a:latin typeface="Times New Roman" panose="02020603050405020304" pitchFamily="18" charset="0"/>
-                <a:cs typeface="Times New Roman" panose="02020603050405020304" pitchFamily="18" charset="0"/>
-              </a:rPr>
-              <a:t>tb_user</a:t>
-            </a:r>
-            <a:r>
-              <a:rPr lang="pt-BR" sz="1800" dirty="0">
-                <a:solidFill>
-                  <a:schemeClr val="tx1"/>
-                </a:solidFill>
-                <a:latin typeface="Times New Roman" panose="02020603050405020304" pitchFamily="18" charset="0"/>
-                <a:cs typeface="Times New Roman" panose="02020603050405020304" pitchFamily="18" charset="0"/>
-              </a:rPr>
-              <a:t> (</a:t>
-            </a:r>
-            <a:r>
-              <a:rPr lang="pt-BR" sz="1800" dirty="0" err="1">
-                <a:solidFill>
-                  <a:schemeClr val="tx1"/>
-                </a:solidFill>
-                <a:latin typeface="Times New Roman" panose="02020603050405020304" pitchFamily="18" charset="0"/>
-                <a:cs typeface="Times New Roman" panose="02020603050405020304" pitchFamily="18" charset="0"/>
-              </a:rPr>
-              <a:t>department_id</a:t>
-            </a:r>
-            <a:r>
-              <a:rPr lang="pt-BR" sz="1800" dirty="0">
-                <a:solidFill>
-                  <a:schemeClr val="tx1"/>
-                </a:solidFill>
-                <a:latin typeface="Times New Roman" panose="02020603050405020304" pitchFamily="18" charset="0"/>
-                <a:cs typeface="Times New Roman" panose="02020603050405020304" pitchFamily="18" charset="0"/>
-              </a:rPr>
-              <a:t>, </a:t>
-            </a:r>
-            <a:r>
-              <a:rPr lang="pt-BR" sz="1800" dirty="0" err="1">
-                <a:solidFill>
-                  <a:schemeClr val="tx1"/>
-                </a:solidFill>
-                <a:latin typeface="Times New Roman" panose="02020603050405020304" pitchFamily="18" charset="0"/>
-                <a:cs typeface="Times New Roman" panose="02020603050405020304" pitchFamily="18" charset="0"/>
-              </a:rPr>
-              <a:t>name</a:t>
-            </a:r>
-            <a:r>
-              <a:rPr lang="pt-BR" sz="1800" dirty="0">
-                <a:solidFill>
-                  <a:schemeClr val="tx1"/>
-                </a:solidFill>
-                <a:latin typeface="Times New Roman" panose="02020603050405020304" pitchFamily="18" charset="0"/>
-                <a:cs typeface="Times New Roman" panose="02020603050405020304" pitchFamily="18" charset="0"/>
-              </a:rPr>
-              <a:t>, </a:t>
-            </a:r>
-            <a:r>
-              <a:rPr lang="pt-BR" sz="1800" dirty="0" err="1">
-                <a:solidFill>
-                  <a:schemeClr val="tx1"/>
-                </a:solidFill>
-                <a:latin typeface="Times New Roman" panose="02020603050405020304" pitchFamily="18" charset="0"/>
-                <a:cs typeface="Times New Roman" panose="02020603050405020304" pitchFamily="18" charset="0"/>
-              </a:rPr>
-              <a:t>email</a:t>
-            </a:r>
-            <a:r>
-              <a:rPr lang="pt-BR" sz="1800" dirty="0">
-                <a:solidFill>
-                  <a:schemeClr val="tx1"/>
-                </a:solidFill>
-                <a:latin typeface="Times New Roman" panose="02020603050405020304" pitchFamily="18" charset="0"/>
-                <a:cs typeface="Times New Roman" panose="02020603050405020304" pitchFamily="18" charset="0"/>
-              </a:rPr>
-              <a:t>) </a:t>
-            </a:r>
-            <a:r>
-              <a:rPr lang="pt-BR" sz="1800" dirty="0" err="1">
-                <a:solidFill>
-                  <a:schemeClr val="tx1"/>
-                </a:solidFill>
-                <a:latin typeface="Times New Roman" panose="02020603050405020304" pitchFamily="18" charset="0"/>
-                <a:cs typeface="Times New Roman" panose="02020603050405020304" pitchFamily="18" charset="0"/>
-              </a:rPr>
-              <a:t>values</a:t>
-            </a:r>
-            <a:r>
-              <a:rPr lang="pt-BR" sz="1800" dirty="0">
-                <a:solidFill>
-                  <a:schemeClr val="tx1"/>
-                </a:solidFill>
-                <a:latin typeface="Times New Roman" panose="02020603050405020304" pitchFamily="18" charset="0"/>
-                <a:cs typeface="Times New Roman" panose="02020603050405020304" pitchFamily="18" charset="0"/>
-              </a:rPr>
-              <a:t> (1, 'Maria', 'maria@gmail.com');</a:t>
-            </a:r>
-          </a:p>
-          <a:p>
-            <a:pPr marL="0" indent="0" algn="just">
-              <a:buNone/>
-            </a:pPr>
-            <a:r>
-              <a:rPr lang="pt-BR" sz="1800" dirty="0" err="1">
-                <a:solidFill>
-                  <a:schemeClr val="tx1"/>
-                </a:solidFill>
-                <a:latin typeface="Times New Roman" panose="02020603050405020304" pitchFamily="18" charset="0"/>
-                <a:cs typeface="Times New Roman" panose="02020603050405020304" pitchFamily="18" charset="0"/>
-              </a:rPr>
-              <a:t>insert</a:t>
-            </a:r>
-            <a:r>
-              <a:rPr lang="pt-BR" sz="1800" dirty="0">
-                <a:solidFill>
-                  <a:schemeClr val="tx1"/>
-                </a:solidFill>
-                <a:latin typeface="Times New Roman" panose="02020603050405020304" pitchFamily="18" charset="0"/>
-                <a:cs typeface="Times New Roman" panose="02020603050405020304" pitchFamily="18" charset="0"/>
-              </a:rPr>
-              <a:t> </a:t>
-            </a:r>
-            <a:r>
-              <a:rPr lang="pt-BR" sz="1800" dirty="0" err="1">
-                <a:solidFill>
-                  <a:schemeClr val="tx1"/>
-                </a:solidFill>
-                <a:latin typeface="Times New Roman" panose="02020603050405020304" pitchFamily="18" charset="0"/>
-                <a:cs typeface="Times New Roman" panose="02020603050405020304" pitchFamily="18" charset="0"/>
-              </a:rPr>
-              <a:t>into</a:t>
-            </a:r>
-            <a:r>
-              <a:rPr lang="pt-BR" sz="1800" dirty="0">
-                <a:solidFill>
-                  <a:schemeClr val="tx1"/>
-                </a:solidFill>
-                <a:latin typeface="Times New Roman" panose="02020603050405020304" pitchFamily="18" charset="0"/>
-                <a:cs typeface="Times New Roman" panose="02020603050405020304" pitchFamily="18" charset="0"/>
-              </a:rPr>
-              <a:t> </a:t>
-            </a:r>
-            <a:r>
-              <a:rPr lang="pt-BR" sz="1800" dirty="0" err="1">
-                <a:solidFill>
-                  <a:schemeClr val="tx1"/>
-                </a:solidFill>
-                <a:latin typeface="Times New Roman" panose="02020603050405020304" pitchFamily="18" charset="0"/>
-                <a:cs typeface="Times New Roman" panose="02020603050405020304" pitchFamily="18" charset="0"/>
-              </a:rPr>
-              <a:t>tb_user</a:t>
-            </a:r>
-            <a:r>
-              <a:rPr lang="pt-BR" sz="1800" dirty="0">
-                <a:solidFill>
-                  <a:schemeClr val="tx1"/>
-                </a:solidFill>
-                <a:latin typeface="Times New Roman" panose="02020603050405020304" pitchFamily="18" charset="0"/>
-                <a:cs typeface="Times New Roman" panose="02020603050405020304" pitchFamily="18" charset="0"/>
-              </a:rPr>
-              <a:t> (</a:t>
-            </a:r>
-            <a:r>
-              <a:rPr lang="pt-BR" sz="1800" dirty="0" err="1">
-                <a:solidFill>
-                  <a:schemeClr val="tx1"/>
-                </a:solidFill>
-                <a:latin typeface="Times New Roman" panose="02020603050405020304" pitchFamily="18" charset="0"/>
-                <a:cs typeface="Times New Roman" panose="02020603050405020304" pitchFamily="18" charset="0"/>
-              </a:rPr>
-              <a:t>department_id</a:t>
-            </a:r>
-            <a:r>
-              <a:rPr lang="pt-BR" sz="1800" dirty="0">
-                <a:solidFill>
-                  <a:schemeClr val="tx1"/>
-                </a:solidFill>
-                <a:latin typeface="Times New Roman" panose="02020603050405020304" pitchFamily="18" charset="0"/>
-                <a:cs typeface="Times New Roman" panose="02020603050405020304" pitchFamily="18" charset="0"/>
-              </a:rPr>
-              <a:t>, </a:t>
-            </a:r>
-            <a:r>
-              <a:rPr lang="pt-BR" sz="1800" dirty="0" err="1">
-                <a:solidFill>
-                  <a:schemeClr val="tx1"/>
-                </a:solidFill>
-                <a:latin typeface="Times New Roman" panose="02020603050405020304" pitchFamily="18" charset="0"/>
-                <a:cs typeface="Times New Roman" panose="02020603050405020304" pitchFamily="18" charset="0"/>
-              </a:rPr>
-              <a:t>name</a:t>
-            </a:r>
-            <a:r>
-              <a:rPr lang="pt-BR" sz="1800" dirty="0">
-                <a:solidFill>
-                  <a:schemeClr val="tx1"/>
-                </a:solidFill>
-                <a:latin typeface="Times New Roman" panose="02020603050405020304" pitchFamily="18" charset="0"/>
-                <a:cs typeface="Times New Roman" panose="02020603050405020304" pitchFamily="18" charset="0"/>
-              </a:rPr>
-              <a:t>, </a:t>
-            </a:r>
-            <a:r>
-              <a:rPr lang="pt-BR" sz="1800" dirty="0" err="1">
-                <a:solidFill>
-                  <a:schemeClr val="tx1"/>
-                </a:solidFill>
-                <a:latin typeface="Times New Roman" panose="02020603050405020304" pitchFamily="18" charset="0"/>
-                <a:cs typeface="Times New Roman" panose="02020603050405020304" pitchFamily="18" charset="0"/>
-              </a:rPr>
-              <a:t>email</a:t>
-            </a:r>
-            <a:r>
-              <a:rPr lang="pt-BR" sz="1800" dirty="0">
-                <a:solidFill>
-                  <a:schemeClr val="tx1"/>
-                </a:solidFill>
-                <a:latin typeface="Times New Roman" panose="02020603050405020304" pitchFamily="18" charset="0"/>
-                <a:cs typeface="Times New Roman" panose="02020603050405020304" pitchFamily="18" charset="0"/>
-              </a:rPr>
-              <a:t>) </a:t>
-            </a:r>
-            <a:r>
-              <a:rPr lang="pt-BR" sz="1800" dirty="0" err="1">
-                <a:solidFill>
-                  <a:schemeClr val="tx1"/>
-                </a:solidFill>
-                <a:latin typeface="Times New Roman" panose="02020603050405020304" pitchFamily="18" charset="0"/>
-                <a:cs typeface="Times New Roman" panose="02020603050405020304" pitchFamily="18" charset="0"/>
-              </a:rPr>
-              <a:t>values</a:t>
-            </a:r>
-            <a:r>
-              <a:rPr lang="pt-BR" sz="1800" dirty="0">
-                <a:solidFill>
-                  <a:schemeClr val="tx1"/>
-                </a:solidFill>
-                <a:latin typeface="Times New Roman" panose="02020603050405020304" pitchFamily="18" charset="0"/>
-                <a:cs typeface="Times New Roman" panose="02020603050405020304" pitchFamily="18" charset="0"/>
-              </a:rPr>
-              <a:t> (2, 'João', 'joao@gmail.com');</a:t>
-            </a:r>
-          </a:p>
-          <a:p>
-            <a:pPr marL="0" indent="0" algn="just">
-              <a:buNone/>
-            </a:pPr>
-            <a:r>
-              <a:rPr lang="pt-BR" sz="1800" dirty="0" err="1">
-                <a:solidFill>
-                  <a:schemeClr val="tx1"/>
-                </a:solidFill>
-                <a:latin typeface="Times New Roman" panose="02020603050405020304" pitchFamily="18" charset="0"/>
-                <a:cs typeface="Times New Roman" panose="02020603050405020304" pitchFamily="18" charset="0"/>
-              </a:rPr>
-              <a:t>insert</a:t>
-            </a:r>
-            <a:r>
-              <a:rPr lang="pt-BR" sz="1800" dirty="0">
-                <a:solidFill>
-                  <a:schemeClr val="tx1"/>
-                </a:solidFill>
-                <a:latin typeface="Times New Roman" panose="02020603050405020304" pitchFamily="18" charset="0"/>
-                <a:cs typeface="Times New Roman" panose="02020603050405020304" pitchFamily="18" charset="0"/>
-              </a:rPr>
-              <a:t> </a:t>
-            </a:r>
-            <a:r>
-              <a:rPr lang="pt-BR" sz="1800" dirty="0" err="1">
-                <a:solidFill>
-                  <a:schemeClr val="tx1"/>
-                </a:solidFill>
-                <a:latin typeface="Times New Roman" panose="02020603050405020304" pitchFamily="18" charset="0"/>
-                <a:cs typeface="Times New Roman" panose="02020603050405020304" pitchFamily="18" charset="0"/>
-              </a:rPr>
-              <a:t>into</a:t>
-            </a:r>
-            <a:r>
-              <a:rPr lang="pt-BR" sz="1800" dirty="0">
-                <a:solidFill>
-                  <a:schemeClr val="tx1"/>
-                </a:solidFill>
-                <a:latin typeface="Times New Roman" panose="02020603050405020304" pitchFamily="18" charset="0"/>
-                <a:cs typeface="Times New Roman" panose="02020603050405020304" pitchFamily="18" charset="0"/>
-              </a:rPr>
-              <a:t> </a:t>
-            </a:r>
-            <a:r>
-              <a:rPr lang="pt-BR" sz="1800" dirty="0" err="1">
-                <a:solidFill>
-                  <a:schemeClr val="tx1"/>
-                </a:solidFill>
-                <a:latin typeface="Times New Roman" panose="02020603050405020304" pitchFamily="18" charset="0"/>
-                <a:cs typeface="Times New Roman" panose="02020603050405020304" pitchFamily="18" charset="0"/>
-              </a:rPr>
-              <a:t>tb_user</a:t>
-            </a:r>
-            <a:r>
-              <a:rPr lang="pt-BR" sz="1800" dirty="0">
-                <a:solidFill>
-                  <a:schemeClr val="tx1"/>
-                </a:solidFill>
-                <a:latin typeface="Times New Roman" panose="02020603050405020304" pitchFamily="18" charset="0"/>
-                <a:cs typeface="Times New Roman" panose="02020603050405020304" pitchFamily="18" charset="0"/>
-              </a:rPr>
-              <a:t> (</a:t>
-            </a:r>
-            <a:r>
-              <a:rPr lang="pt-BR" sz="1800" dirty="0" err="1">
-                <a:solidFill>
-                  <a:schemeClr val="tx1"/>
-                </a:solidFill>
-                <a:latin typeface="Times New Roman" panose="02020603050405020304" pitchFamily="18" charset="0"/>
-                <a:cs typeface="Times New Roman" panose="02020603050405020304" pitchFamily="18" charset="0"/>
-              </a:rPr>
-              <a:t>department_id</a:t>
-            </a:r>
-            <a:r>
-              <a:rPr lang="pt-BR" sz="1800" dirty="0">
-                <a:solidFill>
-                  <a:schemeClr val="tx1"/>
-                </a:solidFill>
-                <a:latin typeface="Times New Roman" panose="02020603050405020304" pitchFamily="18" charset="0"/>
-                <a:cs typeface="Times New Roman" panose="02020603050405020304" pitchFamily="18" charset="0"/>
-              </a:rPr>
-              <a:t>, </a:t>
-            </a:r>
-            <a:r>
-              <a:rPr lang="pt-BR" sz="1800" dirty="0" err="1">
-                <a:solidFill>
-                  <a:schemeClr val="tx1"/>
-                </a:solidFill>
-                <a:latin typeface="Times New Roman" panose="02020603050405020304" pitchFamily="18" charset="0"/>
-                <a:cs typeface="Times New Roman" panose="02020603050405020304" pitchFamily="18" charset="0"/>
-              </a:rPr>
-              <a:t>name</a:t>
-            </a:r>
-            <a:r>
-              <a:rPr lang="pt-BR" sz="1800" dirty="0">
-                <a:solidFill>
-                  <a:schemeClr val="tx1"/>
-                </a:solidFill>
-                <a:latin typeface="Times New Roman" panose="02020603050405020304" pitchFamily="18" charset="0"/>
-                <a:cs typeface="Times New Roman" panose="02020603050405020304" pitchFamily="18" charset="0"/>
-              </a:rPr>
-              <a:t>, </a:t>
-            </a:r>
-            <a:r>
-              <a:rPr lang="pt-BR" sz="1800" dirty="0" err="1">
-                <a:solidFill>
-                  <a:schemeClr val="tx1"/>
-                </a:solidFill>
-                <a:latin typeface="Times New Roman" panose="02020603050405020304" pitchFamily="18" charset="0"/>
-                <a:cs typeface="Times New Roman" panose="02020603050405020304" pitchFamily="18" charset="0"/>
-              </a:rPr>
-              <a:t>email</a:t>
-            </a:r>
-            <a:r>
-              <a:rPr lang="pt-BR" sz="1800" dirty="0">
-                <a:solidFill>
-                  <a:schemeClr val="tx1"/>
-                </a:solidFill>
-                <a:latin typeface="Times New Roman" panose="02020603050405020304" pitchFamily="18" charset="0"/>
-                <a:cs typeface="Times New Roman" panose="02020603050405020304" pitchFamily="18" charset="0"/>
-              </a:rPr>
-              <a:t>) </a:t>
-            </a:r>
-            <a:r>
-              <a:rPr lang="pt-BR" sz="1800" dirty="0" err="1">
-                <a:solidFill>
-                  <a:schemeClr val="tx1"/>
-                </a:solidFill>
-                <a:latin typeface="Times New Roman" panose="02020603050405020304" pitchFamily="18" charset="0"/>
-                <a:cs typeface="Times New Roman" panose="02020603050405020304" pitchFamily="18" charset="0"/>
-              </a:rPr>
-              <a:t>values</a:t>
-            </a:r>
-            <a:r>
-              <a:rPr lang="pt-BR" sz="1800" dirty="0">
-                <a:solidFill>
-                  <a:schemeClr val="tx1"/>
-                </a:solidFill>
-                <a:latin typeface="Times New Roman" panose="02020603050405020304" pitchFamily="18" charset="0"/>
-                <a:cs typeface="Times New Roman" panose="02020603050405020304" pitchFamily="18" charset="0"/>
-              </a:rPr>
-              <a:t> (3, 'Pedro', 'pedro@gmail.com');</a:t>
-            </a:r>
-          </a:p>
-          <a:p>
-            <a:pPr marL="0" indent="0" algn="just">
-              <a:buNone/>
-            </a:pPr>
-            <a:r>
-              <a:rPr lang="pt-BR" sz="1800" dirty="0" err="1">
-                <a:solidFill>
-                  <a:schemeClr val="tx1"/>
-                </a:solidFill>
-                <a:latin typeface="Times New Roman" panose="02020603050405020304" pitchFamily="18" charset="0"/>
-                <a:cs typeface="Times New Roman" panose="02020603050405020304" pitchFamily="18" charset="0"/>
-              </a:rPr>
-              <a:t>insert</a:t>
-            </a:r>
-            <a:r>
-              <a:rPr lang="pt-BR" sz="1800" dirty="0">
-                <a:solidFill>
-                  <a:schemeClr val="tx1"/>
-                </a:solidFill>
-                <a:latin typeface="Times New Roman" panose="02020603050405020304" pitchFamily="18" charset="0"/>
-                <a:cs typeface="Times New Roman" panose="02020603050405020304" pitchFamily="18" charset="0"/>
-              </a:rPr>
-              <a:t> </a:t>
-            </a:r>
-            <a:r>
-              <a:rPr lang="pt-BR" sz="1800" dirty="0" err="1">
-                <a:solidFill>
-                  <a:schemeClr val="tx1"/>
-                </a:solidFill>
-                <a:latin typeface="Times New Roman" panose="02020603050405020304" pitchFamily="18" charset="0"/>
-                <a:cs typeface="Times New Roman" panose="02020603050405020304" pitchFamily="18" charset="0"/>
-              </a:rPr>
-              <a:t>into</a:t>
-            </a:r>
-            <a:r>
-              <a:rPr lang="pt-BR" sz="1800" dirty="0">
-                <a:solidFill>
-                  <a:schemeClr val="tx1"/>
-                </a:solidFill>
-                <a:latin typeface="Times New Roman" panose="02020603050405020304" pitchFamily="18" charset="0"/>
-                <a:cs typeface="Times New Roman" panose="02020603050405020304" pitchFamily="18" charset="0"/>
-              </a:rPr>
-              <a:t> </a:t>
-            </a:r>
-            <a:r>
-              <a:rPr lang="pt-BR" sz="1800" dirty="0" err="1">
-                <a:solidFill>
-                  <a:schemeClr val="tx1"/>
-                </a:solidFill>
-                <a:latin typeface="Times New Roman" panose="02020603050405020304" pitchFamily="18" charset="0"/>
-                <a:cs typeface="Times New Roman" panose="02020603050405020304" pitchFamily="18" charset="0"/>
-              </a:rPr>
-              <a:t>tb_user</a:t>
-            </a:r>
-            <a:r>
-              <a:rPr lang="pt-BR" sz="1800" dirty="0">
-                <a:solidFill>
-                  <a:schemeClr val="tx1"/>
-                </a:solidFill>
-                <a:latin typeface="Times New Roman" panose="02020603050405020304" pitchFamily="18" charset="0"/>
-                <a:cs typeface="Times New Roman" panose="02020603050405020304" pitchFamily="18" charset="0"/>
-              </a:rPr>
-              <a:t> (</a:t>
-            </a:r>
-            <a:r>
-              <a:rPr lang="pt-BR" sz="1800" dirty="0" err="1">
-                <a:solidFill>
-                  <a:schemeClr val="tx1"/>
-                </a:solidFill>
-                <a:latin typeface="Times New Roman" panose="02020603050405020304" pitchFamily="18" charset="0"/>
-                <a:cs typeface="Times New Roman" panose="02020603050405020304" pitchFamily="18" charset="0"/>
-              </a:rPr>
-              <a:t>department_id</a:t>
-            </a:r>
-            <a:r>
-              <a:rPr lang="pt-BR" sz="1800" dirty="0">
-                <a:solidFill>
-                  <a:schemeClr val="tx1"/>
-                </a:solidFill>
-                <a:latin typeface="Times New Roman" panose="02020603050405020304" pitchFamily="18" charset="0"/>
-                <a:cs typeface="Times New Roman" panose="02020603050405020304" pitchFamily="18" charset="0"/>
-              </a:rPr>
-              <a:t>, </a:t>
-            </a:r>
-            <a:r>
-              <a:rPr lang="pt-BR" sz="1800" dirty="0" err="1">
-                <a:solidFill>
-                  <a:schemeClr val="tx1"/>
-                </a:solidFill>
-                <a:latin typeface="Times New Roman" panose="02020603050405020304" pitchFamily="18" charset="0"/>
-                <a:cs typeface="Times New Roman" panose="02020603050405020304" pitchFamily="18" charset="0"/>
-              </a:rPr>
-              <a:t>name</a:t>
-            </a:r>
-            <a:r>
-              <a:rPr lang="pt-BR" sz="1800" dirty="0">
-                <a:solidFill>
-                  <a:schemeClr val="tx1"/>
-                </a:solidFill>
-                <a:latin typeface="Times New Roman" panose="02020603050405020304" pitchFamily="18" charset="0"/>
-                <a:cs typeface="Times New Roman" panose="02020603050405020304" pitchFamily="18" charset="0"/>
-              </a:rPr>
-              <a:t>, </a:t>
-            </a:r>
-            <a:r>
-              <a:rPr lang="pt-BR" sz="1800" dirty="0" err="1">
-                <a:solidFill>
-                  <a:schemeClr val="tx1"/>
-                </a:solidFill>
-                <a:latin typeface="Times New Roman" panose="02020603050405020304" pitchFamily="18" charset="0"/>
-                <a:cs typeface="Times New Roman" panose="02020603050405020304" pitchFamily="18" charset="0"/>
-              </a:rPr>
-              <a:t>email</a:t>
-            </a:r>
-            <a:r>
-              <a:rPr lang="pt-BR" sz="1800" dirty="0">
-                <a:solidFill>
-                  <a:schemeClr val="tx1"/>
-                </a:solidFill>
-                <a:latin typeface="Times New Roman" panose="02020603050405020304" pitchFamily="18" charset="0"/>
-                <a:cs typeface="Times New Roman" panose="02020603050405020304" pitchFamily="18" charset="0"/>
-              </a:rPr>
-              <a:t>) </a:t>
-            </a:r>
-            <a:r>
-              <a:rPr lang="pt-BR" sz="1800" dirty="0" err="1">
-                <a:solidFill>
-                  <a:schemeClr val="tx1"/>
-                </a:solidFill>
-                <a:latin typeface="Times New Roman" panose="02020603050405020304" pitchFamily="18" charset="0"/>
-                <a:cs typeface="Times New Roman" panose="02020603050405020304" pitchFamily="18" charset="0"/>
-              </a:rPr>
-              <a:t>values</a:t>
-            </a:r>
-            <a:r>
-              <a:rPr lang="pt-BR" sz="1800" dirty="0">
-                <a:solidFill>
-                  <a:schemeClr val="tx1"/>
-                </a:solidFill>
-                <a:latin typeface="Times New Roman" panose="02020603050405020304" pitchFamily="18" charset="0"/>
-                <a:cs typeface="Times New Roman" panose="02020603050405020304" pitchFamily="18" charset="0"/>
-              </a:rPr>
-              <a:t> (2, 'Paulo', 'paulo@gmail.com');</a:t>
-            </a:r>
-          </a:p>
-          <a:p>
-            <a:pPr marL="0" indent="0" algn="just">
-              <a:buNone/>
-            </a:pPr>
-            <a:r>
-              <a:rPr lang="pt-BR" sz="1800" dirty="0" err="1">
-                <a:solidFill>
-                  <a:schemeClr val="tx1"/>
-                </a:solidFill>
-                <a:latin typeface="Times New Roman" panose="02020603050405020304" pitchFamily="18" charset="0"/>
-                <a:cs typeface="Times New Roman" panose="02020603050405020304" pitchFamily="18" charset="0"/>
-              </a:rPr>
-              <a:t>insert</a:t>
-            </a:r>
-            <a:r>
-              <a:rPr lang="pt-BR" sz="1800" dirty="0">
-                <a:solidFill>
-                  <a:schemeClr val="tx1"/>
-                </a:solidFill>
-                <a:latin typeface="Times New Roman" panose="02020603050405020304" pitchFamily="18" charset="0"/>
-                <a:cs typeface="Times New Roman" panose="02020603050405020304" pitchFamily="18" charset="0"/>
-              </a:rPr>
-              <a:t> </a:t>
-            </a:r>
-            <a:r>
-              <a:rPr lang="pt-BR" sz="1800" dirty="0" err="1">
-                <a:solidFill>
-                  <a:schemeClr val="tx1"/>
-                </a:solidFill>
-                <a:latin typeface="Times New Roman" panose="02020603050405020304" pitchFamily="18" charset="0"/>
-                <a:cs typeface="Times New Roman" panose="02020603050405020304" pitchFamily="18" charset="0"/>
-              </a:rPr>
-              <a:t>into</a:t>
-            </a:r>
-            <a:r>
-              <a:rPr lang="pt-BR" sz="1800" dirty="0">
-                <a:solidFill>
-                  <a:schemeClr val="tx1"/>
-                </a:solidFill>
-                <a:latin typeface="Times New Roman" panose="02020603050405020304" pitchFamily="18" charset="0"/>
-                <a:cs typeface="Times New Roman" panose="02020603050405020304" pitchFamily="18" charset="0"/>
-              </a:rPr>
-              <a:t> </a:t>
-            </a:r>
-            <a:r>
-              <a:rPr lang="pt-BR" sz="1800" dirty="0" err="1">
-                <a:solidFill>
-                  <a:schemeClr val="tx1"/>
-                </a:solidFill>
-                <a:latin typeface="Times New Roman" panose="02020603050405020304" pitchFamily="18" charset="0"/>
-                <a:cs typeface="Times New Roman" panose="02020603050405020304" pitchFamily="18" charset="0"/>
-              </a:rPr>
-              <a:t>tb_user</a:t>
-            </a:r>
-            <a:r>
-              <a:rPr lang="pt-BR" sz="1800" dirty="0">
-                <a:solidFill>
-                  <a:schemeClr val="tx1"/>
-                </a:solidFill>
-                <a:latin typeface="Times New Roman" panose="02020603050405020304" pitchFamily="18" charset="0"/>
-                <a:cs typeface="Times New Roman" panose="02020603050405020304" pitchFamily="18" charset="0"/>
-              </a:rPr>
-              <a:t> (</a:t>
-            </a:r>
-            <a:r>
-              <a:rPr lang="pt-BR" sz="1800" dirty="0" err="1">
-                <a:solidFill>
-                  <a:schemeClr val="tx1"/>
-                </a:solidFill>
-                <a:latin typeface="Times New Roman" panose="02020603050405020304" pitchFamily="18" charset="0"/>
-                <a:cs typeface="Times New Roman" panose="02020603050405020304" pitchFamily="18" charset="0"/>
-              </a:rPr>
-              <a:t>department_id</a:t>
-            </a:r>
-            <a:r>
-              <a:rPr lang="pt-BR" sz="1800" dirty="0">
-                <a:solidFill>
-                  <a:schemeClr val="tx1"/>
-                </a:solidFill>
-                <a:latin typeface="Times New Roman" panose="02020603050405020304" pitchFamily="18" charset="0"/>
-                <a:cs typeface="Times New Roman" panose="02020603050405020304" pitchFamily="18" charset="0"/>
-              </a:rPr>
-              <a:t>, </a:t>
-            </a:r>
-            <a:r>
-              <a:rPr lang="pt-BR" sz="1800" dirty="0" err="1">
-                <a:solidFill>
-                  <a:schemeClr val="tx1"/>
-                </a:solidFill>
-                <a:latin typeface="Times New Roman" panose="02020603050405020304" pitchFamily="18" charset="0"/>
-                <a:cs typeface="Times New Roman" panose="02020603050405020304" pitchFamily="18" charset="0"/>
-              </a:rPr>
-              <a:t>name</a:t>
-            </a:r>
-            <a:r>
-              <a:rPr lang="pt-BR" sz="1800" dirty="0">
-                <a:solidFill>
-                  <a:schemeClr val="tx1"/>
-                </a:solidFill>
-                <a:latin typeface="Times New Roman" panose="02020603050405020304" pitchFamily="18" charset="0"/>
-                <a:cs typeface="Times New Roman" panose="02020603050405020304" pitchFamily="18" charset="0"/>
-              </a:rPr>
-              <a:t>, </a:t>
-            </a:r>
-            <a:r>
-              <a:rPr lang="pt-BR" sz="1800" dirty="0" err="1">
-                <a:solidFill>
-                  <a:schemeClr val="tx1"/>
-                </a:solidFill>
-                <a:latin typeface="Times New Roman" panose="02020603050405020304" pitchFamily="18" charset="0"/>
-                <a:cs typeface="Times New Roman" panose="02020603050405020304" pitchFamily="18" charset="0"/>
-              </a:rPr>
-              <a:t>email</a:t>
-            </a:r>
-            <a:r>
-              <a:rPr lang="pt-BR" sz="1800" dirty="0">
-                <a:solidFill>
-                  <a:schemeClr val="tx1"/>
-                </a:solidFill>
-                <a:latin typeface="Times New Roman" panose="02020603050405020304" pitchFamily="18" charset="0"/>
-                <a:cs typeface="Times New Roman" panose="02020603050405020304" pitchFamily="18" charset="0"/>
-              </a:rPr>
-              <a:t>) </a:t>
-            </a:r>
-            <a:r>
-              <a:rPr lang="pt-BR" sz="1800" dirty="0" err="1">
+              <a:rPr lang="pt-BR" sz="1800" b="1" dirty="0" err="1">
                 <a:solidFill>
                   <a:schemeClr val="tx1"/>
                 </a:solidFill>
@@ -7956,7 +8380,7 @@
                   <a:srgbClr val="0070C0"/>
                 </a:solidFill>
               </a:rPr>
-              <a:t>Leitura</a:t>
+              <a:t>Projeto</a:t>
             </a:r>
             <a:r>
               <a:rPr lang="en-US" b="1" dirty="0">
@@ -7964,21 +8388,8 @@
                   <a:srgbClr val="0070C0"/>
                 </a:solidFill>
               </a:rPr>
-              <a:t> </a:t>
-            </a:r>
-            <a:r>
-              <a:rPr lang="en-US" b="1" dirty="0" err="1">
-                <a:solidFill>
-                  <a:srgbClr val="0070C0"/>
-                </a:solidFill>
-              </a:rPr>
-              <a:t>Específica</a:t>
-            </a:r>
-            <a:endParaRPr lang="en-US" b="1" dirty="0">
-              <a:solidFill>
-                <a:srgbClr val="0070C0"/>
-              </a:solidFill>
-            </a:endParaRPr>
+              <a:t> Web JAVA – Código</a:t>
+            </a:r>
           </a:p>
         </p:txBody>
       </p:sp>
@@ -7994,8 +8405,8 @@
         </p:nvSpPr>
         <p:spPr>
           <a:xfrm>
-            <a:off x="142865" y="1012261"/>
-            <a:ext cx="8865056" cy="3835312"/>
+            <a:off x="142865" y="1037312"/>
+            <a:ext cx="8865056" cy="3900208"/>
           </a:xfrm>
         </p:spPr>
         <p:txBody>
@@ -8008,41 +8419,319 @@
               <a:buNone/>
             </a:pPr>
             <a:r>
-              <a:rPr lang="pt-BR" sz="2000" dirty="0">
-                <a:latin typeface="Times New Roman" panose="02020603050405020304" pitchFamily="18" charset="0"/>
-                <a:cs typeface="Times New Roman" panose="02020603050405020304" pitchFamily="18" charset="0"/>
-              </a:rPr>
-              <a:t>[1] </a:t>
-            </a:r>
-            <a:r>
-              <a:rPr lang="pt-BR" sz="2000" b="1" dirty="0">
-                <a:latin typeface="Times New Roman" panose="02020603050405020304" pitchFamily="18" charset="0"/>
-                <a:cs typeface="Times New Roman" panose="02020603050405020304" pitchFamily="18" charset="0"/>
-              </a:rPr>
-              <a:t>JAVA Cartão CRC</a:t>
-            </a:r>
-            <a:endParaRPr lang="pt-BR" sz="2000" dirty="0">
-              <a:latin typeface="Times New Roman" panose="02020603050405020304" pitchFamily="18" charset="0"/>
-              <a:cs typeface="Times New Roman" panose="02020603050405020304" pitchFamily="18" charset="0"/>
-            </a:endParaRPr>
+              <a:rPr lang="pt-BR" sz="2400" dirty="0">
+                <a:solidFill>
+                  <a:schemeClr val="tx1"/>
+                </a:solidFill>
+                <a:latin typeface="Times New Roman" panose="02020603050405020304" pitchFamily="18" charset="0"/>
+                <a:cs typeface="Times New Roman" panose="02020603050405020304" pitchFamily="18" charset="0"/>
+              </a:rPr>
+              <a:t> </a:t>
+            </a:r>
+            <a:r>
+              <a:rPr lang="pt-BR" sz="2400" b="1" dirty="0">
+                <a:solidFill>
+                  <a:schemeClr val="tx1"/>
+                </a:solidFill>
+                <a:latin typeface="Times New Roman" panose="02020603050405020304" pitchFamily="18" charset="0"/>
+                <a:cs typeface="Times New Roman" panose="02020603050405020304" pitchFamily="18" charset="0"/>
+              </a:rPr>
+              <a:t> Componentes</a:t>
+            </a:r>
+            <a:r>
+              <a:rPr lang="pt-BR" sz="2400" dirty="0">
+                <a:solidFill>
+                  <a:schemeClr val="tx1"/>
+                </a:solidFill>
+                <a:latin typeface="Times New Roman" panose="02020603050405020304" pitchFamily="18" charset="0"/>
+                <a:cs typeface="Times New Roman" panose="02020603050405020304" pitchFamily="18" charset="0"/>
+              </a:rPr>
+              <a:t>: </a:t>
+            </a:r>
+            <a:r>
+              <a:rPr lang="pt-BR" sz="2400" dirty="0" err="1">
+                <a:solidFill>
+                  <a:schemeClr val="tx1"/>
+                </a:solidFill>
+                <a:latin typeface="Times New Roman" panose="02020603050405020304" pitchFamily="18" charset="0"/>
+                <a:cs typeface="Times New Roman" panose="02020603050405020304" pitchFamily="18" charset="0"/>
+              </a:rPr>
+              <a:t>controllers</a:t>
+            </a:r>
+            <a:r>
+              <a:rPr lang="pt-BR" sz="2400" dirty="0">
+                <a:solidFill>
+                  <a:schemeClr val="tx1"/>
+                </a:solidFill>
+                <a:latin typeface="Times New Roman" panose="02020603050405020304" pitchFamily="18" charset="0"/>
+                <a:cs typeface="Times New Roman" panose="02020603050405020304" pitchFamily="18" charset="0"/>
+              </a:rPr>
+              <a:t>; </a:t>
+            </a:r>
+            <a:r>
+              <a:rPr lang="pt-BR" sz="2400" dirty="0" err="1">
+                <a:solidFill>
+                  <a:schemeClr val="tx1"/>
+                </a:solidFill>
+                <a:latin typeface="Times New Roman" panose="02020603050405020304" pitchFamily="18" charset="0"/>
+                <a:cs typeface="Times New Roman" panose="02020603050405020304" pitchFamily="18" charset="0"/>
+              </a:rPr>
+              <a:t>services</a:t>
+            </a:r>
+            <a:r>
+              <a:rPr lang="pt-BR" sz="2400" dirty="0">
+                <a:solidFill>
+                  <a:schemeClr val="tx1"/>
+                </a:solidFill>
+                <a:latin typeface="Times New Roman" panose="02020603050405020304" pitchFamily="18" charset="0"/>
+                <a:cs typeface="Times New Roman" panose="02020603050405020304" pitchFamily="18" charset="0"/>
+              </a:rPr>
+              <a:t>; </a:t>
+            </a:r>
+            <a:r>
+              <a:rPr lang="pt-BR" sz="2400" dirty="0" err="1">
+                <a:solidFill>
+                  <a:schemeClr val="tx1"/>
+                </a:solidFill>
+                <a:latin typeface="Times New Roman" panose="02020603050405020304" pitchFamily="18" charset="0"/>
+                <a:cs typeface="Times New Roman" panose="02020603050405020304" pitchFamily="18" charset="0"/>
+              </a:rPr>
+              <a:t>repositories</a:t>
+            </a:r>
+            <a:r>
+              <a:rPr lang="pt-BR" sz="2400" dirty="0">
+                <a:solidFill>
+                  <a:schemeClr val="tx1"/>
+                </a:solidFill>
+                <a:latin typeface="Times New Roman" panose="02020603050405020304" pitchFamily="18" charset="0"/>
+                <a:cs typeface="Times New Roman" panose="02020603050405020304" pitchFamily="18" charset="0"/>
+              </a:rPr>
+              <a:t>; </a:t>
+            </a:r>
+            <a:r>
+              <a:rPr lang="pt-BR" sz="2400" dirty="0" err="1">
+                <a:solidFill>
+                  <a:schemeClr val="tx1"/>
+                </a:solidFill>
+                <a:latin typeface="Times New Roman" panose="02020603050405020304" pitchFamily="18" charset="0"/>
+                <a:cs typeface="Times New Roman" panose="02020603050405020304" pitchFamily="18" charset="0"/>
+              </a:rPr>
+              <a:t>entities</a:t>
+            </a:r>
+            <a:r>
+              <a:rPr lang="pt-BR" sz="2400" dirty="0">
+                <a:solidFill>
+                  <a:schemeClr val="tx1"/>
+                </a:solidFill>
+                <a:latin typeface="Times New Roman" panose="02020603050405020304" pitchFamily="18" charset="0"/>
+                <a:cs typeface="Times New Roman" panose="02020603050405020304" pitchFamily="18" charset="0"/>
+              </a:rPr>
+              <a:t>; interfaces.</a:t>
+            </a:r>
           </a:p>
           <a:p>
             <a:pPr marL="0" indent="0" algn="just">
               <a:buNone/>
             </a:pPr>
             <a:r>
-              <a:rPr lang="pt-BR" sz="2000" b="1" dirty="0">
-                <a:latin typeface="Times New Roman" panose="02020603050405020304" pitchFamily="18" charset="0"/>
-                <a:cs typeface="Times New Roman" panose="02020603050405020304" pitchFamily="18" charset="0"/>
-              </a:rPr>
-              <a:t>	Disponível em</a:t>
-            </a:r>
-            <a:r>
-              <a:rPr lang="pt-BR" sz="2000" dirty="0">
-                <a:latin typeface="Times New Roman" panose="02020603050405020304" pitchFamily="18" charset="0"/>
-                <a:cs typeface="Times New Roman" panose="02020603050405020304" pitchFamily="18" charset="0"/>
-              </a:rPr>
-              <a:t>:</a:t>
+              <a:rPr lang="pt-BR" sz="2400" dirty="0">
+                <a:solidFill>
+                  <a:schemeClr val="tx1"/>
+                </a:solidFill>
+                <a:latin typeface="Times New Roman" panose="02020603050405020304" pitchFamily="18" charset="0"/>
+                <a:cs typeface="Times New Roman" panose="02020603050405020304" pitchFamily="18" charset="0"/>
+              </a:rPr>
+              <a:t>	</a:t>
+            </a:r>
+            <a:r>
+              <a:rPr lang="pt-BR" sz="2400" b="1" dirty="0">
+                <a:solidFill>
+                  <a:srgbClr val="FF0000"/>
+                </a:solidFill>
+                <a:latin typeface="Times New Roman" panose="02020603050405020304" pitchFamily="18" charset="0"/>
+                <a:cs typeface="Times New Roman" panose="02020603050405020304" pitchFamily="18" charset="0"/>
+              </a:rPr>
+              <a:t>entidade</a:t>
+            </a:r>
+            <a:r>
+              <a:rPr lang="pt-BR" sz="2400" dirty="0">
+                <a:solidFill>
+                  <a:schemeClr val="tx1"/>
+                </a:solidFill>
+                <a:latin typeface="Times New Roman" panose="02020603050405020304" pitchFamily="18" charset="0"/>
+                <a:cs typeface="Times New Roman" panose="02020603050405020304" pitchFamily="18" charset="0"/>
+              </a:rPr>
+              <a:t> </a:t>
+            </a:r>
+            <a:r>
+              <a:rPr lang="pt-BR" sz="2400" b="1" dirty="0" err="1">
+                <a:solidFill>
+                  <a:schemeClr val="tx1"/>
+                </a:solidFill>
+                <a:latin typeface="Times New Roman" panose="02020603050405020304" pitchFamily="18" charset="0"/>
+                <a:cs typeface="Times New Roman" panose="02020603050405020304" pitchFamily="18" charset="0"/>
+              </a:rPr>
+              <a:t>class</a:t>
+            </a:r>
+            <a:r>
+              <a:rPr lang="pt-BR" sz="2400" dirty="0">
+                <a:solidFill>
+                  <a:schemeClr val="tx1"/>
+                </a:solidFill>
+                <a:latin typeface="Times New Roman" panose="02020603050405020304" pitchFamily="18" charset="0"/>
+                <a:cs typeface="Times New Roman" panose="02020603050405020304" pitchFamily="18" charset="0"/>
+              </a:rPr>
+              <a:t> </a:t>
+            </a:r>
+            <a:r>
+              <a:rPr lang="pt-BR" sz="2400" dirty="0" err="1">
+                <a:solidFill>
+                  <a:schemeClr val="tx1"/>
+                </a:solidFill>
+                <a:latin typeface="Times New Roman" panose="02020603050405020304" pitchFamily="18" charset="0"/>
+                <a:cs typeface="Times New Roman" panose="02020603050405020304" pitchFamily="18" charset="0"/>
+              </a:rPr>
+              <a:t>Department</a:t>
+            </a:r>
+            <a:r>
+              <a:rPr lang="pt-BR" sz="2400" dirty="0">
+                <a:solidFill>
+                  <a:schemeClr val="tx1"/>
+                </a:solidFill>
+                <a:latin typeface="Times New Roman" panose="02020603050405020304" pitchFamily="18" charset="0"/>
+                <a:cs typeface="Times New Roman" panose="02020603050405020304" pitchFamily="18" charset="0"/>
+              </a:rPr>
+              <a:t>; </a:t>
+            </a:r>
+            <a:r>
+              <a:rPr lang="pt-BR" sz="2400" b="1" dirty="0">
+                <a:solidFill>
+                  <a:srgbClr val="FF0000"/>
+                </a:solidFill>
+                <a:latin typeface="Times New Roman" panose="02020603050405020304" pitchFamily="18" charset="0"/>
+                <a:cs typeface="Times New Roman" panose="02020603050405020304" pitchFamily="18" charset="0"/>
+              </a:rPr>
+              <a:t>recursos </a:t>
+            </a:r>
+            <a:r>
+              <a:rPr lang="pt-BR" sz="2400" dirty="0" err="1">
+                <a:solidFill>
+                  <a:schemeClr val="tx1"/>
+                </a:solidFill>
+                <a:latin typeface="Times New Roman" panose="02020603050405020304" pitchFamily="18" charset="0"/>
+                <a:cs typeface="Times New Roman" panose="02020603050405020304" pitchFamily="18" charset="0"/>
+              </a:rPr>
+              <a:t>DepartmentController</a:t>
+            </a:r>
+            <a:r>
+              <a:rPr lang="pt-BR" sz="2400" dirty="0">
+                <a:solidFill>
+                  <a:schemeClr val="tx1"/>
+                </a:solidFill>
+                <a:latin typeface="Times New Roman" panose="02020603050405020304" pitchFamily="18" charset="0"/>
+                <a:cs typeface="Times New Roman" panose="02020603050405020304" pitchFamily="18" charset="0"/>
+              </a:rPr>
+              <a:t>; </a:t>
+            </a:r>
+            <a:r>
+              <a:rPr lang="pt-BR" sz="2400" b="1" dirty="0">
+                <a:solidFill>
+                  <a:srgbClr val="FF0000"/>
+                </a:solidFill>
+                <a:latin typeface="Times New Roman" panose="02020603050405020304" pitchFamily="18" charset="0"/>
+                <a:cs typeface="Times New Roman" panose="02020603050405020304" pitchFamily="18" charset="0"/>
+              </a:rPr>
+              <a:t>serviços </a:t>
+            </a:r>
+            <a:r>
+              <a:rPr lang="pt-BR" sz="2400" dirty="0" err="1">
+                <a:solidFill>
+                  <a:schemeClr val="tx1"/>
+                </a:solidFill>
+                <a:latin typeface="Times New Roman" panose="02020603050405020304" pitchFamily="18" charset="0"/>
+                <a:cs typeface="Times New Roman" panose="02020603050405020304" pitchFamily="18" charset="0"/>
+              </a:rPr>
+              <a:t>DepartmentService</a:t>
+            </a:r>
+            <a:r>
+              <a:rPr lang="pt-BR" sz="2400" dirty="0">
+                <a:solidFill>
+                  <a:schemeClr val="tx1"/>
+                </a:solidFill>
+                <a:latin typeface="Times New Roman" panose="02020603050405020304" pitchFamily="18" charset="0"/>
+                <a:cs typeface="Times New Roman" panose="02020603050405020304" pitchFamily="18" charset="0"/>
+              </a:rPr>
+              <a:t>; </a:t>
+            </a:r>
+            <a:r>
+              <a:rPr lang="pt-BR" sz="2400" b="1" dirty="0">
+                <a:solidFill>
+                  <a:srgbClr val="FF0000"/>
+                </a:solidFill>
+                <a:latin typeface="Times New Roman" panose="02020603050405020304" pitchFamily="18" charset="0"/>
+                <a:cs typeface="Times New Roman" panose="02020603050405020304" pitchFamily="18" charset="0"/>
+              </a:rPr>
+              <a:t>interface </a:t>
+            </a:r>
+            <a:r>
+              <a:rPr lang="pt-BR" sz="2400" dirty="0" err="1">
+                <a:solidFill>
+                  <a:schemeClr val="tx1"/>
+                </a:solidFill>
+                <a:latin typeface="Times New Roman" panose="02020603050405020304" pitchFamily="18" charset="0"/>
+                <a:cs typeface="Times New Roman" panose="02020603050405020304" pitchFamily="18" charset="0"/>
+              </a:rPr>
+              <a:t>DepartmentRepository</a:t>
+            </a:r>
+            <a:r>
+              <a:rPr lang="pt-BR" sz="2400" dirty="0">
+                <a:solidFill>
+                  <a:schemeClr val="tx1"/>
+                </a:solidFill>
+                <a:latin typeface="Times New Roman" panose="02020603050405020304" pitchFamily="18" charset="0"/>
+                <a:cs typeface="Times New Roman" panose="02020603050405020304" pitchFamily="18" charset="0"/>
+              </a:rPr>
+              <a:t>; </a:t>
+            </a:r>
+            <a:r>
+              <a:rPr lang="pt-BR" sz="2400" b="1" dirty="0">
+                <a:solidFill>
+                  <a:srgbClr val="FF0000"/>
+                </a:solidFill>
+                <a:latin typeface="Times New Roman" panose="02020603050405020304" pitchFamily="18" charset="0"/>
+                <a:cs typeface="Times New Roman" panose="02020603050405020304" pitchFamily="18" charset="0"/>
+              </a:rPr>
+              <a:t>DTO</a:t>
+            </a:r>
+            <a:r>
+              <a:rPr lang="pt-BR" sz="2400" dirty="0">
+                <a:solidFill>
+                  <a:schemeClr val="tx1"/>
+                </a:solidFill>
+                <a:latin typeface="Times New Roman" panose="02020603050405020304" pitchFamily="18" charset="0"/>
+                <a:cs typeface="Times New Roman" panose="02020603050405020304" pitchFamily="18" charset="0"/>
+              </a:rPr>
+              <a:t>  </a:t>
+            </a:r>
+            <a:r>
+              <a:rPr lang="pt-BR" sz="2400" dirty="0" err="1">
+                <a:solidFill>
+                  <a:schemeClr val="tx1"/>
+                </a:solidFill>
+                <a:latin typeface="Times New Roman" panose="02020603050405020304" pitchFamily="18" charset="0"/>
+                <a:cs typeface="Times New Roman" panose="02020603050405020304" pitchFamily="18" charset="0"/>
+              </a:rPr>
+              <a:t>DepartmentDTO</a:t>
+            </a:r>
+            <a:r>
+              <a:rPr lang="pt-BR" sz="2400" dirty="0">
+                <a:solidFill>
+                  <a:schemeClr val="tx1"/>
+                </a:solidFill>
+                <a:latin typeface="Times New Roman" panose="02020603050405020304" pitchFamily="18" charset="0"/>
+                <a:cs typeface="Times New Roman" panose="02020603050405020304" pitchFamily="18" charset="0"/>
+              </a:rPr>
+              <a:t>	</a:t>
             </a:r>
           </a:p>
           <a:p>
@@ -8050,130 +8739,116 @@
               <a:buNone/>
             </a:pPr>
             <a:r>
-              <a:rPr lang="pt-BR" sz="2000" dirty="0">
-                <a:latin typeface="Times New Roman" panose="02020603050405020304" pitchFamily="18" charset="0"/>
-                <a:cs typeface="Times New Roman" panose="02020603050405020304" pitchFamily="18" charset="0"/>
-              </a:rPr>
-              <a:t>	 </a:t>
-            </a:r>
-            <a:r>
-              <a:rPr lang="pt-BR" sz="2000" dirty="0">
+              <a:rPr lang="pt-BR" sz="2400" dirty="0">
+                <a:solidFill>
+                  <a:schemeClr val="tx1"/>
+                </a:solidFill>
+                <a:latin typeface="Times New Roman" panose="02020603050405020304" pitchFamily="18" charset="0"/>
+                <a:cs typeface="Times New Roman" panose="02020603050405020304" pitchFamily="18" charset="0"/>
+              </a:rPr>
+              <a:t>	</a:t>
+            </a:r>
+            <a:r>
+              <a:rPr lang="pt-BR" sz="2400" b="1" dirty="0">
+                <a:solidFill>
+                  <a:srgbClr val="FF0000"/>
+                </a:solidFill>
+                <a:latin typeface="Times New Roman" panose="02020603050405020304" pitchFamily="18" charset="0"/>
+                <a:cs typeface="Times New Roman" panose="02020603050405020304" pitchFamily="18" charset="0"/>
+              </a:rPr>
+              <a:t>arquivo file</a:t>
+            </a:r>
+            <a:r>
+              <a:rPr lang="pt-BR" sz="2400" dirty="0">
+                <a:solidFill>
+                  <a:schemeClr val="tx1"/>
+                </a:solidFill>
+                <a:latin typeface="Times New Roman" panose="02020603050405020304" pitchFamily="18" charset="0"/>
+                <a:cs typeface="Times New Roman" panose="02020603050405020304" pitchFamily="18" charset="0"/>
+              </a:rPr>
+              <a:t>	</a:t>
+            </a:r>
+            <a:r>
+              <a:rPr lang="pt-BR" sz="2400" dirty="0" err="1">
+                <a:solidFill>
+                  <a:schemeClr val="tx1"/>
+                </a:solidFill>
+                <a:latin typeface="Times New Roman" panose="02020603050405020304" pitchFamily="18" charset="0"/>
+                <a:cs typeface="Times New Roman" panose="02020603050405020304" pitchFamily="18" charset="0"/>
+              </a:rPr>
+              <a:t>import.sql</a:t>
+            </a:r>
+            <a:r>
+              <a:rPr lang="pt-BR" sz="2400" dirty="0">
+                <a:solidFill>
+                  <a:schemeClr val="tx1"/>
+                </a:solidFill>
+                <a:latin typeface="Times New Roman" panose="02020603050405020304" pitchFamily="18" charset="0"/>
+                <a:cs typeface="Times New Roman" panose="02020603050405020304" pitchFamily="18" charset="0"/>
+              </a:rPr>
+              <a:t>; 	</a:t>
+            </a:r>
+            <a:r>
+              <a:rPr lang="pt-BR" sz="2400" b="1" dirty="0">
+                <a:solidFill>
+                  <a:srgbClr val="FF0000"/>
+                </a:solidFill>
+                <a:latin typeface="Times New Roman" panose="02020603050405020304" pitchFamily="18" charset="0"/>
+                <a:cs typeface="Times New Roman" panose="02020603050405020304" pitchFamily="18" charset="0"/>
+              </a:rPr>
+              <a:t>dependências </a:t>
+            </a:r>
+            <a:r>
+              <a:rPr lang="pt-BR" sz="2400" dirty="0">
+                <a:solidFill>
+                  <a:schemeClr val="tx1"/>
+                </a:solidFill>
+                <a:latin typeface="Times New Roman" panose="02020603050405020304" pitchFamily="18" charset="0"/>
+                <a:cs typeface="Times New Roman" panose="02020603050405020304" pitchFamily="18" charset="0"/>
+              </a:rPr>
+              <a:t>pom.xml - </a:t>
+            </a:r>
+            <a:r>
+              <a:rPr lang="pt-BR" sz="2400" b="1" dirty="0">
+                <a:solidFill>
+                  <a:schemeClr val="tx1"/>
+                </a:solidFill>
+                <a:latin typeface="Times New Roman" panose="02020603050405020304" pitchFamily="18" charset="0"/>
+                <a:cs typeface="Times New Roman" panose="02020603050405020304" pitchFamily="18" charset="0"/>
+              </a:rPr>
+              <a:t>MAVEN</a:t>
+            </a:r>
+          </a:p>
+          <a:p>
+            <a:pPr marL="0" indent="0" algn="just">
+              <a:buNone/>
+            </a:pPr>
+            <a:r>
+              <a:rPr lang="pt-BR" sz="2400" dirty="0">
+                <a:solidFill>
+                  <a:schemeClr val="tx1"/>
+                </a:solidFill>
+                <a:latin typeface="Times New Roman" panose="02020603050405020304" pitchFamily="18" charset="0"/>
+                <a:cs typeface="Times New Roman" panose="02020603050405020304" pitchFamily="18" charset="0"/>
+              </a:rPr>
+              <a:t>		</a:t>
+            </a:r>
+            <a:r>
+              <a:rPr lang="pt-BR" sz="2400" dirty="0">
+                <a:solidFill>
+                  <a:schemeClr val="tx1"/>
+                </a:solidFill>
                 <a:latin typeface="Times New Roman" panose="02020603050405020304" pitchFamily="18" charset="0"/>
                 <a:cs typeface="Times New Roman" panose="02020603050405020304" pitchFamily="18" charset="0"/>
                 <a:hlinkClick r:id="rId3"/>
               </a:rPr>
-              <a:t>https://www.inf.ufpr.br/silvia/ES/requisitos/pdf/CRCAl.pdf</a:t>
-            </a:r>
-            <a:r>
-              <a:rPr lang="pt-BR" sz="2000" dirty="0">
-                <a:latin typeface="Times New Roman" panose="02020603050405020304" pitchFamily="18" charset="0"/>
-                <a:cs typeface="Times New Roman" panose="02020603050405020304" pitchFamily="18" charset="0"/>
-              </a:rPr>
-              <a:t> </a:t>
-            </a:r>
-          </a:p>
-          <a:p>
-            <a:pPr marL="0" indent="0" algn="just">
-              <a:buNone/>
-            </a:pPr>
-            <a:r>
-              <a:rPr lang="pt-BR" sz="2000" dirty="0">
-                <a:latin typeface="Times New Roman" panose="02020603050405020304" pitchFamily="18" charset="0"/>
-                <a:cs typeface="Times New Roman" panose="02020603050405020304" pitchFamily="18" charset="0"/>
-              </a:rPr>
-              <a:t>	 </a:t>
-            </a:r>
-            <a:r>
-              <a:rPr lang="pt-BR" sz="2000" dirty="0">
-                <a:latin typeface="Times New Roman" panose="02020603050405020304" pitchFamily="18" charset="0"/>
-                <a:cs typeface="Times New Roman" panose="02020603050405020304" pitchFamily="18" charset="0"/>
-                <a:hlinkClick r:id="rId4"/>
-              </a:rPr>
-              <a:t>https://ww2.inf.ufg.br/~fabio/manual-modelagem.pdf</a:t>
-            </a:r>
-            <a:r>
-              <a:rPr lang="pt-BR" sz="2000" dirty="0">
-                <a:latin typeface="Times New Roman" panose="02020603050405020304" pitchFamily="18" charset="0"/>
-                <a:cs typeface="Times New Roman" panose="02020603050405020304" pitchFamily="18" charset="0"/>
-              </a:rPr>
-              <a:t> </a:t>
-            </a:r>
-          </a:p>
-          <a:p>
-            <a:pPr marL="0" indent="0" algn="just">
-              <a:buNone/>
-            </a:pPr>
-            <a:endParaRPr lang="pt-BR" sz="2000" dirty="0">
-              <a:latin typeface="Times New Roman" panose="02020603050405020304" pitchFamily="18" charset="0"/>
-              <a:cs typeface="Times New Roman" panose="02020603050405020304" pitchFamily="18" charset="0"/>
-            </a:endParaRPr>
-          </a:p>
-          <a:p>
-            <a:pPr marL="0" indent="0" algn="just">
-              <a:buNone/>
-            </a:pPr>
-            <a:r>
-              <a:rPr lang="pt-BR" sz="2000" dirty="0">
-                <a:latin typeface="Times New Roman" panose="02020603050405020304" pitchFamily="18" charset="0"/>
-                <a:cs typeface="Times New Roman" panose="02020603050405020304" pitchFamily="18" charset="0"/>
-              </a:rPr>
-              <a:t>[2] </a:t>
-            </a:r>
-            <a:r>
-              <a:rPr lang="pt-BR" sz="2000" b="1" dirty="0">
-                <a:latin typeface="Times New Roman" panose="02020603050405020304" pitchFamily="18" charset="0"/>
-                <a:cs typeface="Times New Roman" panose="02020603050405020304" pitchFamily="18" charset="0"/>
-              </a:rPr>
-              <a:t>Modelagem CRC</a:t>
-            </a:r>
-          </a:p>
-          <a:p>
-            <a:pPr marL="0" indent="0" algn="just">
-              <a:buNone/>
-            </a:pPr>
-            <a:r>
-              <a:rPr lang="pt-BR" sz="2000" dirty="0">
-                <a:latin typeface="Times New Roman" panose="02020603050405020304" pitchFamily="18" charset="0"/>
-                <a:cs typeface="Times New Roman" panose="02020603050405020304" pitchFamily="18" charset="0"/>
-              </a:rPr>
-              <a:t>	</a:t>
-            </a:r>
-            <a:r>
-              <a:rPr lang="pt-BR" sz="2000" b="1" dirty="0">
-                <a:latin typeface="Times New Roman" panose="02020603050405020304" pitchFamily="18" charset="0"/>
-                <a:cs typeface="Times New Roman" panose="02020603050405020304" pitchFamily="18" charset="0"/>
-              </a:rPr>
-              <a:t> Disponível em</a:t>
-            </a:r>
-            <a:r>
-              <a:rPr lang="pt-BR" sz="2000" dirty="0">
-                <a:latin typeface="Times New Roman" panose="02020603050405020304" pitchFamily="18" charset="0"/>
-                <a:cs typeface="Times New Roman" panose="02020603050405020304" pitchFamily="18" charset="0"/>
-              </a:rPr>
-              <a:t>:</a:t>
-            </a:r>
-          </a:p>
-          <a:p>
-            <a:pPr marL="0" indent="0" algn="just">
-              <a:buNone/>
-            </a:pPr>
-            <a:r>
-              <a:rPr lang="pt-BR" sz="2000" dirty="0">
-                <a:latin typeface="Times New Roman" panose="02020603050405020304" pitchFamily="18" charset="0"/>
-                <a:cs typeface="Times New Roman" panose="02020603050405020304" pitchFamily="18" charset="0"/>
-              </a:rPr>
-              <a:t>	</a:t>
-            </a:r>
-            <a:r>
-              <a:rPr lang="pt-BR" sz="2000" dirty="0">
-                <a:latin typeface="Times New Roman" panose="02020603050405020304" pitchFamily="18" charset="0"/>
-                <a:cs typeface="Times New Roman" panose="02020603050405020304" pitchFamily="18" charset="0"/>
-                <a:hlinkClick r:id="rId5"/>
-              </a:rPr>
-              <a:t>https://edisciplinas.usp.br/pluginfile.php/7730775/mod_resource/content/1/SIPLA.pdf</a:t>
-            </a:r>
-            <a:r>
-              <a:rPr lang="pt-BR" sz="2000" dirty="0">
+              <a:t>https://github.com/CloudEducationBrazil/WydenDesenvolvimentoWebJAVA/tree/master/06%20Source%20Code/userdept</a:t>
+            </a:r>
+            <a:r>
+              <a:rPr lang="pt-BR" sz="2400" dirty="0">
+                <a:solidFill>
+                  <a:schemeClr val="tx1"/>
+                </a:solidFill>
                 <a:latin typeface="Times New Roman" panose="02020603050405020304" pitchFamily="18" charset="0"/>
                 <a:cs typeface="Times New Roman" panose="02020603050405020304" pitchFamily="18" charset="0"/>
               </a:rPr>
@@ -8185,7 +8860,7 @@
     </p:spTree>
     <p:extLst>
       <p:ext uri="{BB962C8B-B14F-4D97-AF65-F5344CB8AC3E}">
-        <p14:creationId xmlns:p14="http://schemas.microsoft.com/office/powerpoint/2010/main" val="3680270425"/>
+        <p14:creationId xmlns:p14="http://schemas.microsoft.com/office/powerpoint/2010/main" val="4240747216"/>
       </p:ext>
     </p:extLst>
   </p:cSld>
@@ -8241,7 +8916,7 @@
                   <a:srgbClr val="0070C0"/>
                 </a:solidFill>
               </a:rPr>
-              <a:t>Aprenda</a:t>
+              <a:t>Leitura</a:t>
             </a:r>
             <a:r>
               <a:rPr lang="en-US" b="1" dirty="0">
@@ -8249,8 +8924,21 @@
                   <a:srgbClr val="0070C0"/>
                 </a:solidFill>
               </a:rPr>
-              <a:t>+</a:t>
-            </a:r>
+              <a:t> </a:t>
+            </a:r>
+            <a:r>
+              <a:rPr lang="en-US" b="1" dirty="0" err="1">
+                <a:solidFill>
+                  <a:srgbClr val="0070C0"/>
+                </a:solidFill>
+              </a:rPr>
+              <a:t>Específica</a:t>
+            </a:r>
+            <a:endParaRPr lang="en-US" b="1" dirty="0">
+              <a:solidFill>
+                <a:srgbClr val="0070C0"/>
+              </a:solidFill>
+            </a:endParaRPr>
           </a:p>
         </p:txBody>
       </p:sp>
@@ -8266,8 +8954,8 @@
         </p:nvSpPr>
         <p:spPr>
           <a:xfrm>
-            <a:off x="142865" y="1200151"/>
-            <a:ext cx="8865056" cy="3394472"/>
+            <a:off x="142865" y="1012261"/>
+            <a:ext cx="8865056" cy="3835312"/>
           </a:xfrm>
         </p:spPr>
         <p:txBody>
@@ -8307,15 +8995,61 @@
                 <a:latin typeface="Times New Roman" panose="02020603050405020304" pitchFamily="18" charset="0"/>
                 <a:cs typeface="Times New Roman" panose="02020603050405020304" pitchFamily="18" charset="0"/>
               </a:rPr>
-              <a:t>	Disponível em: </a:t>
+              <a:t>	Disponível em</a:t>
             </a:r>
             <a:r>
               <a:rPr lang="pt-BR" sz="2000" dirty="0">
                 <a:latin typeface="Times New Roman" panose="02020603050405020304" pitchFamily="18" charset="0"/>
                 <a:cs typeface="Times New Roman" panose="02020603050405020304" pitchFamily="18" charset="0"/>
+              </a:rPr>
+              <a:t>:</a:t>
+            </a:r>
+          </a:p>
+          <a:p>
+            <a:pPr marL="0" indent="0" algn="just">
+              <a:buNone/>
+            </a:pPr>
+            <a:r>
+              <a:rPr lang="pt-BR" sz="2000" dirty="0">
+                <a:latin typeface="Times New Roman" panose="02020603050405020304" pitchFamily="18" charset="0"/>
+                <a:cs typeface="Times New Roman" panose="02020603050405020304" pitchFamily="18" charset="0"/>
+              </a:rPr>
+              <a:t>	 </a:t>
+            </a:r>
+            <a:r>
+              <a:rPr lang="pt-BR" sz="2000" dirty="0">
+                <a:latin typeface="Times New Roman" panose="02020603050405020304" pitchFamily="18" charset="0"/>
+                <a:cs typeface="Times New Roman" panose="02020603050405020304" pitchFamily="18" charset="0"/>
                 <a:hlinkClick r:id="rId3"/>
               </a:rPr>
-              <a:t>https://youtu.be/otKUer13HnA</a:t>
+              <a:t>https://www.inf.ufpr.br/silvia/ES/requisitos/pdf/CRCAl.pdf</a:t>
+            </a:r>
+            <a:r>
+              <a:rPr lang="pt-BR" sz="2000" dirty="0">
+                <a:latin typeface="Times New Roman" panose="02020603050405020304" pitchFamily="18" charset="0"/>
+                <a:cs typeface="Times New Roman" panose="02020603050405020304" pitchFamily="18" charset="0"/>
+              </a:rPr>
+              <a:t> </a:t>
+            </a:r>
+          </a:p>
+          <a:p>
+            <a:pPr marL="0" indent="0" algn="just">
+              <a:buNone/>
+            </a:pPr>
+            <a:r>
+              <a:rPr lang="pt-BR" sz="2000" dirty="0">
+                <a:latin typeface="Times New Roman" panose="02020603050405020304" pitchFamily="18" charset="0"/>
+                <a:cs typeface="Times New Roman" panose="02020603050405020304" pitchFamily="18" charset="0"/>
+              </a:rPr>
+              <a:t>	 </a:t>
+            </a:r>
+            <a:r>
+              <a:rPr lang="pt-BR" sz="2000" dirty="0">
+                <a:latin typeface="Times New Roman" panose="02020603050405020304" pitchFamily="18" charset="0"/>
+                <a:cs typeface="Times New Roman" panose="02020603050405020304" pitchFamily="18" charset="0"/>
+                <a:hlinkClick r:id="rId4"/>
+              </a:rPr>
+              <a:t>https://ww2.inf.ufg.br/~fabio/manual-modelagem.pdf</a:t>
             </a:r>
             <a:r>
               <a:rPr lang="pt-BR" sz="2000" dirty="0">
@@ -8338,10 +9072,20 @@
             <a:pPr marL="0" indent="0" algn="just">
               <a:buNone/>
             </a:pPr>
-            <a:endParaRPr lang="pt-BR" sz="2000" dirty="0">
-              <a:latin typeface="Times New Roman" panose="02020603050405020304" pitchFamily="18" charset="0"/>
-              <a:cs typeface="Times New Roman" panose="02020603050405020304" pitchFamily="18" charset="0"/>
-            </a:endParaRPr>
+            <a:r>
+              <a:rPr lang="pt-BR" sz="2000" dirty="0">
+                <a:latin typeface="Times New Roman" panose="02020603050405020304" pitchFamily="18" charset="0"/>
+                <a:cs typeface="Times New Roman" panose="02020603050405020304" pitchFamily="18" charset="0"/>
+              </a:rPr>
+              <a:t>[2] </a:t>
+            </a:r>
+            <a:r>
+              <a:rPr lang="pt-BR" sz="2000" b="1" dirty="0">
+                <a:latin typeface="Times New Roman" panose="02020603050405020304" pitchFamily="18" charset="0"/>
+                <a:cs typeface="Times New Roman" panose="02020603050405020304" pitchFamily="18" charset="0"/>
+              </a:rPr>
+              <a:t>Modelagem CRC</a:t>
+            </a:r>
           </a:p>
           <a:p>
             <a:pPr marL="0" indent="0" algn="just">
@@ -8352,45 +9096,41 @@
                 <a:latin typeface="Times New Roman" panose="02020603050405020304" pitchFamily="18" charset="0"/>
                 <a:cs typeface="Times New Roman" panose="02020603050405020304" pitchFamily="18" charset="0"/>
               </a:rPr>
-              <a:t>[2] </a:t>
+              <a:t>	</a:t>
             </a:r>
             <a:r>
               <a:rPr lang="pt-BR" sz="2000" b="1" dirty="0">
                 <a:latin typeface="Times New Roman" panose="02020603050405020304" pitchFamily="18" charset="0"/>
                 <a:cs typeface="Times New Roman" panose="02020603050405020304" pitchFamily="18" charset="0"/>
               </a:rPr>
-              <a:t>JAVA Modelagem CRC</a:t>
-            </a:r>
-            <a:endParaRPr lang="pt-BR" sz="2000" dirty="0">
-              <a:latin typeface="Times New Roman" panose="02020603050405020304" pitchFamily="18" charset="0"/>
-              <a:cs typeface="Times New Roman" panose="02020603050405020304" pitchFamily="18" charset="0"/>
-            </a:endParaRPr>
+              <a:t> Disponível em</a:t>
+            </a:r>
+            <a:r>
+              <a:rPr lang="pt-BR" sz="2000" dirty="0">
+                <a:latin typeface="Times New Roman" panose="02020603050405020304" pitchFamily="18" charset="0"/>
+                <a:cs typeface="Times New Roman" panose="02020603050405020304" pitchFamily="18" charset="0"/>
+              </a:rPr>
+              <a:t>:</a:t>
+            </a:r>
           </a:p>
           <a:p>
             <a:pPr marL="0" indent="0" algn="just">
               <a:buNone/>
             </a:pPr>
             <a:r>
-              <a:rPr lang="pt-BR" sz="2000" b="1" dirty="0">
-                <a:latin typeface="Times New Roman" panose="02020603050405020304" pitchFamily="18" charset="0"/>
-                <a:cs typeface="Times New Roman" panose="02020603050405020304" pitchFamily="18" charset="0"/>
-              </a:rPr>
-              <a:t>	Disponível em</a:t>
-            </a:r>
-            <a:r>
               <a:rPr lang="pt-BR" sz="2000" dirty="0">
                 <a:latin typeface="Times New Roman" panose="02020603050405020304" pitchFamily="18" charset="0"/>
                 <a:cs typeface="Times New Roman" panose="02020603050405020304" pitchFamily="18" charset="0"/>
               </a:rPr>
-              <a:t>: </a:t>
+              <a:t>	</a:t>
             </a:r>
             <a:r>
               <a:rPr lang="pt-BR" sz="2000" dirty="0">
                 <a:latin typeface="Times New Roman" panose="02020603050405020304" pitchFamily="18" charset="0"/>
                 <a:cs typeface="Times New Roman" panose="02020603050405020304" pitchFamily="18" charset="0"/>
-                <a:hlinkClick r:id="rId4"/>
-              </a:rPr>
-              <a:t>https://youtu.be/97u7gzfcAd0</a:t>
+                <a:hlinkClick r:id="rId5"/>
+              </a:rPr>
+              <a:t>https://edisciplinas.usp.br/pluginfile.php/7730775/mod_resource/content/1/SIPLA.pdf</a:t>
             </a:r>
             <a:r>
               <a:rPr lang="pt-BR" sz="2000" dirty="0">
@@ -8399,40 +9139,13 @@
               </a:rPr>
               <a:t> </a:t>
             </a:r>
-          </a:p>
-          <a:p>
-            <a:pPr marL="0" indent="0" algn="just">
-              <a:buNone/>
-            </a:pPr>
-            <a:endParaRPr lang="pt-BR" sz="2000" dirty="0">
-              <a:latin typeface="Times New Roman" panose="02020603050405020304" pitchFamily="18" charset="0"/>
-              <a:cs typeface="Times New Roman" panose="02020603050405020304" pitchFamily="18" charset="0"/>
-            </a:endParaRPr>
-          </a:p>
-          <a:p>
-            <a:pPr marL="0" indent="0" algn="just">
-              <a:buNone/>
-            </a:pPr>
-            <a:endParaRPr lang="pt-BR" sz="2000" dirty="0">
-              <a:latin typeface="Times New Roman" panose="02020603050405020304" pitchFamily="18" charset="0"/>
-              <a:cs typeface="Times New Roman" panose="02020603050405020304" pitchFamily="18" charset="0"/>
-            </a:endParaRPr>
-          </a:p>
-          <a:p>
-            <a:pPr marL="0" indent="0" algn="just">
-              <a:buNone/>
-            </a:pPr>
-            <a:endParaRPr lang="pt-BR" sz="2000" dirty="0">
-              <a:latin typeface="Times New Roman" panose="02020603050405020304" pitchFamily="18" charset="0"/>
-              <a:cs typeface="Times New Roman" panose="02020603050405020304" pitchFamily="18" charset="0"/>
-            </a:endParaRPr>
           </a:p>
         </p:txBody>
       </p:sp>
     </p:spTree>
     <p:extLst>
       <p:ext uri="{BB962C8B-B14F-4D97-AF65-F5344CB8AC3E}">
-        <p14:creationId xmlns:p14="http://schemas.microsoft.com/office/powerpoint/2010/main" val="2747596967"/>
+        <p14:creationId xmlns:p14="http://schemas.microsoft.com/office/powerpoint/2010/main" val="3680270425"/>
       </p:ext>
     </p:extLst>
   </p:cSld>
@@ -8488,7 +9201,7 @@
                   <a:srgbClr val="0070C0"/>
                 </a:solidFill>
               </a:rPr>
-              <a:t>Dinâmica</a:t>
+              <a:t>Aprenda</a:t>
             </a:r>
             <a:r>
               <a:rPr lang="en-US" b="1" dirty="0">
@@ -8496,21 +9209,8 @@
                   <a:srgbClr val="0070C0"/>
                 </a:solidFill>
               </a:rPr>
-              <a:t>/</a:t>
-            </a:r>
-            <a:r>
-              <a:rPr lang="en-US" b="1" dirty="0" err="1">
-                <a:solidFill>
-                  <a:srgbClr val="0070C0"/>
-                </a:solidFill>
-              </a:rPr>
-              <a:t>Atividades</a:t>
-            </a:r>
-            <a:endParaRPr lang="en-US" b="1" dirty="0">
-              <a:solidFill>
-                <a:srgbClr val="0070C0"/>
-              </a:solidFill>
-            </a:endParaRPr>
+              <a:t>+</a:t>
+            </a:r>
           </a:p>
         </p:txBody>
       </p:sp>
@@ -8526,8 +9226,8 @@
         </p:nvSpPr>
         <p:spPr>
           <a:xfrm>
-            <a:off x="139472" y="1063230"/>
-            <a:ext cx="8865056" cy="3606305"/>
+            <a:off x="142865" y="1200151"/>
+            <a:ext cx="8865056" cy="3394472"/>
           </a:xfrm>
         </p:spPr>
         <p:txBody>
@@ -8539,7 +9239,21 @@
             <a:pPr marL="0" indent="0" algn="just">
               <a:buNone/>
             </a:pPr>
-            <a:endParaRPr lang="pt-BR" sz="2400" dirty="0">
+            <a:r>
+              <a:rPr lang="pt-BR" sz="2000" dirty="0">
+                <a:latin typeface="Times New Roman" panose="02020603050405020304" pitchFamily="18" charset="0"/>
+                <a:cs typeface="Times New Roman" panose="02020603050405020304" pitchFamily="18" charset="0"/>
+              </a:rPr>
+              <a:t>[1] </a:t>
+            </a:r>
+            <a:r>
+              <a:rPr lang="pt-BR" sz="2000" b="1" dirty="0">
+                <a:latin typeface="Times New Roman" panose="02020603050405020304" pitchFamily="18" charset="0"/>
+                <a:cs typeface="Times New Roman" panose="02020603050405020304" pitchFamily="18" charset="0"/>
+              </a:rPr>
+              <a:t>JAVA Cartão CRC</a:t>
+            </a:r>
+            <a:endParaRPr lang="pt-BR" sz="2000" dirty="0">
               <a:latin typeface="Times New Roman" panose="02020603050405020304" pitchFamily="18" charset="0"/>
               <a:cs typeface="Times New Roman" panose="02020603050405020304" pitchFamily="18" charset="0"/>
             </a:endParaRPr>
@@ -8548,7 +9262,34 @@
             <a:pPr marL="0" indent="0" algn="just">
               <a:buNone/>
             </a:pPr>
-            <a:endParaRPr lang="pt-BR" sz="2400" dirty="0">
+            <a:r>
+              <a:rPr lang="pt-BR" sz="2000" b="1" dirty="0">
+                <a:latin typeface="Times New Roman" panose="02020603050405020304" pitchFamily="18" charset="0"/>
+                <a:cs typeface="Times New Roman" panose="02020603050405020304" pitchFamily="18" charset="0"/>
+              </a:rPr>
+              <a:t>	Disponível em: </a:t>
+            </a:r>
+            <a:r>
+              <a:rPr lang="pt-BR" sz="2000" dirty="0">
+                <a:latin typeface="Times New Roman" panose="02020603050405020304" pitchFamily="18" charset="0"/>
+                <a:cs typeface="Times New Roman" panose="02020603050405020304" pitchFamily="18" charset="0"/>
+                <a:hlinkClick r:id="rId3"/>
+              </a:rPr>
+              <a:t>https://youtu.be/otKUer13HnA</a:t>
+            </a:r>
+            <a:r>
+              <a:rPr lang="pt-BR" sz="2000" dirty="0">
+                <a:latin typeface="Times New Roman" panose="02020603050405020304" pitchFamily="18" charset="0"/>
+                <a:cs typeface="Times New Roman" panose="02020603050405020304" pitchFamily="18" charset="0"/>
+              </a:rPr>
+              <a:t> </a:t>
+            </a:r>
+          </a:p>
+          <a:p>
+            <a:pPr marL="0" indent="0" algn="just">
+              <a:buNone/>
+            </a:pPr>
+            <a:endParaRPr lang="pt-BR" sz="2000" dirty="0">
               <a:latin typeface="Times New Roman" panose="02020603050405020304" pitchFamily="18" charset="0"/>
               <a:cs typeface="Times New Roman" panose="02020603050405020304" pitchFamily="18" charset="0"/>
             </a:endParaRPr>
@@ -8557,7 +9298,7 @@
             <a:pPr marL="0" indent="0" algn="just">
               <a:buNone/>
             </a:pPr>
-            <a:endParaRPr lang="pt-BR" sz="2400" dirty="0">
+            <a:endParaRPr lang="pt-BR" sz="2000" dirty="0">
               <a:latin typeface="Times New Roman" panose="02020603050405020304" pitchFamily="18" charset="0"/>
               <a:cs typeface="Times New Roman" panose="02020603050405020304" pitchFamily="18" charset="0"/>
             </a:endParaRPr>
@@ -8567,21 +9308,83 @@
               <a:buNone/>
             </a:pPr>
             <a:r>
-              <a:rPr lang="pt-BR" sz="2400" dirty="0">
-                <a:latin typeface="Times New Roman" panose="02020603050405020304" pitchFamily="18" charset="0"/>
-                <a:cs typeface="Times New Roman" panose="02020603050405020304" pitchFamily="18" charset="0"/>
-              </a:rPr>
-              <a:t>Exercícios de Fixação </a:t>
-            </a:r>
-            <a:r>
-              <a:rPr lang="pt-BR" sz="2400" b="1" dirty="0">
-                <a:latin typeface="Times New Roman" panose="02020603050405020304" pitchFamily="18" charset="0"/>
-                <a:cs typeface="Times New Roman" panose="02020603050405020304" pitchFamily="18" charset="0"/>
-              </a:rPr>
-              <a:t>JAVA – Sala de Aula</a:t>
-            </a:r>
-            <a:endParaRPr lang="pt-BR" dirty="0">
-              <a:latin typeface="Calibri" panose="020F0502020204030204" pitchFamily="34" charset="0"/>
+              <a:rPr lang="pt-BR" sz="2000" dirty="0">
+                <a:latin typeface="Times New Roman" panose="02020603050405020304" pitchFamily="18" charset="0"/>
+                <a:cs typeface="Times New Roman" panose="02020603050405020304" pitchFamily="18" charset="0"/>
+              </a:rPr>
+              <a:t>[2] </a:t>
+            </a:r>
+            <a:r>
+              <a:rPr lang="pt-BR" sz="2000" b="1" dirty="0">
+                <a:latin typeface="Times New Roman" panose="02020603050405020304" pitchFamily="18" charset="0"/>
+                <a:cs typeface="Times New Roman" panose="02020603050405020304" pitchFamily="18" charset="0"/>
+              </a:rPr>
+              <a:t>JAVA Modelagem CRC</a:t>
+            </a:r>
+            <a:endParaRPr lang="pt-BR" sz="2000" dirty="0">
+              <a:latin typeface="Times New Roman" panose="02020603050405020304" pitchFamily="18" charset="0"/>
+              <a:cs typeface="Times New Roman" panose="02020603050405020304" pitchFamily="18" charset="0"/>
+            </a:endParaRPr>
+          </a:p>
+          <a:p>
+            <a:pPr marL="0" indent="0" algn="just">
+              <a:buNone/>
+            </a:pPr>
+            <a:r>
+              <a:rPr lang="pt-BR" sz="2000" b="1" dirty="0">
+                <a:latin typeface="Times New Roman" panose="02020603050405020304" pitchFamily="18" charset="0"/>
+                <a:cs typeface="Times New Roman" panose="02020603050405020304" pitchFamily="18" charset="0"/>
+              </a:rPr>
+              <a:t>	Disponível em</a:t>
+            </a:r>
+            <a:r>
+              <a:rPr lang="pt-BR" sz="2000" dirty="0">
+                <a:latin typeface="Times New Roman" panose="02020603050405020304" pitchFamily="18" charset="0"/>
+                <a:cs typeface="Times New Roman" panose="02020603050405020304" pitchFamily="18" charset="0"/>
+              </a:rPr>
+              <a:t>: </a:t>
+            </a:r>
+            <a:r>
+              <a:rPr lang="pt-BR" sz="2000" dirty="0">
+                <a:latin typeface="Times New Roman" panose="02020603050405020304" pitchFamily="18" charset="0"/>
+                <a:cs typeface="Times New Roman" panose="02020603050405020304" pitchFamily="18" charset="0"/>
+                <a:hlinkClick r:id="rId4"/>
+              </a:rPr>
+              <a:t>https://youtu.be/97u7gzfcAd0</a:t>
+            </a:r>
+            <a:r>
+              <a:rPr lang="pt-BR" sz="2000" dirty="0">
+                <a:latin typeface="Times New Roman" panose="02020603050405020304" pitchFamily="18" charset="0"/>
+                <a:cs typeface="Times New Roman" panose="02020603050405020304" pitchFamily="18" charset="0"/>
+              </a:rPr>
+              <a:t> </a:t>
+            </a:r>
+          </a:p>
+          <a:p>
+            <a:pPr marL="0" indent="0" algn="just">
+              <a:buNone/>
+            </a:pPr>
+            <a:endParaRPr lang="pt-BR" sz="2000" dirty="0">
+              <a:latin typeface="Times New Roman" panose="02020603050405020304" pitchFamily="18" charset="0"/>
+              <a:cs typeface="Times New Roman" panose="02020603050405020304" pitchFamily="18" charset="0"/>
+            </a:endParaRPr>
+          </a:p>
+          <a:p>
+            <a:pPr marL="0" indent="0" algn="just">
+              <a:buNone/>
+            </a:pPr>
+            <a:endParaRPr lang="pt-BR" sz="2000" dirty="0">
+              <a:latin typeface="Times New Roman" panose="02020603050405020304" pitchFamily="18" charset="0"/>
+              <a:cs typeface="Times New Roman" panose="02020603050405020304" pitchFamily="18" charset="0"/>
+            </a:endParaRPr>
+          </a:p>
+          <a:p>
+            <a:pPr marL="0" indent="0" algn="just">
+              <a:buNone/>
+            </a:pPr>
+            <a:endParaRPr lang="pt-BR" sz="2000" dirty="0">
+              <a:latin typeface="Times New Roman" panose="02020603050405020304" pitchFamily="18" charset="0"/>
+              <a:cs typeface="Times New Roman" panose="02020603050405020304" pitchFamily="18" charset="0"/>
             </a:endParaRPr>
           </a:p>
         </p:txBody>
@@ -8589,7 +9392,7 @@
     </p:spTree>
     <p:extLst>
       <p:ext uri="{BB962C8B-B14F-4D97-AF65-F5344CB8AC3E}">
-        <p14:creationId xmlns:p14="http://schemas.microsoft.com/office/powerpoint/2010/main" val="2470652989"/>
+        <p14:creationId xmlns:p14="http://schemas.microsoft.com/office/powerpoint/2010/main" val="2747596967"/>
       </p:ext>
     </p:extLst>
   </p:cSld>
@@ -8645,7 +9448,7 @@
                   <a:srgbClr val="0070C0"/>
                 </a:solidFill>
               </a:rPr>
-              <a:t>Referências</a:t>
+              <a:t>Dinâmica</a:t>
             </a:r>
             <a:r>
               <a:rPr lang="en-US" b="1" dirty="0">
@@ -8653,7 +9456,7 @@
                   <a:srgbClr val="0070C0"/>
                 </a:solidFill>
               </a:rPr>
-              <a:t> </a:t>
+              <a:t>/</a:t>
             </a:r>
             <a:r>
               <a:rPr lang="en-US" b="1" dirty="0" err="1">
@@ -8661,7 +9464,7 @@
                   <a:srgbClr val="0070C0"/>
                 </a:solidFill>
               </a:rPr>
-              <a:t>Bibliográficas</a:t>
+              <a:t>Atividades</a:t>
             </a:r>
             <a:endParaRPr lang="en-US" b="1" dirty="0">
               <a:solidFill>
@@ -8683,8 +9486,8 @@
         </p:nvSpPr>
         <p:spPr>
           <a:xfrm>
-            <a:off x="142865" y="1200151"/>
-            <a:ext cx="8865056" cy="3394472"/>
+            <a:off x="139472" y="1063230"/>
+            <a:ext cx="8865056" cy="3606305"/>
           </a:xfrm>
         </p:spPr>
         <p:txBody>
@@ -8705,27 +9508,10 @@
             <a:pPr marL="0" indent="0" algn="just">
               <a:buNone/>
             </a:pPr>
-            <a:r>
-              <a:rPr lang="pt-BR" sz="2400" dirty="0">
-                <a:latin typeface="Times New Roman" panose="02020603050405020304" pitchFamily="18" charset="0"/>
-                <a:cs typeface="Times New Roman" panose="02020603050405020304" pitchFamily="18" charset="0"/>
-              </a:rPr>
-              <a:t>[1] </a:t>
-            </a:r>
-            <a:r>
-              <a:rPr lang="pt-BR" sz="2400" b="1" dirty="0">
-                <a:latin typeface="Times New Roman" panose="02020603050405020304" pitchFamily="18" charset="0"/>
-                <a:cs typeface="Times New Roman" panose="02020603050405020304" pitchFamily="18" charset="0"/>
-              </a:rPr>
-              <a:t>LARMAN, Craig. </a:t>
-            </a:r>
-            <a:r>
-              <a:rPr lang="pt-BR" sz="2400" dirty="0">
-                <a:latin typeface="Times New Roman" panose="02020603050405020304" pitchFamily="18" charset="0"/>
-                <a:cs typeface="Times New Roman" panose="02020603050405020304" pitchFamily="18" charset="0"/>
-              </a:rPr>
-              <a:t>Utilizando UML e padrões. Bookman Editora, 2007.</a:t>
-            </a:r>
+            <a:endParaRPr lang="pt-BR" sz="2400" dirty="0">
+              <a:latin typeface="Times New Roman" panose="02020603050405020304" pitchFamily="18" charset="0"/>
+              <a:cs typeface="Times New Roman" panose="02020603050405020304" pitchFamily="18" charset="0"/>
+            </a:endParaRPr>
           </a:p>
           <a:p>
             <a:pPr marL="0" indent="0" algn="just">
@@ -8745,39 +9531,17 @@
                 <a:latin typeface="Times New Roman" panose="02020603050405020304" pitchFamily="18" charset="0"/>
                 <a:cs typeface="Times New Roman" panose="02020603050405020304" pitchFamily="18" charset="0"/>
               </a:rPr>
-              <a:t>[2] </a:t>
-            </a:r>
-            <a:r>
-              <a:rPr lang="en-US" sz="2400" b="1" dirty="0">
-                <a:latin typeface="Times New Roman" panose="02020603050405020304" pitchFamily="18" charset="0"/>
-                <a:cs typeface="Times New Roman" panose="02020603050405020304" pitchFamily="18" charset="0"/>
-              </a:rPr>
-              <a:t>GIL, Joseph; MAMAN, </a:t>
-            </a:r>
-            <a:r>
-              <a:rPr lang="en-US" sz="2400" b="1" dirty="0" err="1">
-                <a:latin typeface="Times New Roman" panose="02020603050405020304" pitchFamily="18" charset="0"/>
-                <a:cs typeface="Times New Roman" panose="02020603050405020304" pitchFamily="18" charset="0"/>
-              </a:rPr>
-              <a:t>Itay</a:t>
-            </a:r>
-            <a:r>
-              <a:rPr lang="en-US" sz="2400" b="1" dirty="0">
-                <a:latin typeface="Times New Roman" panose="02020603050405020304" pitchFamily="18" charset="0"/>
-                <a:cs typeface="Times New Roman" panose="02020603050405020304" pitchFamily="18" charset="0"/>
-              </a:rPr>
-              <a:t>. </a:t>
-            </a:r>
-            <a:r>
-              <a:rPr lang="en-US" sz="2400" dirty="0">
-                <a:latin typeface="Times New Roman" panose="02020603050405020304" pitchFamily="18" charset="0"/>
-                <a:cs typeface="Times New Roman" panose="02020603050405020304" pitchFamily="18" charset="0"/>
-              </a:rPr>
-              <a:t>Micro patterns in Java code. In: Proceedings of the 20th annual ACM SIGPLAN conference on object-oriented programming, systems, languages, and applications. 2005. p. 97-116.</a:t>
-            </a:r>
-            <a:endParaRPr lang="pt-BR" sz="2400" dirty="0">
-              <a:latin typeface="Times New Roman" panose="02020603050405020304" pitchFamily="18" charset="0"/>
-              <a:cs typeface="Times New Roman" panose="02020603050405020304" pitchFamily="18" charset="0"/>
+              <a:t>Exercícios de Fixação </a:t>
+            </a:r>
+            <a:r>
+              <a:rPr lang="pt-BR" sz="2400" b="1" dirty="0">
+                <a:latin typeface="Times New Roman" panose="02020603050405020304" pitchFamily="18" charset="0"/>
+                <a:cs typeface="Times New Roman" panose="02020603050405020304" pitchFamily="18" charset="0"/>
+              </a:rPr>
+              <a:t>JAVA – Sala de Aula</a:t>
+            </a:r>
+            <a:endParaRPr lang="pt-BR" dirty="0">
+              <a:latin typeface="Calibri" panose="020F0502020204030204" pitchFamily="34" charset="0"/>
             </a:endParaRPr>
           </a:p>
         </p:txBody>
@@ -8785,7 +9549,7 @@
     </p:spTree>
     <p:extLst>
       <p:ext uri="{BB962C8B-B14F-4D97-AF65-F5344CB8AC3E}">
-        <p14:creationId xmlns:p14="http://schemas.microsoft.com/office/powerpoint/2010/main" val="1115311843"/>
+        <p14:creationId xmlns:p14="http://schemas.microsoft.com/office/powerpoint/2010/main" val="2470652989"/>
       </p:ext>
     </p:extLst>
   </p:cSld>
@@ -9285,6 +10049,202 @@
           <a:chExt cx="0" cy="0"/>
         </a:xfrm>
       </p:grpSpPr>
+      <p:sp>
+        <p:nvSpPr>
+          <p:cNvPr id="6" name="Title 1"/>
+          <p:cNvSpPr>
+            <a:spLocks noGrp="1"/>
+          </p:cNvSpPr>
+          <p:nvPr>
+            <p:ph type="title"/>
+          </p:nvPr>
+        </p:nvSpPr>
+        <p:spPr>
+          <a:xfrm>
+            <a:off x="457200" y="205980"/>
+            <a:ext cx="8229600" cy="857251"/>
+          </a:xfrm>
+        </p:spPr>
+        <p:txBody>
+          <a:bodyPr>
+            <a:normAutofit/>
+          </a:bodyPr>
+          <a:lstStyle/>
+          <a:p>
+            <a:r>
+              <a:rPr lang="en-US" b="1" dirty="0" err="1">
+                <a:solidFill>
+                  <a:srgbClr val="0070C0"/>
+                </a:solidFill>
+              </a:rPr>
+              <a:t>Referências</a:t>
+            </a:r>
+            <a:r>
+              <a:rPr lang="en-US" b="1" dirty="0">
+                <a:solidFill>
+                  <a:srgbClr val="0070C0"/>
+                </a:solidFill>
+              </a:rPr>
+              <a:t> </a:t>
+            </a:r>
+            <a:r>
+              <a:rPr lang="en-US" b="1" dirty="0" err="1">
+                <a:solidFill>
+                  <a:srgbClr val="0070C0"/>
+                </a:solidFill>
+              </a:rPr>
+              <a:t>Bibliográficas</a:t>
+            </a:r>
+            <a:endParaRPr lang="en-US" b="1" dirty="0">
+              <a:solidFill>
+                <a:srgbClr val="0070C0"/>
+              </a:solidFill>
+            </a:endParaRPr>
+          </a:p>
+        </p:txBody>
+      </p:sp>
+      <p:sp>
+        <p:nvSpPr>
+          <p:cNvPr id="8" name="Text Placeholder 2"/>
+          <p:cNvSpPr>
+            <a:spLocks noGrp="1"/>
+          </p:cNvSpPr>
+          <p:nvPr>
+            <p:ph type="body" sz="half" idx="1"/>
+          </p:nvPr>
+        </p:nvSpPr>
+        <p:spPr>
+          <a:xfrm>
+            <a:off x="142865" y="1200151"/>
+            <a:ext cx="8865056" cy="3394472"/>
+          </a:xfrm>
+        </p:spPr>
+        <p:txBody>
+          <a:bodyPr>
+            <a:noAutofit/>
+          </a:bodyPr>
+          <a:lstStyle/>
+          <a:p>
+            <a:pPr marL="0" indent="0" algn="just">
+              <a:buNone/>
+            </a:pPr>
+            <a:endParaRPr lang="pt-BR" sz="2400" dirty="0">
+              <a:latin typeface="Times New Roman" panose="02020603050405020304" pitchFamily="18" charset="0"/>
+              <a:cs typeface="Times New Roman" panose="02020603050405020304" pitchFamily="18" charset="0"/>
+            </a:endParaRPr>
+          </a:p>
+          <a:p>
+            <a:pPr marL="0" indent="0" algn="just">
+              <a:buNone/>
+            </a:pPr>
+            <a:r>
+              <a:rPr lang="pt-BR" sz="2400" dirty="0">
+                <a:latin typeface="Times New Roman" panose="02020603050405020304" pitchFamily="18" charset="0"/>
+                <a:cs typeface="Times New Roman" panose="02020603050405020304" pitchFamily="18" charset="0"/>
+              </a:rPr>
+              <a:t>[1] </a:t>
+            </a:r>
+            <a:r>
+              <a:rPr lang="pt-BR" sz="2400" b="1" dirty="0">
+                <a:latin typeface="Times New Roman" panose="02020603050405020304" pitchFamily="18" charset="0"/>
+                <a:cs typeface="Times New Roman" panose="02020603050405020304" pitchFamily="18" charset="0"/>
+              </a:rPr>
+              <a:t>LARMAN, Craig. </a:t>
+            </a:r>
+            <a:r>
+              <a:rPr lang="pt-BR" sz="2400" dirty="0">
+                <a:latin typeface="Times New Roman" panose="02020603050405020304" pitchFamily="18" charset="0"/>
+                <a:cs typeface="Times New Roman" panose="02020603050405020304" pitchFamily="18" charset="0"/>
+              </a:rPr>
+              <a:t>Utilizando UML e padrões. Bookman Editora, 2007.</a:t>
+            </a:r>
+          </a:p>
+          <a:p>
+            <a:pPr marL="0" indent="0" algn="just">
+              <a:buNone/>
+            </a:pPr>
+            <a:endParaRPr lang="pt-BR" sz="2400" dirty="0">
+              <a:latin typeface="Times New Roman" panose="02020603050405020304" pitchFamily="18" charset="0"/>
+              <a:cs typeface="Times New Roman" panose="02020603050405020304" pitchFamily="18" charset="0"/>
+            </a:endParaRPr>
+          </a:p>
+          <a:p>
+            <a:pPr marL="0" indent="0" algn="just">
+              <a:buNone/>
+            </a:pPr>
+            <a:r>
+              <a:rPr lang="pt-BR" sz="2400" dirty="0">
+                <a:latin typeface="Times New Roman" panose="02020603050405020304" pitchFamily="18" charset="0"/>
+                <a:cs typeface="Times New Roman" panose="02020603050405020304" pitchFamily="18" charset="0"/>
+              </a:rPr>
+              <a:t>[2] </a:t>
+            </a:r>
+            <a:r>
+              <a:rPr lang="en-US" sz="2400" b="1" dirty="0">
+                <a:latin typeface="Times New Roman" panose="02020603050405020304" pitchFamily="18" charset="0"/>
+                <a:cs typeface="Times New Roman" panose="02020603050405020304" pitchFamily="18" charset="0"/>
+              </a:rPr>
+              <a:t>GIL, Joseph; MAMAN, </a:t>
+            </a:r>
+            <a:r>
+              <a:rPr lang="en-US" sz="2400" b="1" dirty="0" err="1">
+                <a:latin typeface="Times New Roman" panose="02020603050405020304" pitchFamily="18" charset="0"/>
+                <a:cs typeface="Times New Roman" panose="02020603050405020304" pitchFamily="18" charset="0"/>
+              </a:rPr>
+              <a:t>Itay</a:t>
+            </a:r>
+            <a:r>
+              <a:rPr lang="en-US" sz="2400" b="1" dirty="0">
+                <a:latin typeface="Times New Roman" panose="02020603050405020304" pitchFamily="18" charset="0"/>
+                <a:cs typeface="Times New Roman" panose="02020603050405020304" pitchFamily="18" charset="0"/>
+              </a:rPr>
+              <a:t>. </a:t>
+            </a:r>
+            <a:r>
+              <a:rPr lang="en-US" sz="2400" dirty="0">
+                <a:latin typeface="Times New Roman" panose="02020603050405020304" pitchFamily="18" charset="0"/>
+                <a:cs typeface="Times New Roman" panose="02020603050405020304" pitchFamily="18" charset="0"/>
+              </a:rPr>
+              <a:t>Micro patterns in Java code. In: Proceedings of the 20th annual ACM SIGPLAN conference on object-oriented programming, systems, languages, and applications. 2005. p. 97-116.</a:t>
+            </a:r>
+            <a:endParaRPr lang="pt-BR" sz="2400" dirty="0">
+              <a:latin typeface="Times New Roman" panose="02020603050405020304" pitchFamily="18" charset="0"/>
+              <a:cs typeface="Times New Roman" panose="02020603050405020304" pitchFamily="18" charset="0"/>
+            </a:endParaRPr>
+          </a:p>
+        </p:txBody>
+      </p:sp>
+    </p:spTree>
+    <p:extLst>
+      <p:ext uri="{BB962C8B-B14F-4D97-AF65-F5344CB8AC3E}">
+        <p14:creationId xmlns:p14="http://schemas.microsoft.com/office/powerpoint/2010/main" val="1115311843"/>
+      </p:ext>
+    </p:extLst>
+  </p:cSld>
+  <p:clrMapOvr>
+    <a:masterClrMapping/>
+  </p:clrMapOvr>
+  <p:transition spd="med"/>
+</p:sld>
+</file>
+
+<file path=ppt/slides/slide21.xml><?xml version="1.0" encoding="utf-8"?>
+<p:sld xmlns:a="http://schemas.openxmlformats.org/drawingml/2006/main" xmlns:r="http://schemas.openxmlformats.org/officeDocument/2006/relationships" xmlns:p="http://schemas.openxmlformats.org/presentationml/2006/main">
+  <p:cSld>
+    <p:spTree>
+      <p:nvGrpSpPr>
+        <p:cNvPr id="1" name=""/>
+        <p:cNvGrpSpPr/>
+        <p:nvPr/>
+      </p:nvGrpSpPr>
+      <p:grpSpPr>
+        <a:xfrm>
+          <a:off x="0" y="0"/>
+          <a:ext cx="0" cy="0"/>
+          <a:chOff x="0" y="0"/>
+          <a:chExt cx="0" cy="0"/>
+        </a:xfrm>
+      </p:grpSpPr>
       <p:pic>
         <p:nvPicPr>
           <p:cNvPr id="112" name="Picture 6" descr="Picture 6"/>
@@ -10667,18 +11627,18 @@
               <a:t>id </a:t>
             </a:r>
             <a:r>
-              <a:rPr lang="pt-BR" sz="1800" dirty="0" err="1">
-                <a:solidFill>
-                  <a:schemeClr val="tx1"/>
+              <a:rPr lang="pt-BR" sz="1800" b="1" dirty="0" err="1">
+                <a:solidFill>
+                  <a:srgbClr val="FF0000"/>
                 </a:solidFill>
                 <a:latin typeface="Times New Roman" panose="02020603050405020304" pitchFamily="18" charset="0"/>
                 <a:cs typeface="Times New Roman" panose="02020603050405020304" pitchFamily="18" charset="0"/>
               </a:rPr>
               <a:t>Long</a:t>
             </a:r>
-            <a:endParaRPr lang="pt-BR" sz="1800" dirty="0">
+            <a:endParaRPr lang="pt-BR" sz="1800" b="1" dirty="0">
               <a:solidFill>
-                <a:schemeClr val="tx1"/>
+                <a:srgbClr val="FF0000"/>
               </a:solidFill>
               <a:latin typeface="Times New Roman" panose="02020603050405020304" pitchFamily="18" charset="0"/>
               <a:cs typeface="Times New Roman" panose="02020603050405020304" pitchFamily="18" charset="0"/>
@@ -10709,18 +11669,18 @@
               <a:t> </a:t>
             </a:r>
             <a:r>
-              <a:rPr lang="pt-BR" sz="1800" dirty="0" err="1">
-                <a:solidFill>
-                  <a:schemeClr val="tx1"/>
+              <a:rPr lang="pt-BR" sz="1800" b="1" dirty="0" err="1">
+                <a:solidFill>
+                  <a:srgbClr val="FF0000"/>
                 </a:solidFill>
                 <a:latin typeface="Times New Roman" panose="02020603050405020304" pitchFamily="18" charset="0"/>
                 <a:cs typeface="Times New Roman" panose="02020603050405020304" pitchFamily="18" charset="0"/>
               </a:rPr>
               <a:t>String</a:t>
             </a:r>
-            <a:endParaRPr lang="pt-BR" sz="1800" dirty="0">
+            <a:endParaRPr lang="pt-BR" sz="1800" b="1" dirty="0">
               <a:solidFill>
-                <a:schemeClr val="tx1"/>
+                <a:srgbClr val="FF0000"/>
               </a:solidFill>
               <a:latin typeface="Times New Roman" panose="02020603050405020304" pitchFamily="18" charset="0"/>
               <a:cs typeface="Times New Roman" panose="02020603050405020304" pitchFamily="18" charset="0"/>
@@ -11012,18 +11972,18 @@
               <a:t>id </a:t>
             </a:r>
             <a:r>
-              <a:rPr lang="pt-BR" sz="1800" dirty="0" err="1">
-                <a:solidFill>
-                  <a:schemeClr val="tx1"/>
+              <a:rPr lang="pt-BR" sz="1800" b="1" dirty="0" err="1">
+                <a:solidFill>
+                  <a:srgbClr val="FF0000"/>
                 </a:solidFill>
                 <a:latin typeface="Times New Roman" panose="02020603050405020304" pitchFamily="18" charset="0"/>
                 <a:cs typeface="Times New Roman" panose="02020603050405020304" pitchFamily="18" charset="0"/>
               </a:rPr>
               <a:t>Long</a:t>
             </a:r>
-            <a:endParaRPr lang="pt-BR" sz="1800" dirty="0">
+            <a:endParaRPr lang="pt-BR" sz="1800" b="1" dirty="0">
               <a:solidFill>
-                <a:schemeClr val="tx1"/>
+                <a:srgbClr val="FF0000"/>
               </a:solidFill>
               <a:latin typeface="Times New Roman" panose="02020603050405020304" pitchFamily="18" charset="0"/>
               <a:cs typeface="Times New Roman" panose="02020603050405020304" pitchFamily="18" charset="0"/>
@@ -11054,18 +12014,18 @@
               <a:t> </a:t>
             </a:r>
             <a:r>
-              <a:rPr lang="pt-BR" sz="1800" dirty="0" err="1">
-                <a:solidFill>
-                  <a:schemeClr val="tx1"/>
+              <a:rPr lang="pt-BR" sz="1800" b="1" dirty="0" err="1">
+                <a:solidFill>
+                  <a:srgbClr val="FF0000"/>
                 </a:solidFill>
                 <a:latin typeface="Times New Roman" panose="02020603050405020304" pitchFamily="18" charset="0"/>
                 <a:cs typeface="Times New Roman" panose="02020603050405020304" pitchFamily="18" charset="0"/>
               </a:rPr>
               <a:t>String</a:t>
             </a:r>
-            <a:endParaRPr lang="pt-BR" sz="1800" dirty="0">
+            <a:endParaRPr lang="pt-BR" sz="1800" b="1" dirty="0">
               <a:solidFill>
-                <a:schemeClr val="tx1"/>
+                <a:srgbClr val="FF0000"/>
               </a:solidFill>
               <a:latin typeface="Times New Roman" panose="02020603050405020304" pitchFamily="18" charset="0"/>
               <a:cs typeface="Times New Roman" panose="02020603050405020304" pitchFamily="18" charset="0"/>
@@ -11096,18 +12056,18 @@
               <a:t> </a:t>
             </a:r>
             <a:r>
-              <a:rPr lang="pt-BR" sz="1800" dirty="0" err="1">
-                <a:solidFill>
-                  <a:schemeClr val="tx1"/>
+              <a:rPr lang="pt-BR" sz="1800" b="1" dirty="0" err="1">
+                <a:solidFill>
+                  <a:srgbClr val="FF0000"/>
                 </a:solidFill>
                 <a:latin typeface="Times New Roman" panose="02020603050405020304" pitchFamily="18" charset="0"/>
                 <a:cs typeface="Times New Roman" panose="02020603050405020304" pitchFamily="18" charset="0"/>
               </a:rPr>
               <a:t>String</a:t>
             </a:r>
-            <a:endParaRPr lang="pt-BR" sz="1800" dirty="0">
+            <a:endParaRPr lang="pt-BR" sz="1800" b="1" dirty="0">
               <a:solidFill>
-                <a:schemeClr val="tx1"/>
+                <a:srgbClr val="FF0000"/>
               </a:solidFill>
               <a:latin typeface="Times New Roman" panose="02020603050405020304" pitchFamily="18" charset="0"/>
               <a:cs typeface="Times New Roman" panose="02020603050405020304" pitchFamily="18" charset="0"/>
@@ -12247,6 +13207,96 @@
               <a:buNone/>
             </a:pPr>
             <a:r>
+              <a:rPr lang="pt-BR" sz="1800" dirty="0">
+                <a:solidFill>
+                  <a:schemeClr val="tx1"/>
+                </a:solidFill>
+                <a:latin typeface="Times New Roman" panose="02020603050405020304" pitchFamily="18" charset="0"/>
+                <a:cs typeface="Times New Roman" panose="02020603050405020304" pitchFamily="18" charset="0"/>
+              </a:rPr>
+              <a:t>@</a:t>
+            </a:r>
+            <a:r>
+              <a:rPr lang="pt-BR" sz="1800" b="1" dirty="0">
+                <a:solidFill>
+                  <a:schemeClr val="tx1"/>
+                </a:solidFill>
+                <a:latin typeface="Times New Roman" panose="02020603050405020304" pitchFamily="18" charset="0"/>
+                <a:cs typeface="Times New Roman" panose="02020603050405020304" pitchFamily="18" charset="0"/>
+              </a:rPr>
+              <a:t>RequestMapping</a:t>
+            </a:r>
+            <a:r>
+              <a:rPr lang="pt-BR" sz="1800" dirty="0">
+                <a:solidFill>
+                  <a:schemeClr val="tx1"/>
+                </a:solidFill>
+                <a:latin typeface="Times New Roman" panose="02020603050405020304" pitchFamily="18" charset="0"/>
+                <a:cs typeface="Times New Roman" panose="02020603050405020304" pitchFamily="18" charset="0"/>
+              </a:rPr>
+              <a:t>(value = "/caminho")</a:t>
+            </a:r>
+          </a:p>
+          <a:p>
+            <a:pPr marL="0" indent="0" algn="just">
+              <a:buNone/>
+            </a:pPr>
+            <a:r>
+              <a:rPr lang="pt-BR" sz="1800" dirty="0">
+                <a:solidFill>
+                  <a:schemeClr val="tx1"/>
+                </a:solidFill>
+                <a:latin typeface="Times New Roman" panose="02020603050405020304" pitchFamily="18" charset="0"/>
+                <a:cs typeface="Times New Roman" panose="02020603050405020304" pitchFamily="18" charset="0"/>
+              </a:rPr>
+              <a:t>@</a:t>
+            </a:r>
+            <a:r>
+              <a:rPr lang="pt-BR" sz="1800" b="1" dirty="0">
+                <a:solidFill>
+                  <a:schemeClr val="tx1"/>
+                </a:solidFill>
+                <a:latin typeface="Times New Roman" panose="02020603050405020304" pitchFamily="18" charset="0"/>
+                <a:cs typeface="Times New Roman" panose="02020603050405020304" pitchFamily="18" charset="0"/>
+              </a:rPr>
+              <a:t>Autowired</a:t>
+            </a:r>
+            <a:r>
+              <a:rPr lang="pt-BR" sz="1800" dirty="0">
+                <a:solidFill>
+                  <a:schemeClr val="tx1"/>
+                </a:solidFill>
+                <a:latin typeface="Times New Roman" panose="02020603050405020304" pitchFamily="18" charset="0"/>
+                <a:cs typeface="Times New Roman" panose="02020603050405020304" pitchFamily="18" charset="0"/>
+              </a:rPr>
+              <a:t> // </a:t>
+            </a:r>
+            <a:r>
+              <a:rPr lang="pt-BR" sz="1800" b="1" dirty="0">
+                <a:solidFill>
+                  <a:srgbClr val="FF0000"/>
+                </a:solidFill>
+                <a:latin typeface="Times New Roman" panose="02020603050405020304" pitchFamily="18" charset="0"/>
+                <a:cs typeface="Times New Roman" panose="02020603050405020304" pitchFamily="18" charset="0"/>
+              </a:rPr>
+              <a:t>componente</a:t>
+            </a:r>
+            <a:r>
+              <a:rPr lang="pt-BR" sz="1800" dirty="0">
+                <a:solidFill>
+                  <a:schemeClr val="tx1"/>
+                </a:solidFill>
+                <a:latin typeface="Times New Roman" panose="02020603050405020304" pitchFamily="18" charset="0"/>
+                <a:cs typeface="Times New Roman" panose="02020603050405020304" pitchFamily="18" charset="0"/>
+              </a:rPr>
+              <a:t>, injeção de dependência</a:t>
+            </a:r>
+          </a:p>
+          <a:p>
+            <a:pPr marL="0" indent="0" algn="just">
+              <a:buNone/>
+            </a:pPr>
+            <a:r>
               <a:rPr lang="pt-BR" sz="1800" b="1" dirty="0" err="1">
                 <a:solidFill>
                   <a:schemeClr val="tx1"/>
@@ -12376,96 +13426,13 @@
               </a:rPr>
               <a:t>camada model</a:t>
             </a:r>
-          </a:p>
-          <a:p>
-            <a:pPr marL="0" indent="0" algn="just">
-              <a:buNone/>
-            </a:pPr>
-            <a:r>
-              <a:rPr lang="pt-BR" sz="1800" dirty="0">
-                <a:solidFill>
-                  <a:schemeClr val="tx1"/>
-                </a:solidFill>
-                <a:latin typeface="Times New Roman" panose="02020603050405020304" pitchFamily="18" charset="0"/>
-                <a:cs typeface="Times New Roman" panose="02020603050405020304" pitchFamily="18" charset="0"/>
-              </a:rPr>
-              <a:t>@</a:t>
-            </a:r>
-            <a:r>
-              <a:rPr lang="pt-BR" sz="1800" b="1" dirty="0">
-                <a:solidFill>
-                  <a:schemeClr val="tx1"/>
-                </a:solidFill>
-                <a:latin typeface="Times New Roman" panose="02020603050405020304" pitchFamily="18" charset="0"/>
-                <a:cs typeface="Times New Roman" panose="02020603050405020304" pitchFamily="18" charset="0"/>
-              </a:rPr>
-              <a:t>RequestMapping</a:t>
-            </a:r>
-            <a:r>
-              <a:rPr lang="pt-BR" sz="1800" dirty="0">
-                <a:solidFill>
-                  <a:schemeClr val="tx1"/>
-                </a:solidFill>
-                <a:latin typeface="Times New Roman" panose="02020603050405020304" pitchFamily="18" charset="0"/>
-                <a:cs typeface="Times New Roman" panose="02020603050405020304" pitchFamily="18" charset="0"/>
-              </a:rPr>
-              <a:t>(value = "/caminho")</a:t>
-            </a:r>
-          </a:p>
-          <a:p>
-            <a:pPr marL="0" indent="0" algn="just">
-              <a:buNone/>
-            </a:pPr>
-            <a:r>
-              <a:rPr lang="pt-BR" sz="1800" dirty="0">
-                <a:solidFill>
-                  <a:schemeClr val="tx1"/>
-                </a:solidFill>
-                <a:latin typeface="Times New Roman" panose="02020603050405020304" pitchFamily="18" charset="0"/>
-                <a:cs typeface="Times New Roman" panose="02020603050405020304" pitchFamily="18" charset="0"/>
-              </a:rPr>
-              <a:t>@</a:t>
-            </a:r>
-            <a:r>
-              <a:rPr lang="pt-BR" sz="1800" b="1" dirty="0">
-                <a:solidFill>
-                  <a:schemeClr val="tx1"/>
-                </a:solidFill>
-                <a:latin typeface="Times New Roman" panose="02020603050405020304" pitchFamily="18" charset="0"/>
-                <a:cs typeface="Times New Roman" panose="02020603050405020304" pitchFamily="18" charset="0"/>
-              </a:rPr>
-              <a:t>Autowired</a:t>
-            </a:r>
-            <a:r>
-              <a:rPr lang="pt-BR" sz="1800" dirty="0">
-                <a:solidFill>
-                  <a:schemeClr val="tx1"/>
-                </a:solidFill>
-                <a:latin typeface="Times New Roman" panose="02020603050405020304" pitchFamily="18" charset="0"/>
-                <a:cs typeface="Times New Roman" panose="02020603050405020304" pitchFamily="18" charset="0"/>
-              </a:rPr>
-              <a:t> // </a:t>
-            </a:r>
-            <a:r>
-              <a:rPr lang="pt-BR" sz="1800" b="1" dirty="0">
-                <a:solidFill>
-                  <a:srgbClr val="FF0000"/>
-                </a:solidFill>
-                <a:latin typeface="Times New Roman" panose="02020603050405020304" pitchFamily="18" charset="0"/>
-                <a:cs typeface="Times New Roman" panose="02020603050405020304" pitchFamily="18" charset="0"/>
-              </a:rPr>
-              <a:t>componente</a:t>
-            </a:r>
-            <a:r>
-              <a:rPr lang="pt-BR" sz="1800" dirty="0">
-                <a:solidFill>
-                  <a:schemeClr val="tx1"/>
-                </a:solidFill>
-                <a:latin typeface="Times New Roman" panose="02020603050405020304" pitchFamily="18" charset="0"/>
-                <a:cs typeface="Times New Roman" panose="02020603050405020304" pitchFamily="18" charset="0"/>
-              </a:rPr>
-              <a:t>, injeção de dependência</a:t>
-            </a:r>
+            <a:endParaRPr lang="pt-BR" sz="1800" dirty="0">
+              <a:solidFill>
+                <a:schemeClr val="tx1"/>
+              </a:solidFill>
+              <a:latin typeface="Times New Roman" panose="02020603050405020304" pitchFamily="18" charset="0"/>
+              <a:cs typeface="Times New Roman" panose="02020603050405020304" pitchFamily="18" charset="0"/>
+            </a:endParaRPr>
           </a:p>
         </p:txBody>
       </p:sp>
